--- a/docs/CaseLogic_7min_Presentation.pptx
+++ b/docs/CaseLogic_7min_Presentation.pptx
@@ -115,11 +115,6 @@
       </a:defRPr>
     </a:lvl9pPr>
   </p:defaultTextStyle>
-  <p:extLst>
-    <p:ext uri="{EFAFB233-063F-42B5-8137-9DF3F51BA10A}">
-      <p15:sldGuideLst xmlns:p15="http://schemas.microsoft.com/office/powerpoint/2012/main"/>
-    </p:ext>
-  </p:extLst>
 </p:presentation>
 </file>
 
@@ -203,7 +198,7 @@
             </a:lvl1pPr>
           </a:lstStyle>
           <a:p>
-            <a:fld id="{15DC3E24-826D-4FAF-9F1D-7AE1F9604576}" type="datetimeFigureOut">
+            <a:fld id="{CD05AB4F-4C90-4D0D-B52F-4ACA58A63BB1}" type="datetimeFigureOut">
               <a:rPr lang="en-US" smtClean="0"/>
               <a:t>5/9/2026</a:t>
             </a:fld>
@@ -362,7 +357,7 @@
             </a:lvl1pPr>
           </a:lstStyle>
           <a:p>
-            <a:fld id="{B5BF611C-EABA-48C0-8BCF-1D9FD08F51CE}" type="slidenum">
+            <a:fld id="{6FE4274C-FCD7-483A-85E3-8B6A5698343E}" type="slidenum">
               <a:rPr lang="en-US" smtClean="0"/>
               <a:t>‹#›</a:t>
             </a:fld>
@@ -373,7 +368,7 @@
     </p:spTree>
     <p:extLst>
       <p:ext uri="{BB962C8B-B14F-4D97-AF65-F5344CB8AC3E}">
-        <p14:creationId xmlns:p14="http://schemas.microsoft.com/office/powerpoint/2010/main" val="2817851431"/>
+        <p14:creationId xmlns:p14="http://schemas.microsoft.com/office/powerpoint/2010/main" val="493126224"/>
       </p:ext>
     </p:extLst>
   </p:cSld>
@@ -547,7 +542,7 @@
           <a:bodyPr/>
           <a:lstStyle/>
           <a:p>
-            <a:fld id="{B5BF611C-EABA-48C0-8BCF-1D9FD08F51CE}" type="slidenum">
+            <a:fld id="{6FE4274C-FCD7-483A-85E3-8B6A5698343E}" type="slidenum">
               <a:rPr lang="en-US" smtClean="0"/>
               <a:t>1</a:t>
             </a:fld>
@@ -558,7 +553,7 @@
     </p:spTree>
     <p:extLst>
       <p:ext uri="{BB962C8B-B14F-4D97-AF65-F5344CB8AC3E}">
-        <p14:creationId xmlns:p14="http://schemas.microsoft.com/office/powerpoint/2010/main" val="18532342"/>
+        <p14:creationId xmlns:p14="http://schemas.microsoft.com/office/powerpoint/2010/main" val="2053286643"/>
       </p:ext>
     </p:extLst>
   </p:cSld>
@@ -642,7 +637,7 @@
           <a:bodyPr/>
           <a:lstStyle/>
           <a:p>
-            <a:fld id="{B5BF611C-EABA-48C0-8BCF-1D9FD08F51CE}" type="slidenum">
+            <a:fld id="{6FE4274C-FCD7-483A-85E3-8B6A5698343E}" type="slidenum">
               <a:rPr lang="en-US" smtClean="0"/>
               <a:t>2</a:t>
             </a:fld>
@@ -653,7 +648,7 @@
     </p:spTree>
     <p:extLst>
       <p:ext uri="{BB962C8B-B14F-4D97-AF65-F5344CB8AC3E}">
-        <p14:creationId xmlns:p14="http://schemas.microsoft.com/office/powerpoint/2010/main" val="478102534"/>
+        <p14:creationId xmlns:p14="http://schemas.microsoft.com/office/powerpoint/2010/main" val="3010370551"/>
       </p:ext>
     </p:extLst>
   </p:cSld>
@@ -737,7 +732,7 @@
           <a:bodyPr/>
           <a:lstStyle/>
           <a:p>
-            <a:fld id="{B5BF611C-EABA-48C0-8BCF-1D9FD08F51CE}" type="slidenum">
+            <a:fld id="{6FE4274C-FCD7-483A-85E3-8B6A5698343E}" type="slidenum">
               <a:rPr lang="en-US" smtClean="0"/>
               <a:t>3</a:t>
             </a:fld>
@@ -748,7 +743,7 @@
     </p:spTree>
     <p:extLst>
       <p:ext uri="{BB962C8B-B14F-4D97-AF65-F5344CB8AC3E}">
-        <p14:creationId xmlns:p14="http://schemas.microsoft.com/office/powerpoint/2010/main" val="3521556751"/>
+        <p14:creationId xmlns:p14="http://schemas.microsoft.com/office/powerpoint/2010/main" val="1808158139"/>
       </p:ext>
     </p:extLst>
   </p:cSld>
@@ -832,7 +827,7 @@
           <a:bodyPr/>
           <a:lstStyle/>
           <a:p>
-            <a:fld id="{B5BF611C-EABA-48C0-8BCF-1D9FD08F51CE}" type="slidenum">
+            <a:fld id="{6FE4274C-FCD7-483A-85E3-8B6A5698343E}" type="slidenum">
               <a:rPr lang="en-US" smtClean="0"/>
               <a:t>4</a:t>
             </a:fld>
@@ -843,7 +838,7 @@
     </p:spTree>
     <p:extLst>
       <p:ext uri="{BB962C8B-B14F-4D97-AF65-F5344CB8AC3E}">
-        <p14:creationId xmlns:p14="http://schemas.microsoft.com/office/powerpoint/2010/main" val="1733631367"/>
+        <p14:creationId xmlns:p14="http://schemas.microsoft.com/office/powerpoint/2010/main" val="591918485"/>
       </p:ext>
     </p:extLst>
   </p:cSld>
@@ -927,7 +922,7 @@
           <a:bodyPr/>
           <a:lstStyle/>
           <a:p>
-            <a:fld id="{B5BF611C-EABA-48C0-8BCF-1D9FD08F51CE}" type="slidenum">
+            <a:fld id="{6FE4274C-FCD7-483A-85E3-8B6A5698343E}" type="slidenum">
               <a:rPr lang="en-US" smtClean="0"/>
               <a:t>5</a:t>
             </a:fld>
@@ -938,7 +933,7 @@
     </p:spTree>
     <p:extLst>
       <p:ext uri="{BB962C8B-B14F-4D97-AF65-F5344CB8AC3E}">
-        <p14:creationId xmlns:p14="http://schemas.microsoft.com/office/powerpoint/2010/main" val="3969441045"/>
+        <p14:creationId xmlns:p14="http://schemas.microsoft.com/office/powerpoint/2010/main" val="3749910587"/>
       </p:ext>
     </p:extLst>
   </p:cSld>
@@ -1022,7 +1017,7 @@
           <a:bodyPr/>
           <a:lstStyle/>
           <a:p>
-            <a:fld id="{B5BF611C-EABA-48C0-8BCF-1D9FD08F51CE}" type="slidenum">
+            <a:fld id="{6FE4274C-FCD7-483A-85E3-8B6A5698343E}" type="slidenum">
               <a:rPr lang="en-US" smtClean="0"/>
               <a:t>6</a:t>
             </a:fld>
@@ -1033,7 +1028,7 @@
     </p:spTree>
     <p:extLst>
       <p:ext uri="{BB962C8B-B14F-4D97-AF65-F5344CB8AC3E}">
-        <p14:creationId xmlns:p14="http://schemas.microsoft.com/office/powerpoint/2010/main" val="2355663694"/>
+        <p14:creationId xmlns:p14="http://schemas.microsoft.com/office/powerpoint/2010/main" val="1811560659"/>
       </p:ext>
     </p:extLst>
   </p:cSld>
@@ -1117,7 +1112,7 @@
           <a:bodyPr/>
           <a:lstStyle/>
           <a:p>
-            <a:fld id="{B5BF611C-EABA-48C0-8BCF-1D9FD08F51CE}" type="slidenum">
+            <a:fld id="{6FE4274C-FCD7-483A-85E3-8B6A5698343E}" type="slidenum">
               <a:rPr lang="en-US" smtClean="0"/>
               <a:t>7</a:t>
             </a:fld>
@@ -1128,7 +1123,7 @@
     </p:spTree>
     <p:extLst>
       <p:ext uri="{BB962C8B-B14F-4D97-AF65-F5344CB8AC3E}">
-        <p14:creationId xmlns:p14="http://schemas.microsoft.com/office/powerpoint/2010/main" val="2848638094"/>
+        <p14:creationId xmlns:p14="http://schemas.microsoft.com/office/powerpoint/2010/main" val="2244419435"/>
       </p:ext>
     </p:extLst>
   </p:cSld>
@@ -1212,7 +1207,7 @@
           <a:bodyPr/>
           <a:lstStyle/>
           <a:p>
-            <a:fld id="{B5BF611C-EABA-48C0-8BCF-1D9FD08F51CE}" type="slidenum">
+            <a:fld id="{6FE4274C-FCD7-483A-85E3-8B6A5698343E}" type="slidenum">
               <a:rPr lang="en-US" smtClean="0"/>
               <a:t>8</a:t>
             </a:fld>
@@ -1223,7 +1218,7 @@
     </p:spTree>
     <p:extLst>
       <p:ext uri="{BB962C8B-B14F-4D97-AF65-F5344CB8AC3E}">
-        <p14:creationId xmlns:p14="http://schemas.microsoft.com/office/powerpoint/2010/main" val="2968024413"/>
+        <p14:creationId xmlns:p14="http://schemas.microsoft.com/office/powerpoint/2010/main" val="3249695117"/>
       </p:ext>
     </p:extLst>
   </p:cSld>
@@ -1307,7 +1302,7 @@
           <a:bodyPr/>
           <a:lstStyle/>
           <a:p>
-            <a:fld id="{B5BF611C-EABA-48C0-8BCF-1D9FD08F51CE}" type="slidenum">
+            <a:fld id="{6FE4274C-FCD7-483A-85E3-8B6A5698343E}" type="slidenum">
               <a:rPr lang="en-US" smtClean="0"/>
               <a:t>9</a:t>
             </a:fld>
@@ -1318,7 +1313,7 @@
     </p:spTree>
     <p:extLst>
       <p:ext uri="{BB962C8B-B14F-4D97-AF65-F5344CB8AC3E}">
-        <p14:creationId xmlns:p14="http://schemas.microsoft.com/office/powerpoint/2010/main" val="338752951"/>
+        <p14:creationId xmlns:p14="http://schemas.microsoft.com/office/powerpoint/2010/main" val="1794669159"/>
       </p:ext>
     </p:extLst>
   </p:cSld>
@@ -1457,7 +1452,7 @@
           <a:bodyPr/>
           <a:lstStyle/>
           <a:p>
-            <a:fld id="{528CD23E-B644-4C34-8523-F897A90474B3}" type="datetimeFigureOut">
+            <a:fld id="{18878C53-8196-4AC5-A711-6FE03EC2F8E8}" type="datetimeFigureOut">
               <a:rPr lang="en-US" smtClean="0"/>
               <a:t>5/9/2026</a:t>
             </a:fld>
@@ -1499,7 +1494,7 @@
           <a:bodyPr/>
           <a:lstStyle/>
           <a:p>
-            <a:fld id="{B801AB65-2E18-4EBA-AECC-C703B9DF2DBC}" type="slidenum">
+            <a:fld id="{FCDF5F92-8D5B-4494-8B76-3034457698A3}" type="slidenum">
               <a:rPr lang="en-US" smtClean="0"/>
               <a:t>‹#›</a:t>
             </a:fld>
@@ -1510,7 +1505,7 @@
     </p:spTree>
     <p:extLst>
       <p:ext uri="{BB962C8B-B14F-4D97-AF65-F5344CB8AC3E}">
-        <p14:creationId xmlns:p14="http://schemas.microsoft.com/office/powerpoint/2010/main" val="2259787867"/>
+        <p14:creationId xmlns:p14="http://schemas.microsoft.com/office/powerpoint/2010/main" val="3489136675"/>
       </p:ext>
     </p:extLst>
   </p:cSld>
@@ -1627,7 +1622,7 @@
           <a:bodyPr/>
           <a:lstStyle/>
           <a:p>
-            <a:fld id="{528CD23E-B644-4C34-8523-F897A90474B3}" type="datetimeFigureOut">
+            <a:fld id="{18878C53-8196-4AC5-A711-6FE03EC2F8E8}" type="datetimeFigureOut">
               <a:rPr lang="en-US" smtClean="0"/>
               <a:t>5/9/2026</a:t>
             </a:fld>
@@ -1669,7 +1664,7 @@
           <a:bodyPr/>
           <a:lstStyle/>
           <a:p>
-            <a:fld id="{B801AB65-2E18-4EBA-AECC-C703B9DF2DBC}" type="slidenum">
+            <a:fld id="{FCDF5F92-8D5B-4494-8B76-3034457698A3}" type="slidenum">
               <a:rPr lang="en-US" smtClean="0"/>
               <a:t>‹#›</a:t>
             </a:fld>
@@ -1680,7 +1675,7 @@
     </p:spTree>
     <p:extLst>
       <p:ext uri="{BB962C8B-B14F-4D97-AF65-F5344CB8AC3E}">
-        <p14:creationId xmlns:p14="http://schemas.microsoft.com/office/powerpoint/2010/main" val="4225074637"/>
+        <p14:creationId xmlns:p14="http://schemas.microsoft.com/office/powerpoint/2010/main" val="3888054128"/>
       </p:ext>
     </p:extLst>
   </p:cSld>
@@ -1807,7 +1802,7 @@
           <a:bodyPr/>
           <a:lstStyle/>
           <a:p>
-            <a:fld id="{528CD23E-B644-4C34-8523-F897A90474B3}" type="datetimeFigureOut">
+            <a:fld id="{18878C53-8196-4AC5-A711-6FE03EC2F8E8}" type="datetimeFigureOut">
               <a:rPr lang="en-US" smtClean="0"/>
               <a:t>5/9/2026</a:t>
             </a:fld>
@@ -1849,7 +1844,7 @@
           <a:bodyPr/>
           <a:lstStyle/>
           <a:p>
-            <a:fld id="{B801AB65-2E18-4EBA-AECC-C703B9DF2DBC}" type="slidenum">
+            <a:fld id="{FCDF5F92-8D5B-4494-8B76-3034457698A3}" type="slidenum">
               <a:rPr lang="en-US" smtClean="0"/>
               <a:t>‹#›</a:t>
             </a:fld>
@@ -1860,7 +1855,7 @@
     </p:spTree>
     <p:extLst>
       <p:ext uri="{BB962C8B-B14F-4D97-AF65-F5344CB8AC3E}">
-        <p14:creationId xmlns:p14="http://schemas.microsoft.com/office/powerpoint/2010/main" val="3786967962"/>
+        <p14:creationId xmlns:p14="http://schemas.microsoft.com/office/powerpoint/2010/main" val="872236024"/>
       </p:ext>
     </p:extLst>
   </p:cSld>
@@ -1977,7 +1972,7 @@
           <a:bodyPr/>
           <a:lstStyle/>
           <a:p>
-            <a:fld id="{528CD23E-B644-4C34-8523-F897A90474B3}" type="datetimeFigureOut">
+            <a:fld id="{18878C53-8196-4AC5-A711-6FE03EC2F8E8}" type="datetimeFigureOut">
               <a:rPr lang="en-US" smtClean="0"/>
               <a:t>5/9/2026</a:t>
             </a:fld>
@@ -2019,7 +2014,7 @@
           <a:bodyPr/>
           <a:lstStyle/>
           <a:p>
-            <a:fld id="{B801AB65-2E18-4EBA-AECC-C703B9DF2DBC}" type="slidenum">
+            <a:fld id="{FCDF5F92-8D5B-4494-8B76-3034457698A3}" type="slidenum">
               <a:rPr lang="en-US" smtClean="0"/>
               <a:t>‹#›</a:t>
             </a:fld>
@@ -2030,7 +2025,7 @@
     </p:spTree>
     <p:extLst>
       <p:ext uri="{BB962C8B-B14F-4D97-AF65-F5344CB8AC3E}">
-        <p14:creationId xmlns:p14="http://schemas.microsoft.com/office/powerpoint/2010/main" val="942769525"/>
+        <p14:creationId xmlns:p14="http://schemas.microsoft.com/office/powerpoint/2010/main" val="2618850305"/>
       </p:ext>
     </p:extLst>
   </p:cSld>
@@ -2223,7 +2218,7 @@
           <a:bodyPr/>
           <a:lstStyle/>
           <a:p>
-            <a:fld id="{528CD23E-B644-4C34-8523-F897A90474B3}" type="datetimeFigureOut">
+            <a:fld id="{18878C53-8196-4AC5-A711-6FE03EC2F8E8}" type="datetimeFigureOut">
               <a:rPr lang="en-US" smtClean="0"/>
               <a:t>5/9/2026</a:t>
             </a:fld>
@@ -2265,7 +2260,7 @@
           <a:bodyPr/>
           <a:lstStyle/>
           <a:p>
-            <a:fld id="{B801AB65-2E18-4EBA-AECC-C703B9DF2DBC}" type="slidenum">
+            <a:fld id="{FCDF5F92-8D5B-4494-8B76-3034457698A3}" type="slidenum">
               <a:rPr lang="en-US" smtClean="0"/>
               <a:t>‹#›</a:t>
             </a:fld>
@@ -2276,7 +2271,7 @@
     </p:spTree>
     <p:extLst>
       <p:ext uri="{BB962C8B-B14F-4D97-AF65-F5344CB8AC3E}">
-        <p14:creationId xmlns:p14="http://schemas.microsoft.com/office/powerpoint/2010/main" val="2235347182"/>
+        <p14:creationId xmlns:p14="http://schemas.microsoft.com/office/powerpoint/2010/main" val="2007909569"/>
       </p:ext>
     </p:extLst>
   </p:cSld>
@@ -2455,7 +2450,7 @@
           <a:bodyPr/>
           <a:lstStyle/>
           <a:p>
-            <a:fld id="{528CD23E-B644-4C34-8523-F897A90474B3}" type="datetimeFigureOut">
+            <a:fld id="{18878C53-8196-4AC5-A711-6FE03EC2F8E8}" type="datetimeFigureOut">
               <a:rPr lang="en-US" smtClean="0"/>
               <a:t>5/9/2026</a:t>
             </a:fld>
@@ -2497,7 +2492,7 @@
           <a:bodyPr/>
           <a:lstStyle/>
           <a:p>
-            <a:fld id="{B801AB65-2E18-4EBA-AECC-C703B9DF2DBC}" type="slidenum">
+            <a:fld id="{FCDF5F92-8D5B-4494-8B76-3034457698A3}" type="slidenum">
               <a:rPr lang="en-US" smtClean="0"/>
               <a:t>‹#›</a:t>
             </a:fld>
@@ -2508,7 +2503,7 @@
     </p:spTree>
     <p:extLst>
       <p:ext uri="{BB962C8B-B14F-4D97-AF65-F5344CB8AC3E}">
-        <p14:creationId xmlns:p14="http://schemas.microsoft.com/office/powerpoint/2010/main" val="815728288"/>
+        <p14:creationId xmlns:p14="http://schemas.microsoft.com/office/powerpoint/2010/main" val="807362393"/>
       </p:ext>
     </p:extLst>
   </p:cSld>
@@ -2822,7 +2817,7 @@
           <a:bodyPr/>
           <a:lstStyle/>
           <a:p>
-            <a:fld id="{528CD23E-B644-4C34-8523-F897A90474B3}" type="datetimeFigureOut">
+            <a:fld id="{18878C53-8196-4AC5-A711-6FE03EC2F8E8}" type="datetimeFigureOut">
               <a:rPr lang="en-US" smtClean="0"/>
               <a:t>5/9/2026</a:t>
             </a:fld>
@@ -2864,7 +2859,7 @@
           <a:bodyPr/>
           <a:lstStyle/>
           <a:p>
-            <a:fld id="{B801AB65-2E18-4EBA-AECC-C703B9DF2DBC}" type="slidenum">
+            <a:fld id="{FCDF5F92-8D5B-4494-8B76-3034457698A3}" type="slidenum">
               <a:rPr lang="en-US" smtClean="0"/>
               <a:t>‹#›</a:t>
             </a:fld>
@@ -2875,7 +2870,7 @@
     </p:spTree>
     <p:extLst>
       <p:ext uri="{BB962C8B-B14F-4D97-AF65-F5344CB8AC3E}">
-        <p14:creationId xmlns:p14="http://schemas.microsoft.com/office/powerpoint/2010/main" val="2570217027"/>
+        <p14:creationId xmlns:p14="http://schemas.microsoft.com/office/powerpoint/2010/main" val="2689383887"/>
       </p:ext>
     </p:extLst>
   </p:cSld>
@@ -2940,7 +2935,7 @@
           <a:bodyPr/>
           <a:lstStyle/>
           <a:p>
-            <a:fld id="{528CD23E-B644-4C34-8523-F897A90474B3}" type="datetimeFigureOut">
+            <a:fld id="{18878C53-8196-4AC5-A711-6FE03EC2F8E8}" type="datetimeFigureOut">
               <a:rPr lang="en-US" smtClean="0"/>
               <a:t>5/9/2026</a:t>
             </a:fld>
@@ -2982,7 +2977,7 @@
           <a:bodyPr/>
           <a:lstStyle/>
           <a:p>
-            <a:fld id="{B801AB65-2E18-4EBA-AECC-C703B9DF2DBC}" type="slidenum">
+            <a:fld id="{FCDF5F92-8D5B-4494-8B76-3034457698A3}" type="slidenum">
               <a:rPr lang="en-US" smtClean="0"/>
               <a:t>‹#›</a:t>
             </a:fld>
@@ -2993,7 +2988,7 @@
     </p:spTree>
     <p:extLst>
       <p:ext uri="{BB962C8B-B14F-4D97-AF65-F5344CB8AC3E}">
-        <p14:creationId xmlns:p14="http://schemas.microsoft.com/office/powerpoint/2010/main" val="1237570607"/>
+        <p14:creationId xmlns:p14="http://schemas.microsoft.com/office/powerpoint/2010/main" val="2733360245"/>
       </p:ext>
     </p:extLst>
   </p:cSld>
@@ -3035,7 +3030,7 @@
           <a:bodyPr/>
           <a:lstStyle/>
           <a:p>
-            <a:fld id="{528CD23E-B644-4C34-8523-F897A90474B3}" type="datetimeFigureOut">
+            <a:fld id="{18878C53-8196-4AC5-A711-6FE03EC2F8E8}" type="datetimeFigureOut">
               <a:rPr lang="en-US" smtClean="0"/>
               <a:t>5/9/2026</a:t>
             </a:fld>
@@ -3077,7 +3072,7 @@
           <a:bodyPr/>
           <a:lstStyle/>
           <a:p>
-            <a:fld id="{B801AB65-2E18-4EBA-AECC-C703B9DF2DBC}" type="slidenum">
+            <a:fld id="{FCDF5F92-8D5B-4494-8B76-3034457698A3}" type="slidenum">
               <a:rPr lang="en-US" smtClean="0"/>
               <a:t>‹#›</a:t>
             </a:fld>
@@ -3088,7 +3083,7 @@
     </p:spTree>
     <p:extLst>
       <p:ext uri="{BB962C8B-B14F-4D97-AF65-F5344CB8AC3E}">
-        <p14:creationId xmlns:p14="http://schemas.microsoft.com/office/powerpoint/2010/main" val="1520588668"/>
+        <p14:creationId xmlns:p14="http://schemas.microsoft.com/office/powerpoint/2010/main" val="748756591"/>
       </p:ext>
     </p:extLst>
   </p:cSld>
@@ -3312,7 +3307,7 @@
           <a:bodyPr/>
           <a:lstStyle/>
           <a:p>
-            <a:fld id="{528CD23E-B644-4C34-8523-F897A90474B3}" type="datetimeFigureOut">
+            <a:fld id="{18878C53-8196-4AC5-A711-6FE03EC2F8E8}" type="datetimeFigureOut">
               <a:rPr lang="en-US" smtClean="0"/>
               <a:t>5/9/2026</a:t>
             </a:fld>
@@ -3354,7 +3349,7 @@
           <a:bodyPr/>
           <a:lstStyle/>
           <a:p>
-            <a:fld id="{B801AB65-2E18-4EBA-AECC-C703B9DF2DBC}" type="slidenum">
+            <a:fld id="{FCDF5F92-8D5B-4494-8B76-3034457698A3}" type="slidenum">
               <a:rPr lang="en-US" smtClean="0"/>
               <a:t>‹#›</a:t>
             </a:fld>
@@ -3365,7 +3360,7 @@
     </p:spTree>
     <p:extLst>
       <p:ext uri="{BB962C8B-B14F-4D97-AF65-F5344CB8AC3E}">
-        <p14:creationId xmlns:p14="http://schemas.microsoft.com/office/powerpoint/2010/main" val="1543631636"/>
+        <p14:creationId xmlns:p14="http://schemas.microsoft.com/office/powerpoint/2010/main" val="3506799371"/>
       </p:ext>
     </p:extLst>
   </p:cSld>
@@ -3565,7 +3560,7 @@
           <a:bodyPr/>
           <a:lstStyle/>
           <a:p>
-            <a:fld id="{528CD23E-B644-4C34-8523-F897A90474B3}" type="datetimeFigureOut">
+            <a:fld id="{18878C53-8196-4AC5-A711-6FE03EC2F8E8}" type="datetimeFigureOut">
               <a:rPr lang="en-US" smtClean="0"/>
               <a:t>5/9/2026</a:t>
             </a:fld>
@@ -3607,7 +3602,7 @@
           <a:bodyPr/>
           <a:lstStyle/>
           <a:p>
-            <a:fld id="{B801AB65-2E18-4EBA-AECC-C703B9DF2DBC}" type="slidenum">
+            <a:fld id="{FCDF5F92-8D5B-4494-8B76-3034457698A3}" type="slidenum">
               <a:rPr lang="en-US" smtClean="0"/>
               <a:t>‹#›</a:t>
             </a:fld>
@@ -3618,7 +3613,7 @@
     </p:spTree>
     <p:extLst>
       <p:ext uri="{BB962C8B-B14F-4D97-AF65-F5344CB8AC3E}">
-        <p14:creationId xmlns:p14="http://schemas.microsoft.com/office/powerpoint/2010/main" val="3059518937"/>
+        <p14:creationId xmlns:p14="http://schemas.microsoft.com/office/powerpoint/2010/main" val="945325682"/>
       </p:ext>
     </p:extLst>
   </p:cSld>
@@ -3778,7 +3773,7 @@
             </a:lvl1pPr>
           </a:lstStyle>
           <a:p>
-            <a:fld id="{528CD23E-B644-4C34-8523-F897A90474B3}" type="datetimeFigureOut">
+            <a:fld id="{18878C53-8196-4AC5-A711-6FE03EC2F8E8}" type="datetimeFigureOut">
               <a:rPr lang="en-US" smtClean="0"/>
               <a:t>5/9/2026</a:t>
             </a:fld>
@@ -3856,7 +3851,7 @@
             </a:lvl1pPr>
           </a:lstStyle>
           <a:p>
-            <a:fld id="{B801AB65-2E18-4EBA-AECC-C703B9DF2DBC}" type="slidenum">
+            <a:fld id="{FCDF5F92-8D5B-4494-8B76-3034457698A3}" type="slidenum">
               <a:rPr lang="en-US" smtClean="0"/>
               <a:t>‹#›</a:t>
             </a:fld>
@@ -3867,7 +3862,7 @@
     </p:spTree>
     <p:extLst>
       <p:ext uri="{BB962C8B-B14F-4D97-AF65-F5344CB8AC3E}">
-        <p14:creationId xmlns:p14="http://schemas.microsoft.com/office/powerpoint/2010/main" val="1080852800"/>
+        <p14:creationId xmlns:p14="http://schemas.microsoft.com/office/powerpoint/2010/main" val="382866200"/>
       </p:ext>
     </p:extLst>
   </p:cSld>
@@ -4311,6 +4306,46 @@
       </p:sp>
       <p:sp>
         <p:nvSpPr>
+          <p:cNvPr id="4" name="TextBox 3"/>
+          <p:cNvSpPr txBox="1"/>
+          <p:nvPr/>
+        </p:nvSpPr>
+        <p:spPr>
+          <a:xfrm>
+            <a:off x="558800" y="584200"/>
+            <a:ext cx="3302000" cy="271869"/>
+          </a:xfrm>
+          <a:prstGeom prst="rect">
+            <a:avLst/>
+          </a:prstGeom>
+          <a:noFill/>
+        </p:spPr>
+        <p:txBody>
+          <a:bodyPr vert="horz" wrap="square" lIns="101600" tIns="50800" rIns="101600" bIns="50800" rtlCol="0">
+            <a:spAutoFit/>
+          </a:bodyPr>
+          <a:lstStyle/>
+          <a:p>
+            <a:r>
+              <a:rPr lang="en-US" sz="1100" b="1" smtClean="0">
+                <a:solidFill>
+                  <a:srgbClr val="94A3B8"/>
+                </a:solidFill>
+                <a:latin typeface="Aptos"/>
+              </a:rPr>
+              <a:t>7-MINUTE IMPLEMENTATION REVIEW</a:t>
+            </a:r>
+            <a:endParaRPr lang="en-US" sz="1100" b="1">
+              <a:solidFill>
+                <a:srgbClr val="94A3B8"/>
+              </a:solidFill>
+              <a:latin typeface="Aptos"/>
+            </a:endParaRPr>
+          </a:p>
+        </p:txBody>
+      </p:sp>
+      <p:sp>
+        <p:nvSpPr>
           <p:cNvPr id="5" name="TextBox 4"/>
           <p:cNvSpPr txBox="1"/>
           <p:nvPr/>
@@ -4917,7 +4952,7 @@
     </p:spTree>
     <p:extLst>
       <p:ext uri="{BB962C8B-B14F-4D97-AF65-F5344CB8AC3E}">
-        <p14:creationId xmlns:p14="http://schemas.microsoft.com/office/powerpoint/2010/main" val="126393770"/>
+        <p14:creationId xmlns:p14="http://schemas.microsoft.com/office/powerpoint/2010/main" val="4167623871"/>
       </p:ext>
     </p:extLst>
   </p:cSld>
@@ -4936,9 +4971,6 @@
                     <p:cTn id="3" fill="hold">
                       <p:stCondLst>
                         <p:cond delay="indefinite"/>
-                        <p:cond evt="onBegin" delay="0">
-                          <p:tn val="2"/>
-                        </p:cond>
                       </p:stCondLst>
                       <p:childTnLst>
                         <p:par>
@@ -4948,7 +4980,7 @@
                             </p:stCondLst>
                             <p:childTnLst>
                               <p:par>
-                                <p:cTn id="5" presetID="1" presetClass="entr" presetSubtype="0" fill="hold" grpId="0" nodeType="withEffect">
+                                <p:cTn id="5" presetID="1" presetClass="entr" presetSubtype="0" fill="hold" grpId="0" nodeType="clickEffect">
                                   <p:stCondLst>
                                     <p:cond delay="0"/>
                                   </p:stCondLst>
@@ -4956,69 +4988,6 @@
                                     <p:set>
                                       <p:cBhvr>
                                         <p:cTn id="6" dur="1" fill="hold">
-                                          <p:stCondLst>
-                                            <p:cond delay="0"/>
-                                          </p:stCondLst>
-                                        </p:cTn>
-                                        <p:tgtEl>
-                                          <p:spTgt spid="5"/>
-                                        </p:tgtEl>
-                                        <p:attrNameLst>
-                                          <p:attrName>style.visibility</p:attrName>
-                                        </p:attrNameLst>
-                                      </p:cBhvr>
-                                      <p:to>
-                                        <p:strVal val="visible"/>
-                                      </p:to>
-                                    </p:set>
-                                  </p:childTnLst>
-                                </p:cTn>
-                              </p:par>
-                              <p:par>
-                                <p:cTn id="7" presetID="1" presetClass="entr" presetSubtype="0" fill="hold" nodeType="withEffect">
-                                  <p:stCondLst>
-                                    <p:cond delay="0"/>
-                                  </p:stCondLst>
-                                  <p:childTnLst>
-                                    <p:set>
-                                      <p:cBhvr>
-                                        <p:cTn id="8" dur="1" fill="hold">
-                                          <p:stCondLst>
-                                            <p:cond delay="0"/>
-                                          </p:stCondLst>
-                                        </p:cTn>
-                                        <p:tgtEl>
-                                          <p:spTgt spid="6"/>
-                                        </p:tgtEl>
-                                        <p:attrNameLst>
-                                          <p:attrName>style.visibility</p:attrName>
-                                        </p:attrNameLst>
-                                      </p:cBhvr>
-                                      <p:to>
-                                        <p:strVal val="visible"/>
-                                      </p:to>
-                                    </p:set>
-                                  </p:childTnLst>
-                                </p:cTn>
-                              </p:par>
-                            </p:childTnLst>
-                          </p:cTn>
-                        </p:par>
-                        <p:par>
-                          <p:cTn id="9" fill="hold">
-                            <p:stCondLst>
-                              <p:cond delay="0"/>
-                            </p:stCondLst>
-                            <p:childTnLst>
-                              <p:par>
-                                <p:cTn id="10" presetID="1" presetClass="entr" presetSubtype="0" fill="hold" grpId="0" nodeType="afterEffect">
-                                  <p:stCondLst>
-                                    <p:cond delay="0"/>
-                                  </p:stCondLst>
-                                  <p:childTnLst>
-                                    <p:set>
-                                      <p:cBhvr>
-                                        <p:cTn id="11" dur="1" fill="hold">
                                           <p:stCondLst>
                                             <p:cond delay="0"/>
                                           </p:stCondLst>
@@ -5040,21 +5009,30 @@
                             </p:childTnLst>
                           </p:cTn>
                         </p:par>
+                      </p:childTnLst>
+                    </p:cTn>
+                  </p:par>
+                  <p:par>
+                    <p:cTn id="7" fill="hold">
+                      <p:stCondLst>
+                        <p:cond delay="indefinite"/>
+                      </p:stCondLst>
+                      <p:childTnLst>
                         <p:par>
-                          <p:cTn id="12" fill="hold">
+                          <p:cTn id="8" fill="hold">
                             <p:stCondLst>
                               <p:cond delay="0"/>
                             </p:stCondLst>
                             <p:childTnLst>
                               <p:par>
-                                <p:cTn id="13" presetID="1" presetClass="entr" presetSubtype="0" fill="hold" grpId="0" nodeType="afterEffect">
+                                <p:cTn id="9" presetID="1" presetClass="entr" presetSubtype="0" fill="hold" grpId="0" nodeType="clickEffect">
                                   <p:stCondLst>
                                     <p:cond delay="0"/>
                                   </p:stCondLst>
                                   <p:childTnLst>
                                     <p:set>
                                       <p:cBhvr>
-                                        <p:cTn id="14" dur="1" fill="hold">
+                                        <p:cTn id="10" dur="1" fill="hold">
                                           <p:stCondLst>
                                             <p:cond delay="0"/>
                                           </p:stCondLst>
@@ -5076,21 +5054,30 @@
                             </p:childTnLst>
                           </p:cTn>
                         </p:par>
+                      </p:childTnLst>
+                    </p:cTn>
+                  </p:par>
+                  <p:par>
+                    <p:cTn id="11" fill="hold">
+                      <p:stCondLst>
+                        <p:cond delay="indefinite"/>
+                      </p:stCondLst>
+                      <p:childTnLst>
                         <p:par>
-                          <p:cTn id="15" fill="hold">
+                          <p:cTn id="12" fill="hold">
                             <p:stCondLst>
                               <p:cond delay="0"/>
                             </p:stCondLst>
                             <p:childTnLst>
                               <p:par>
-                                <p:cTn id="16" presetID="1" presetClass="entr" presetSubtype="0" fill="hold" grpId="0" nodeType="afterEffect">
+                                <p:cTn id="13" presetID="1" presetClass="entr" presetSubtype="0" fill="hold" grpId="0" nodeType="clickEffect">
                                   <p:stCondLst>
                                     <p:cond delay="0"/>
                                   </p:stCondLst>
                                   <p:childTnLst>
                                     <p:set>
                                       <p:cBhvr>
-                                        <p:cTn id="17" dur="1" fill="hold">
+                                        <p:cTn id="14" dur="1" fill="hold">
                                           <p:stCondLst>
                                             <p:cond delay="0"/>
                                           </p:stCondLst>
@@ -5109,24 +5096,15 @@
                                   </p:childTnLst>
                                 </p:cTn>
                               </p:par>
-                            </p:childTnLst>
-                          </p:cTn>
-                        </p:par>
-                        <p:par>
-                          <p:cTn id="18" fill="hold">
-                            <p:stCondLst>
-                              <p:cond delay="0"/>
-                            </p:stCondLst>
-                            <p:childTnLst>
                               <p:par>
-                                <p:cTn id="19" presetID="1" presetClass="entr" presetSubtype="0" fill="hold" grpId="0" nodeType="afterEffect">
+                                <p:cTn id="15" presetID="1" presetClass="entr" presetSubtype="0" fill="hold" grpId="0" nodeType="withEffect">
                                   <p:stCondLst>
                                     <p:cond delay="0"/>
                                   </p:stCondLst>
                                   <p:childTnLst>
                                     <p:set>
                                       <p:cBhvr>
-                                        <p:cTn id="20" dur="1" fill="hold">
+                                        <p:cTn id="16" dur="1" fill="hold">
                                           <p:stCondLst>
                                             <p:cond delay="0"/>
                                           </p:stCondLst>
@@ -5148,21 +5126,30 @@
                             </p:childTnLst>
                           </p:cTn>
                         </p:par>
+                      </p:childTnLst>
+                    </p:cTn>
+                  </p:par>
+                  <p:par>
+                    <p:cTn id="17" fill="hold">
+                      <p:stCondLst>
+                        <p:cond delay="indefinite"/>
+                      </p:stCondLst>
+                      <p:childTnLst>
                         <p:par>
-                          <p:cTn id="21" fill="hold">
+                          <p:cTn id="18" fill="hold">
                             <p:stCondLst>
                               <p:cond delay="0"/>
                             </p:stCondLst>
                             <p:childTnLst>
                               <p:par>
-                                <p:cTn id="22" presetID="1" presetClass="entr" presetSubtype="0" fill="hold" grpId="0" nodeType="afterEffect">
+                                <p:cTn id="19" presetID="1" presetClass="entr" presetSubtype="0" fill="hold" grpId="0" nodeType="clickEffect">
                                   <p:stCondLst>
                                     <p:cond delay="0"/>
                                   </p:stCondLst>
                                   <p:childTnLst>
                                     <p:set>
                                       <p:cBhvr>
-                                        <p:cTn id="23" dur="1" fill="hold">
+                                        <p:cTn id="20" dur="1" fill="hold">
                                           <p:stCondLst>
                                             <p:cond delay="0"/>
                                           </p:stCondLst>
@@ -5181,24 +5168,15 @@
                                   </p:childTnLst>
                                 </p:cTn>
                               </p:par>
-                            </p:childTnLst>
-                          </p:cTn>
-                        </p:par>
-                        <p:par>
-                          <p:cTn id="24" fill="hold">
-                            <p:stCondLst>
-                              <p:cond delay="0"/>
-                            </p:stCondLst>
-                            <p:childTnLst>
                               <p:par>
-                                <p:cTn id="25" presetID="1" presetClass="entr" presetSubtype="0" fill="hold" grpId="0" nodeType="afterEffect">
+                                <p:cTn id="21" presetID="1" presetClass="entr" presetSubtype="0" fill="hold" grpId="0" nodeType="withEffect">
                                   <p:stCondLst>
                                     <p:cond delay="0"/>
                                   </p:stCondLst>
                                   <p:childTnLst>
                                     <p:set>
                                       <p:cBhvr>
-                                        <p:cTn id="26" dur="1" fill="hold">
+                                        <p:cTn id="22" dur="1" fill="hold">
                                           <p:stCondLst>
                                             <p:cond delay="0"/>
                                           </p:stCondLst>
@@ -5220,21 +5198,30 @@
                             </p:childTnLst>
                           </p:cTn>
                         </p:par>
+                      </p:childTnLst>
+                    </p:cTn>
+                  </p:par>
+                  <p:par>
+                    <p:cTn id="23" fill="hold">
+                      <p:stCondLst>
+                        <p:cond delay="indefinite"/>
+                      </p:stCondLst>
+                      <p:childTnLst>
                         <p:par>
-                          <p:cTn id="27" fill="hold">
+                          <p:cTn id="24" fill="hold">
                             <p:stCondLst>
                               <p:cond delay="0"/>
                             </p:stCondLst>
                             <p:childTnLst>
                               <p:par>
-                                <p:cTn id="28" presetID="1" presetClass="entr" presetSubtype="0" fill="hold" grpId="0" nodeType="afterEffect">
+                                <p:cTn id="25" presetID="1" presetClass="entr" presetSubtype="0" fill="hold" grpId="0" nodeType="clickEffect">
                                   <p:stCondLst>
                                     <p:cond delay="0"/>
                                   </p:stCondLst>
                                   <p:childTnLst>
                                     <p:set>
                                       <p:cBhvr>
-                                        <p:cTn id="29" dur="1" fill="hold">
+                                        <p:cTn id="26" dur="1" fill="hold">
                                           <p:stCondLst>
                                             <p:cond delay="0"/>
                                           </p:stCondLst>
@@ -5253,24 +5240,15 @@
                                   </p:childTnLst>
                                 </p:cTn>
                               </p:par>
-                            </p:childTnLst>
-                          </p:cTn>
-                        </p:par>
-                        <p:par>
-                          <p:cTn id="30" fill="hold">
-                            <p:stCondLst>
-                              <p:cond delay="0"/>
-                            </p:stCondLst>
-                            <p:childTnLst>
                               <p:par>
-                                <p:cTn id="31" presetID="1" presetClass="entr" presetSubtype="0" fill="hold" grpId="0" nodeType="afterEffect">
+                                <p:cTn id="27" presetID="1" presetClass="entr" presetSubtype="0" fill="hold" grpId="0" nodeType="withEffect">
                                   <p:stCondLst>
                                     <p:cond delay="0"/>
                                   </p:stCondLst>
                                   <p:childTnLst>
                                     <p:set>
                                       <p:cBhvr>
-                                        <p:cTn id="32" dur="1" fill="hold">
+                                        <p:cTn id="28" dur="1" fill="hold">
                                           <p:stCondLst>
                                             <p:cond delay="0"/>
                                           </p:stCondLst>
@@ -5292,21 +5270,30 @@
                             </p:childTnLst>
                           </p:cTn>
                         </p:par>
+                      </p:childTnLst>
+                    </p:cTn>
+                  </p:par>
+                  <p:par>
+                    <p:cTn id="29" fill="hold">
+                      <p:stCondLst>
+                        <p:cond delay="indefinite"/>
+                      </p:stCondLst>
+                      <p:childTnLst>
                         <p:par>
-                          <p:cTn id="33" fill="hold">
+                          <p:cTn id="30" fill="hold">
                             <p:stCondLst>
                               <p:cond delay="0"/>
                             </p:stCondLst>
                             <p:childTnLst>
                               <p:par>
-                                <p:cTn id="34" presetID="1" presetClass="entr" presetSubtype="0" fill="hold" grpId="0" nodeType="afterEffect">
+                                <p:cTn id="31" presetID="1" presetClass="entr" presetSubtype="0" fill="hold" grpId="0" nodeType="clickEffect">
                                   <p:stCondLst>
                                     <p:cond delay="0"/>
                                   </p:stCondLst>
                                   <p:childTnLst>
                                     <p:set>
                                       <p:cBhvr>
-                                        <p:cTn id="35" dur="1" fill="hold">
+                                        <p:cTn id="32" dur="1" fill="hold">
                                           <p:stCondLst>
                                             <p:cond delay="0"/>
                                           </p:stCondLst>
@@ -5325,24 +5312,15 @@
                                   </p:childTnLst>
                                 </p:cTn>
                               </p:par>
-                            </p:childTnLst>
-                          </p:cTn>
-                        </p:par>
-                        <p:par>
-                          <p:cTn id="36" fill="hold">
-                            <p:stCondLst>
-                              <p:cond delay="0"/>
-                            </p:stCondLst>
-                            <p:childTnLst>
                               <p:par>
-                                <p:cTn id="37" presetID="1" presetClass="entr" presetSubtype="0" fill="hold" grpId="0" nodeType="afterEffect">
+                                <p:cTn id="33" presetID="1" presetClass="entr" presetSubtype="0" fill="hold" grpId="0" nodeType="withEffect">
                                   <p:stCondLst>
                                     <p:cond delay="0"/>
                                   </p:stCondLst>
                                   <p:childTnLst>
                                     <p:set>
                                       <p:cBhvr>
-                                        <p:cTn id="38" dur="1" fill="hold">
+                                        <p:cTn id="34" dur="1" fill="hold">
                                           <p:stCondLst>
                                             <p:cond delay="0"/>
                                           </p:stCondLst>
@@ -5361,24 +5339,15 @@
                                   </p:childTnLst>
                                 </p:cTn>
                               </p:par>
-                            </p:childTnLst>
-                          </p:cTn>
-                        </p:par>
-                        <p:par>
-                          <p:cTn id="39" fill="hold">
-                            <p:stCondLst>
-                              <p:cond delay="0"/>
-                            </p:stCondLst>
-                            <p:childTnLst>
                               <p:par>
-                                <p:cTn id="40" presetID="1" presetClass="entr" presetSubtype="0" fill="hold" grpId="0" nodeType="afterEffect">
+                                <p:cTn id="35" presetID="1" presetClass="entr" presetSubtype="0" fill="hold" grpId="0" nodeType="withEffect">
                                   <p:stCondLst>
                                     <p:cond delay="0"/>
                                   </p:stCondLst>
                                   <p:childTnLst>
                                     <p:set>
                                       <p:cBhvr>
-                                        <p:cTn id="41" dur="1" fill="hold">
+                                        <p:cTn id="36" dur="1" fill="hold">
                                           <p:stCondLst>
                                             <p:cond delay="0"/>
                                           </p:stCondLst>
@@ -5425,7 +5394,6 @@
       </p:par>
     </p:tnLst>
     <p:bldLst>
-      <p:bldP spid="5" grpId="0"/>
       <p:bldP spid="7" grpId="0"/>
       <p:bldP spid="8" grpId="0"/>
       <p:bldP spid="9" grpId="0" animBg="1"/>
@@ -6167,7 +6135,7 @@
     </p:spTree>
     <p:extLst>
       <p:ext uri="{BB962C8B-B14F-4D97-AF65-F5344CB8AC3E}">
-        <p14:creationId xmlns:p14="http://schemas.microsoft.com/office/powerpoint/2010/main" val="3337468821"/>
+        <p14:creationId xmlns:p14="http://schemas.microsoft.com/office/powerpoint/2010/main" val="2974464954"/>
       </p:ext>
     </p:extLst>
   </p:cSld>
@@ -6186,9 +6154,6 @@
                     <p:cTn id="3" fill="hold">
                       <p:stCondLst>
                         <p:cond delay="indefinite"/>
-                        <p:cond evt="onBegin" delay="0">
-                          <p:tn val="2"/>
-                        </p:cond>
                       </p:stCondLst>
                       <p:childTnLst>
                         <p:par>
@@ -6198,7 +6163,7 @@
                             </p:stCondLst>
                             <p:childTnLst>
                               <p:par>
-                                <p:cTn id="5" presetID="1" presetClass="entr" presetSubtype="0" fill="hold" grpId="0" nodeType="withEffect">
+                                <p:cTn id="5" presetID="1" presetClass="entr" presetSubtype="0" fill="hold" grpId="0" nodeType="clickEffect">
                                   <p:stCondLst>
                                     <p:cond delay="0"/>
                                   </p:stCondLst>
@@ -6211,7 +6176,7 @@
                                           </p:stCondLst>
                                         </p:cTn>
                                         <p:tgtEl>
-                                          <p:spTgt spid="4"/>
+                                          <p:spTgt spid="7"/>
                                         </p:tgtEl>
                                         <p:attrNameLst>
                                           <p:attrName>style.visibility</p:attrName>
@@ -6238,7 +6203,7 @@
                                           </p:stCondLst>
                                         </p:cTn>
                                         <p:tgtEl>
-                                          <p:spTgt spid="5"/>
+                                          <p:spTgt spid="8"/>
                                         </p:tgtEl>
                                         <p:attrNameLst>
                                           <p:attrName>style.visibility</p:attrName>
@@ -6252,7 +6217,7 @@
                                 </p:cTn>
                               </p:par>
                               <p:par>
-                                <p:cTn id="9" presetID="1" presetClass="entr" presetSubtype="0" fill="hold" nodeType="withEffect">
+                                <p:cTn id="9" presetID="1" presetClass="entr" presetSubtype="0" fill="hold" grpId="0" nodeType="withEffect">
                                   <p:stCondLst>
                                     <p:cond delay="0"/>
                                   </p:stCondLst>
@@ -6260,114 +6225,6 @@
                                     <p:set>
                                       <p:cBhvr>
                                         <p:cTn id="10" dur="1" fill="hold">
-                                          <p:stCondLst>
-                                            <p:cond delay="0"/>
-                                          </p:stCondLst>
-                                        </p:cTn>
-                                        <p:tgtEl>
-                                          <p:spTgt spid="6"/>
-                                        </p:tgtEl>
-                                        <p:attrNameLst>
-                                          <p:attrName>style.visibility</p:attrName>
-                                        </p:attrNameLst>
-                                      </p:cBhvr>
-                                      <p:to>
-                                        <p:strVal val="visible"/>
-                                      </p:to>
-                                    </p:set>
-                                  </p:childTnLst>
-                                </p:cTn>
-                              </p:par>
-                            </p:childTnLst>
-                          </p:cTn>
-                        </p:par>
-                        <p:par>
-                          <p:cTn id="11" fill="hold">
-                            <p:stCondLst>
-                              <p:cond delay="0"/>
-                            </p:stCondLst>
-                            <p:childTnLst>
-                              <p:par>
-                                <p:cTn id="12" presetID="1" presetClass="entr" presetSubtype="0" fill="hold" grpId="0" nodeType="afterEffect">
-                                  <p:stCondLst>
-                                    <p:cond delay="0"/>
-                                  </p:stCondLst>
-                                  <p:childTnLst>
-                                    <p:set>
-                                      <p:cBhvr>
-                                        <p:cTn id="13" dur="1" fill="hold">
-                                          <p:stCondLst>
-                                            <p:cond delay="0"/>
-                                          </p:stCondLst>
-                                        </p:cTn>
-                                        <p:tgtEl>
-                                          <p:spTgt spid="7"/>
-                                        </p:tgtEl>
-                                        <p:attrNameLst>
-                                          <p:attrName>style.visibility</p:attrName>
-                                        </p:attrNameLst>
-                                      </p:cBhvr>
-                                      <p:to>
-                                        <p:strVal val="visible"/>
-                                      </p:to>
-                                    </p:set>
-                                  </p:childTnLst>
-                                </p:cTn>
-                              </p:par>
-                            </p:childTnLst>
-                          </p:cTn>
-                        </p:par>
-                        <p:par>
-                          <p:cTn id="14" fill="hold">
-                            <p:stCondLst>
-                              <p:cond delay="0"/>
-                            </p:stCondLst>
-                            <p:childTnLst>
-                              <p:par>
-                                <p:cTn id="15" presetID="1" presetClass="entr" presetSubtype="0" fill="hold" grpId="0" nodeType="afterEffect">
-                                  <p:stCondLst>
-                                    <p:cond delay="0"/>
-                                  </p:stCondLst>
-                                  <p:childTnLst>
-                                    <p:set>
-                                      <p:cBhvr>
-                                        <p:cTn id="16" dur="1" fill="hold">
-                                          <p:stCondLst>
-                                            <p:cond delay="0"/>
-                                          </p:stCondLst>
-                                        </p:cTn>
-                                        <p:tgtEl>
-                                          <p:spTgt spid="8"/>
-                                        </p:tgtEl>
-                                        <p:attrNameLst>
-                                          <p:attrName>style.visibility</p:attrName>
-                                        </p:attrNameLst>
-                                      </p:cBhvr>
-                                      <p:to>
-                                        <p:strVal val="visible"/>
-                                      </p:to>
-                                    </p:set>
-                                  </p:childTnLst>
-                                </p:cTn>
-                              </p:par>
-                            </p:childTnLst>
-                          </p:cTn>
-                        </p:par>
-                        <p:par>
-                          <p:cTn id="17" fill="hold">
-                            <p:stCondLst>
-                              <p:cond delay="0"/>
-                            </p:stCondLst>
-                            <p:childTnLst>
-                              <p:par>
-                                <p:cTn id="18" presetID="1" presetClass="entr" presetSubtype="0" fill="hold" grpId="0" nodeType="afterEffect">
-                                  <p:stCondLst>
-                                    <p:cond delay="0"/>
-                                  </p:stCondLst>
-                                  <p:childTnLst>
-                                    <p:set>
-                                      <p:cBhvr>
-                                        <p:cTn id="19" dur="1" fill="hold">
                                           <p:stCondLst>
                                             <p:cond delay="0"/>
                                           </p:stCondLst>
@@ -6389,21 +6246,30 @@
                             </p:childTnLst>
                           </p:cTn>
                         </p:par>
+                      </p:childTnLst>
+                    </p:cTn>
+                  </p:par>
+                  <p:par>
+                    <p:cTn id="11" fill="hold">
+                      <p:stCondLst>
+                        <p:cond delay="indefinite"/>
+                      </p:stCondLst>
+                      <p:childTnLst>
                         <p:par>
-                          <p:cTn id="20" fill="hold">
+                          <p:cTn id="12" fill="hold">
                             <p:stCondLst>
                               <p:cond delay="0"/>
                             </p:stCondLst>
                             <p:childTnLst>
                               <p:par>
-                                <p:cTn id="21" presetID="1" presetClass="entr" presetSubtype="0" fill="hold" grpId="0" nodeType="afterEffect">
+                                <p:cTn id="13" presetID="1" presetClass="entr" presetSubtype="0" fill="hold" grpId="0" nodeType="clickEffect">
                                   <p:stCondLst>
                                     <p:cond delay="0"/>
                                   </p:stCondLst>
                                   <p:childTnLst>
                                     <p:set>
                                       <p:cBhvr>
-                                        <p:cTn id="22" dur="1" fill="hold">
+                                        <p:cTn id="14" dur="1" fill="hold">
                                           <p:stCondLst>
                                             <p:cond delay="0"/>
                                           </p:stCondLst>
@@ -6422,24 +6288,15 @@
                                   </p:childTnLst>
                                 </p:cTn>
                               </p:par>
-                            </p:childTnLst>
-                          </p:cTn>
-                        </p:par>
-                        <p:par>
-                          <p:cTn id="23" fill="hold">
-                            <p:stCondLst>
-                              <p:cond delay="0"/>
-                            </p:stCondLst>
-                            <p:childTnLst>
                               <p:par>
-                                <p:cTn id="24" presetID="1" presetClass="entr" presetSubtype="0" fill="hold" grpId="0" nodeType="afterEffect">
+                                <p:cTn id="15" presetID="1" presetClass="entr" presetSubtype="0" fill="hold" grpId="0" nodeType="withEffect">
                                   <p:stCondLst>
                                     <p:cond delay="0"/>
                                   </p:stCondLst>
                                   <p:childTnLst>
                                     <p:set>
                                       <p:cBhvr>
-                                        <p:cTn id="25" dur="1" fill="hold">
+                                        <p:cTn id="16" dur="1" fill="hold">
                                           <p:stCondLst>
                                             <p:cond delay="0"/>
                                           </p:stCondLst>
@@ -6458,24 +6315,15 @@
                                   </p:childTnLst>
                                 </p:cTn>
                               </p:par>
-                            </p:childTnLst>
-                          </p:cTn>
-                        </p:par>
-                        <p:par>
-                          <p:cTn id="26" fill="hold">
-                            <p:stCondLst>
-                              <p:cond delay="0"/>
-                            </p:stCondLst>
-                            <p:childTnLst>
                               <p:par>
-                                <p:cTn id="27" presetID="1" presetClass="entr" presetSubtype="0" fill="hold" grpId="0" nodeType="afterEffect">
+                                <p:cTn id="17" presetID="1" presetClass="entr" presetSubtype="0" fill="hold" grpId="0" nodeType="withEffect">
                                   <p:stCondLst>
                                     <p:cond delay="0"/>
                                   </p:stCondLst>
                                   <p:childTnLst>
                                     <p:set>
                                       <p:cBhvr>
-                                        <p:cTn id="28" dur="1" fill="hold">
+                                        <p:cTn id="18" dur="1" fill="hold">
                                           <p:stCondLst>
                                             <p:cond delay="0"/>
                                           </p:stCondLst>
@@ -6497,21 +6345,30 @@
                             </p:childTnLst>
                           </p:cTn>
                         </p:par>
+                      </p:childTnLst>
+                    </p:cTn>
+                  </p:par>
+                  <p:par>
+                    <p:cTn id="19" fill="hold">
+                      <p:stCondLst>
+                        <p:cond delay="indefinite"/>
+                      </p:stCondLst>
+                      <p:childTnLst>
                         <p:par>
-                          <p:cTn id="29" fill="hold">
+                          <p:cTn id="20" fill="hold">
                             <p:stCondLst>
                               <p:cond delay="0"/>
                             </p:stCondLst>
                             <p:childTnLst>
                               <p:par>
-                                <p:cTn id="30" presetID="1" presetClass="entr" presetSubtype="0" fill="hold" grpId="0" nodeType="afterEffect">
+                                <p:cTn id="21" presetID="1" presetClass="entr" presetSubtype="0" fill="hold" grpId="0" nodeType="clickEffect">
                                   <p:stCondLst>
                                     <p:cond delay="0"/>
                                   </p:stCondLst>
                                   <p:childTnLst>
                                     <p:set>
                                       <p:cBhvr>
-                                        <p:cTn id="31" dur="1" fill="hold">
+                                        <p:cTn id="22" dur="1" fill="hold">
                                           <p:stCondLst>
                                             <p:cond delay="0"/>
                                           </p:stCondLst>
@@ -6530,24 +6387,15 @@
                                   </p:childTnLst>
                                 </p:cTn>
                               </p:par>
-                            </p:childTnLst>
-                          </p:cTn>
-                        </p:par>
-                        <p:par>
-                          <p:cTn id="32" fill="hold">
-                            <p:stCondLst>
-                              <p:cond delay="0"/>
-                            </p:stCondLst>
-                            <p:childTnLst>
                               <p:par>
-                                <p:cTn id="33" presetID="1" presetClass="entr" presetSubtype="0" fill="hold" grpId="0" nodeType="afterEffect">
+                                <p:cTn id="23" presetID="1" presetClass="entr" presetSubtype="0" fill="hold" grpId="0" nodeType="withEffect">
                                   <p:stCondLst>
                                     <p:cond delay="0"/>
                                   </p:stCondLst>
                                   <p:childTnLst>
                                     <p:set>
                                       <p:cBhvr>
-                                        <p:cTn id="34" dur="1" fill="hold">
+                                        <p:cTn id="24" dur="1" fill="hold">
                                           <p:stCondLst>
                                             <p:cond delay="0"/>
                                           </p:stCondLst>
@@ -6594,8 +6442,6 @@
       </p:par>
     </p:tnLst>
     <p:bldLst>
-      <p:bldP spid="4" grpId="0"/>
-      <p:bldP spid="5" grpId="0"/>
       <p:bldP spid="7" grpId="0" animBg="1"/>
       <p:bldP spid="8" grpId="0"/>
       <p:bldP spid="9" grpId="0"/>
@@ -7572,7 +7418,7 @@
     </p:spTree>
     <p:extLst>
       <p:ext uri="{BB962C8B-B14F-4D97-AF65-F5344CB8AC3E}">
-        <p14:creationId xmlns:p14="http://schemas.microsoft.com/office/powerpoint/2010/main" val="253659751"/>
+        <p14:creationId xmlns:p14="http://schemas.microsoft.com/office/powerpoint/2010/main" val="1296200418"/>
       </p:ext>
     </p:extLst>
   </p:cSld>
@@ -7591,9 +7437,6 @@
                     <p:cTn id="3" fill="hold">
                       <p:stCondLst>
                         <p:cond delay="indefinite"/>
-                        <p:cond evt="onBegin" delay="0">
-                          <p:tn val="2"/>
-                        </p:cond>
                       </p:stCondLst>
                       <p:childTnLst>
                         <p:par>
@@ -7603,7 +7446,7 @@
                             </p:stCondLst>
                             <p:childTnLst>
                               <p:par>
-                                <p:cTn id="5" presetID="1" presetClass="entr" presetSubtype="0" fill="hold" grpId="0" nodeType="withEffect">
+                                <p:cTn id="5" presetID="1" presetClass="entr" presetSubtype="0" fill="hold" grpId="0" nodeType="clickEffect">
                                   <p:stCondLst>
                                     <p:cond delay="0"/>
                                   </p:stCondLst>
@@ -7616,7 +7459,7 @@
                                           </p:stCondLst>
                                         </p:cTn>
                                         <p:tgtEl>
-                                          <p:spTgt spid="4"/>
+                                          <p:spTgt spid="7"/>
                                         </p:tgtEl>
                                         <p:attrNameLst>
                                           <p:attrName>style.visibility</p:attrName>
@@ -7643,7 +7486,7 @@
                                           </p:stCondLst>
                                         </p:cTn>
                                         <p:tgtEl>
-                                          <p:spTgt spid="5"/>
+                                          <p:spTgt spid="8"/>
                                         </p:tgtEl>
                                         <p:attrNameLst>
                                           <p:attrName>style.visibility</p:attrName>
@@ -7657,7 +7500,7 @@
                                 </p:cTn>
                               </p:par>
                               <p:par>
-                                <p:cTn id="9" presetID="1" presetClass="entr" presetSubtype="0" fill="hold" nodeType="withEffect">
+                                <p:cTn id="9" presetID="1" presetClass="entr" presetSubtype="0" fill="hold" grpId="0" nodeType="withEffect">
                                   <p:stCondLst>
                                     <p:cond delay="0"/>
                                   </p:stCondLst>
@@ -7665,114 +7508,6 @@
                                     <p:set>
                                       <p:cBhvr>
                                         <p:cTn id="10" dur="1" fill="hold">
-                                          <p:stCondLst>
-                                            <p:cond delay="0"/>
-                                          </p:stCondLst>
-                                        </p:cTn>
-                                        <p:tgtEl>
-                                          <p:spTgt spid="6"/>
-                                        </p:tgtEl>
-                                        <p:attrNameLst>
-                                          <p:attrName>style.visibility</p:attrName>
-                                        </p:attrNameLst>
-                                      </p:cBhvr>
-                                      <p:to>
-                                        <p:strVal val="visible"/>
-                                      </p:to>
-                                    </p:set>
-                                  </p:childTnLst>
-                                </p:cTn>
-                              </p:par>
-                            </p:childTnLst>
-                          </p:cTn>
-                        </p:par>
-                        <p:par>
-                          <p:cTn id="11" fill="hold">
-                            <p:stCondLst>
-                              <p:cond delay="0"/>
-                            </p:stCondLst>
-                            <p:childTnLst>
-                              <p:par>
-                                <p:cTn id="12" presetID="1" presetClass="entr" presetSubtype="0" fill="hold" grpId="0" nodeType="afterEffect">
-                                  <p:stCondLst>
-                                    <p:cond delay="0"/>
-                                  </p:stCondLst>
-                                  <p:childTnLst>
-                                    <p:set>
-                                      <p:cBhvr>
-                                        <p:cTn id="13" dur="1" fill="hold">
-                                          <p:stCondLst>
-                                            <p:cond delay="0"/>
-                                          </p:stCondLst>
-                                        </p:cTn>
-                                        <p:tgtEl>
-                                          <p:spTgt spid="7"/>
-                                        </p:tgtEl>
-                                        <p:attrNameLst>
-                                          <p:attrName>style.visibility</p:attrName>
-                                        </p:attrNameLst>
-                                      </p:cBhvr>
-                                      <p:to>
-                                        <p:strVal val="visible"/>
-                                      </p:to>
-                                    </p:set>
-                                  </p:childTnLst>
-                                </p:cTn>
-                              </p:par>
-                            </p:childTnLst>
-                          </p:cTn>
-                        </p:par>
-                        <p:par>
-                          <p:cTn id="14" fill="hold">
-                            <p:stCondLst>
-                              <p:cond delay="0"/>
-                            </p:stCondLst>
-                            <p:childTnLst>
-                              <p:par>
-                                <p:cTn id="15" presetID="1" presetClass="entr" presetSubtype="0" fill="hold" grpId="0" nodeType="afterEffect">
-                                  <p:stCondLst>
-                                    <p:cond delay="0"/>
-                                  </p:stCondLst>
-                                  <p:childTnLst>
-                                    <p:set>
-                                      <p:cBhvr>
-                                        <p:cTn id="16" dur="1" fill="hold">
-                                          <p:stCondLst>
-                                            <p:cond delay="0"/>
-                                          </p:stCondLst>
-                                        </p:cTn>
-                                        <p:tgtEl>
-                                          <p:spTgt spid="8"/>
-                                        </p:tgtEl>
-                                        <p:attrNameLst>
-                                          <p:attrName>style.visibility</p:attrName>
-                                        </p:attrNameLst>
-                                      </p:cBhvr>
-                                      <p:to>
-                                        <p:strVal val="visible"/>
-                                      </p:to>
-                                    </p:set>
-                                  </p:childTnLst>
-                                </p:cTn>
-                              </p:par>
-                            </p:childTnLst>
-                          </p:cTn>
-                        </p:par>
-                        <p:par>
-                          <p:cTn id="17" fill="hold">
-                            <p:stCondLst>
-                              <p:cond delay="0"/>
-                            </p:stCondLst>
-                            <p:childTnLst>
-                              <p:par>
-                                <p:cTn id="18" presetID="1" presetClass="entr" presetSubtype="0" fill="hold" grpId="0" nodeType="afterEffect">
-                                  <p:stCondLst>
-                                    <p:cond delay="0"/>
-                                  </p:stCondLst>
-                                  <p:childTnLst>
-                                    <p:set>
-                                      <p:cBhvr>
-                                        <p:cTn id="19" dur="1" fill="hold">
                                           <p:stCondLst>
                                             <p:cond delay="0"/>
                                           </p:stCondLst>
@@ -7794,21 +7529,30 @@
                             </p:childTnLst>
                           </p:cTn>
                         </p:par>
+                      </p:childTnLst>
+                    </p:cTn>
+                  </p:par>
+                  <p:par>
+                    <p:cTn id="11" fill="hold">
+                      <p:stCondLst>
+                        <p:cond delay="indefinite"/>
+                      </p:stCondLst>
+                      <p:childTnLst>
                         <p:par>
-                          <p:cTn id="20" fill="hold">
+                          <p:cTn id="12" fill="hold">
                             <p:stCondLst>
                               <p:cond delay="0"/>
                             </p:stCondLst>
                             <p:childTnLst>
                               <p:par>
-                                <p:cTn id="21" presetID="1" presetClass="entr" presetSubtype="0" fill="hold" grpId="0" nodeType="afterEffect">
+                                <p:cTn id="13" presetID="1" presetClass="entr" presetSubtype="0" fill="hold" grpId="0" nodeType="clickEffect">
                                   <p:stCondLst>
                                     <p:cond delay="0"/>
                                   </p:stCondLst>
                                   <p:childTnLst>
                                     <p:set>
                                       <p:cBhvr>
-                                        <p:cTn id="22" dur="1" fill="hold">
+                                        <p:cTn id="14" dur="1" fill="hold">
                                           <p:stCondLst>
                                             <p:cond delay="0"/>
                                           </p:stCondLst>
@@ -7827,24 +7571,15 @@
                                   </p:childTnLst>
                                 </p:cTn>
                               </p:par>
-                            </p:childTnLst>
-                          </p:cTn>
-                        </p:par>
-                        <p:par>
-                          <p:cTn id="23" fill="hold">
-                            <p:stCondLst>
-                              <p:cond delay="0"/>
-                            </p:stCondLst>
-                            <p:childTnLst>
                               <p:par>
-                                <p:cTn id="24" presetID="1" presetClass="entr" presetSubtype="0" fill="hold" grpId="0" nodeType="afterEffect">
+                                <p:cTn id="15" presetID="1" presetClass="entr" presetSubtype="0" fill="hold" grpId="0" nodeType="withEffect">
                                   <p:stCondLst>
                                     <p:cond delay="0"/>
                                   </p:stCondLst>
                                   <p:childTnLst>
                                     <p:set>
                                       <p:cBhvr>
-                                        <p:cTn id="25" dur="1" fill="hold">
+                                        <p:cTn id="16" dur="1" fill="hold">
                                           <p:stCondLst>
                                             <p:cond delay="0"/>
                                           </p:stCondLst>
@@ -7863,24 +7598,15 @@
                                   </p:childTnLst>
                                 </p:cTn>
                               </p:par>
-                            </p:childTnLst>
-                          </p:cTn>
-                        </p:par>
-                        <p:par>
-                          <p:cTn id="26" fill="hold">
-                            <p:stCondLst>
-                              <p:cond delay="0"/>
-                            </p:stCondLst>
-                            <p:childTnLst>
                               <p:par>
-                                <p:cTn id="27" presetID="1" presetClass="entr" presetSubtype="0" fill="hold" grpId="0" nodeType="afterEffect">
+                                <p:cTn id="17" presetID="1" presetClass="entr" presetSubtype="0" fill="hold" grpId="0" nodeType="withEffect">
                                   <p:stCondLst>
                                     <p:cond delay="0"/>
                                   </p:stCondLst>
                                   <p:childTnLst>
                                     <p:set>
                                       <p:cBhvr>
-                                        <p:cTn id="28" dur="1" fill="hold">
+                                        <p:cTn id="18" dur="1" fill="hold">
                                           <p:stCondLst>
                                             <p:cond delay="0"/>
                                           </p:stCondLst>
@@ -7902,21 +7628,30 @@
                             </p:childTnLst>
                           </p:cTn>
                         </p:par>
+                      </p:childTnLst>
+                    </p:cTn>
+                  </p:par>
+                  <p:par>
+                    <p:cTn id="19" fill="hold">
+                      <p:stCondLst>
+                        <p:cond delay="indefinite"/>
+                      </p:stCondLst>
+                      <p:childTnLst>
                         <p:par>
-                          <p:cTn id="29" fill="hold">
+                          <p:cTn id="20" fill="hold">
                             <p:stCondLst>
                               <p:cond delay="0"/>
                             </p:stCondLst>
                             <p:childTnLst>
                               <p:par>
-                                <p:cTn id="30" presetID="1" presetClass="entr" presetSubtype="0" fill="hold" grpId="0" nodeType="afterEffect">
+                                <p:cTn id="21" presetID="1" presetClass="entr" presetSubtype="0" fill="hold" grpId="0" nodeType="clickEffect">
                                   <p:stCondLst>
                                     <p:cond delay="0"/>
                                   </p:stCondLst>
                                   <p:childTnLst>
                                     <p:set>
                                       <p:cBhvr>
-                                        <p:cTn id="31" dur="1" fill="hold">
+                                        <p:cTn id="22" dur="1" fill="hold">
                                           <p:stCondLst>
                                             <p:cond delay="0"/>
                                           </p:stCondLst>
@@ -7935,24 +7670,15 @@
                                   </p:childTnLst>
                                 </p:cTn>
                               </p:par>
-                            </p:childTnLst>
-                          </p:cTn>
-                        </p:par>
-                        <p:par>
-                          <p:cTn id="32" fill="hold">
-                            <p:stCondLst>
-                              <p:cond delay="0"/>
-                            </p:stCondLst>
-                            <p:childTnLst>
                               <p:par>
-                                <p:cTn id="33" presetID="1" presetClass="entr" presetSubtype="0" fill="hold" grpId="0" nodeType="afterEffect">
+                                <p:cTn id="23" presetID="1" presetClass="entr" presetSubtype="0" fill="hold" grpId="0" nodeType="withEffect">
                                   <p:stCondLst>
                                     <p:cond delay="0"/>
                                   </p:stCondLst>
                                   <p:childTnLst>
                                     <p:set>
                                       <p:cBhvr>
-                                        <p:cTn id="34" dur="1" fill="hold">
+                                        <p:cTn id="24" dur="1" fill="hold">
                                           <p:stCondLst>
                                             <p:cond delay="0"/>
                                           </p:stCondLst>
@@ -7971,24 +7697,15 @@
                                   </p:childTnLst>
                                 </p:cTn>
                               </p:par>
-                            </p:childTnLst>
-                          </p:cTn>
-                        </p:par>
-                        <p:par>
-                          <p:cTn id="35" fill="hold">
-                            <p:stCondLst>
-                              <p:cond delay="0"/>
-                            </p:stCondLst>
-                            <p:childTnLst>
                               <p:par>
-                                <p:cTn id="36" presetID="1" presetClass="entr" presetSubtype="0" fill="hold" grpId="0" nodeType="afterEffect">
+                                <p:cTn id="25" presetID="1" presetClass="entr" presetSubtype="0" fill="hold" grpId="0" nodeType="withEffect">
                                   <p:stCondLst>
                                     <p:cond delay="0"/>
                                   </p:stCondLst>
                                   <p:childTnLst>
                                     <p:set>
                                       <p:cBhvr>
-                                        <p:cTn id="37" dur="1" fill="hold">
+                                        <p:cTn id="26" dur="1" fill="hold">
                                           <p:stCondLst>
                                             <p:cond delay="0"/>
                                           </p:stCondLst>
@@ -8010,21 +7727,30 @@
                             </p:childTnLst>
                           </p:cTn>
                         </p:par>
+                      </p:childTnLst>
+                    </p:cTn>
+                  </p:par>
+                  <p:par>
+                    <p:cTn id="27" fill="hold">
+                      <p:stCondLst>
+                        <p:cond delay="indefinite"/>
+                      </p:stCondLst>
+                      <p:childTnLst>
                         <p:par>
-                          <p:cTn id="38" fill="hold">
+                          <p:cTn id="28" fill="hold">
                             <p:stCondLst>
                               <p:cond delay="0"/>
                             </p:stCondLst>
                             <p:childTnLst>
                               <p:par>
-                                <p:cTn id="39" presetID="1" presetClass="entr" presetSubtype="0" fill="hold" grpId="0" nodeType="afterEffect">
+                                <p:cTn id="29" presetID="1" presetClass="entr" presetSubtype="0" fill="hold" grpId="0" nodeType="clickEffect">
                                   <p:stCondLst>
                                     <p:cond delay="0"/>
                                   </p:stCondLst>
                                   <p:childTnLst>
                                     <p:set>
                                       <p:cBhvr>
-                                        <p:cTn id="40" dur="1" fill="hold">
+                                        <p:cTn id="30" dur="1" fill="hold">
                                           <p:stCondLst>
                                             <p:cond delay="0"/>
                                           </p:stCondLst>
@@ -8043,24 +7769,15 @@
                                   </p:childTnLst>
                                 </p:cTn>
                               </p:par>
-                            </p:childTnLst>
-                          </p:cTn>
-                        </p:par>
-                        <p:par>
-                          <p:cTn id="41" fill="hold">
-                            <p:stCondLst>
-                              <p:cond delay="0"/>
-                            </p:stCondLst>
-                            <p:childTnLst>
                               <p:par>
-                                <p:cTn id="42" presetID="1" presetClass="entr" presetSubtype="0" fill="hold" grpId="0" nodeType="afterEffect">
+                                <p:cTn id="31" presetID="1" presetClass="entr" presetSubtype="0" fill="hold" grpId="0" nodeType="withEffect">
                                   <p:stCondLst>
                                     <p:cond delay="0"/>
                                   </p:stCondLst>
                                   <p:childTnLst>
                                     <p:set>
                                       <p:cBhvr>
-                                        <p:cTn id="43" dur="1" fill="hold">
+                                        <p:cTn id="32" dur="1" fill="hold">
                                           <p:stCondLst>
                                             <p:cond delay="0"/>
                                           </p:stCondLst>
@@ -8079,24 +7796,15 @@
                                   </p:childTnLst>
                                 </p:cTn>
                               </p:par>
-                            </p:childTnLst>
-                          </p:cTn>
-                        </p:par>
-                        <p:par>
-                          <p:cTn id="44" fill="hold">
-                            <p:stCondLst>
-                              <p:cond delay="0"/>
-                            </p:stCondLst>
-                            <p:childTnLst>
                               <p:par>
-                                <p:cTn id="45" presetID="1" presetClass="entr" presetSubtype="0" fill="hold" grpId="0" nodeType="afterEffect">
+                                <p:cTn id="33" presetID="1" presetClass="entr" presetSubtype="0" fill="hold" grpId="0" nodeType="withEffect">
                                   <p:stCondLst>
                                     <p:cond delay="0"/>
                                   </p:stCondLst>
                                   <p:childTnLst>
                                     <p:set>
                                       <p:cBhvr>
-                                        <p:cTn id="46" dur="1" fill="hold">
+                                        <p:cTn id="34" dur="1" fill="hold">
                                           <p:stCondLst>
                                             <p:cond delay="0"/>
                                           </p:stCondLst>
@@ -8118,21 +7826,30 @@
                             </p:childTnLst>
                           </p:cTn>
                         </p:par>
+                      </p:childTnLst>
+                    </p:cTn>
+                  </p:par>
+                  <p:par>
+                    <p:cTn id="35" fill="hold">
+                      <p:stCondLst>
+                        <p:cond delay="indefinite"/>
+                      </p:stCondLst>
+                      <p:childTnLst>
                         <p:par>
-                          <p:cTn id="47" fill="hold">
+                          <p:cTn id="36" fill="hold">
                             <p:stCondLst>
                               <p:cond delay="0"/>
                             </p:stCondLst>
                             <p:childTnLst>
                               <p:par>
-                                <p:cTn id="48" presetID="1" presetClass="entr" presetSubtype="0" fill="hold" grpId="0" nodeType="afterEffect">
+                                <p:cTn id="37" presetID="1" presetClass="entr" presetSubtype="0" fill="hold" grpId="0" nodeType="clickEffect">
                                   <p:stCondLst>
                                     <p:cond delay="0"/>
                                   </p:stCondLst>
                                   <p:childTnLst>
                                     <p:set>
                                       <p:cBhvr>
-                                        <p:cTn id="49" dur="1" fill="hold">
+                                        <p:cTn id="38" dur="1" fill="hold">
                                           <p:stCondLst>
                                             <p:cond delay="0"/>
                                           </p:stCondLst>
@@ -8151,24 +7868,15 @@
                                   </p:childTnLst>
                                 </p:cTn>
                               </p:par>
-                            </p:childTnLst>
-                          </p:cTn>
-                        </p:par>
-                        <p:par>
-                          <p:cTn id="50" fill="hold">
-                            <p:stCondLst>
-                              <p:cond delay="0"/>
-                            </p:stCondLst>
-                            <p:childTnLst>
                               <p:par>
-                                <p:cTn id="51" presetID="1" presetClass="entr" presetSubtype="0" fill="hold" grpId="0" nodeType="afterEffect">
+                                <p:cTn id="39" presetID="1" presetClass="entr" presetSubtype="0" fill="hold" grpId="0" nodeType="withEffect">
                                   <p:stCondLst>
                                     <p:cond delay="0"/>
                                   </p:stCondLst>
                                   <p:childTnLst>
                                     <p:set>
                                       <p:cBhvr>
-                                        <p:cTn id="52" dur="1" fill="hold">
+                                        <p:cTn id="40" dur="1" fill="hold">
                                           <p:stCondLst>
                                             <p:cond delay="0"/>
                                           </p:stCondLst>
@@ -8187,24 +7895,15 @@
                                   </p:childTnLst>
                                 </p:cTn>
                               </p:par>
-                            </p:childTnLst>
-                          </p:cTn>
-                        </p:par>
-                        <p:par>
-                          <p:cTn id="53" fill="hold">
-                            <p:stCondLst>
-                              <p:cond delay="0"/>
-                            </p:stCondLst>
-                            <p:childTnLst>
                               <p:par>
-                                <p:cTn id="54" presetID="1" presetClass="entr" presetSubtype="0" fill="hold" grpId="0" nodeType="afterEffect">
+                                <p:cTn id="41" presetID="1" presetClass="entr" presetSubtype="0" fill="hold" grpId="0" nodeType="withEffect">
                                   <p:stCondLst>
                                     <p:cond delay="0"/>
                                   </p:stCondLst>
                                   <p:childTnLst>
                                     <p:set>
                                       <p:cBhvr>
-                                        <p:cTn id="55" dur="1" fill="hold">
+                                        <p:cTn id="42" dur="1" fill="hold">
                                           <p:stCondLst>
                                             <p:cond delay="0"/>
                                           </p:stCondLst>
@@ -8226,21 +7925,30 @@
                             </p:childTnLst>
                           </p:cTn>
                         </p:par>
+                      </p:childTnLst>
+                    </p:cTn>
+                  </p:par>
+                  <p:par>
+                    <p:cTn id="43" fill="hold">
+                      <p:stCondLst>
+                        <p:cond delay="indefinite"/>
+                      </p:stCondLst>
+                      <p:childTnLst>
                         <p:par>
-                          <p:cTn id="56" fill="hold">
+                          <p:cTn id="44" fill="hold">
                             <p:stCondLst>
                               <p:cond delay="0"/>
                             </p:stCondLst>
                             <p:childTnLst>
                               <p:par>
-                                <p:cTn id="57" presetID="1" presetClass="entr" presetSubtype="0" fill="hold" grpId="0" nodeType="afterEffect">
+                                <p:cTn id="45" presetID="1" presetClass="entr" presetSubtype="0" fill="hold" grpId="0" nodeType="clickEffect">
                                   <p:stCondLst>
                                     <p:cond delay="0"/>
                                   </p:stCondLst>
                                   <p:childTnLst>
                                     <p:set>
                                       <p:cBhvr>
-                                        <p:cTn id="58" dur="1" fill="hold">
+                                        <p:cTn id="46" dur="1" fill="hold">
                                           <p:stCondLst>
                                             <p:cond delay="0"/>
                                           </p:stCondLst>
@@ -8287,8 +7995,6 @@
       </p:par>
     </p:tnLst>
     <p:bldLst>
-      <p:bldP spid="4" grpId="0"/>
-      <p:bldP spid="5" grpId="0"/>
       <p:bldP spid="7" grpId="0" animBg="1"/>
       <p:bldP spid="8" grpId="0"/>
       <p:bldP spid="9" grpId="0"/>
@@ -9740,7 +9446,7 @@
     </p:spTree>
     <p:extLst>
       <p:ext uri="{BB962C8B-B14F-4D97-AF65-F5344CB8AC3E}">
-        <p14:creationId xmlns:p14="http://schemas.microsoft.com/office/powerpoint/2010/main" val="2760875841"/>
+        <p14:creationId xmlns:p14="http://schemas.microsoft.com/office/powerpoint/2010/main" val="3985116570"/>
       </p:ext>
     </p:extLst>
   </p:cSld>
@@ -9759,9 +9465,6 @@
                     <p:cTn id="3" fill="hold">
                       <p:stCondLst>
                         <p:cond delay="indefinite"/>
-                        <p:cond evt="onBegin" delay="0">
-                          <p:tn val="2"/>
-                        </p:cond>
                       </p:stCondLst>
                       <p:childTnLst>
                         <p:par>
@@ -9771,7 +9474,7 @@
                             </p:stCondLst>
                             <p:childTnLst>
                               <p:par>
-                                <p:cTn id="5" presetID="1" presetClass="entr" presetSubtype="0" fill="hold" grpId="0" nodeType="withEffect">
+                                <p:cTn id="5" presetID="1" presetClass="entr" presetSubtype="0" fill="hold" grpId="0" nodeType="clickEffect">
                                   <p:stCondLst>
                                     <p:cond delay="0"/>
                                   </p:stCondLst>
@@ -9784,7 +9487,7 @@
                                           </p:stCondLst>
                                         </p:cTn>
                                         <p:tgtEl>
-                                          <p:spTgt spid="4"/>
+                                          <p:spTgt spid="7"/>
                                         </p:tgtEl>
                                         <p:attrNameLst>
                                           <p:attrName>style.visibility</p:attrName>
@@ -9811,7 +9514,7 @@
                                           </p:stCondLst>
                                         </p:cTn>
                                         <p:tgtEl>
-                                          <p:spTgt spid="5"/>
+                                          <p:spTgt spid="8"/>
                                         </p:tgtEl>
                                         <p:attrNameLst>
                                           <p:attrName>style.visibility</p:attrName>
@@ -9825,7 +9528,7 @@
                                 </p:cTn>
                               </p:par>
                               <p:par>
-                                <p:cTn id="9" presetID="1" presetClass="entr" presetSubtype="0" fill="hold" nodeType="withEffect">
+                                <p:cTn id="9" presetID="1" presetClass="entr" presetSubtype="0" fill="hold" grpId="0" nodeType="withEffect">
                                   <p:stCondLst>
                                     <p:cond delay="0"/>
                                   </p:stCondLst>
@@ -9833,114 +9536,6 @@
                                     <p:set>
                                       <p:cBhvr>
                                         <p:cTn id="10" dur="1" fill="hold">
-                                          <p:stCondLst>
-                                            <p:cond delay="0"/>
-                                          </p:stCondLst>
-                                        </p:cTn>
-                                        <p:tgtEl>
-                                          <p:spTgt spid="6"/>
-                                        </p:tgtEl>
-                                        <p:attrNameLst>
-                                          <p:attrName>style.visibility</p:attrName>
-                                        </p:attrNameLst>
-                                      </p:cBhvr>
-                                      <p:to>
-                                        <p:strVal val="visible"/>
-                                      </p:to>
-                                    </p:set>
-                                  </p:childTnLst>
-                                </p:cTn>
-                              </p:par>
-                            </p:childTnLst>
-                          </p:cTn>
-                        </p:par>
-                        <p:par>
-                          <p:cTn id="11" fill="hold">
-                            <p:stCondLst>
-                              <p:cond delay="0"/>
-                            </p:stCondLst>
-                            <p:childTnLst>
-                              <p:par>
-                                <p:cTn id="12" presetID="1" presetClass="entr" presetSubtype="0" fill="hold" grpId="0" nodeType="afterEffect">
-                                  <p:stCondLst>
-                                    <p:cond delay="0"/>
-                                  </p:stCondLst>
-                                  <p:childTnLst>
-                                    <p:set>
-                                      <p:cBhvr>
-                                        <p:cTn id="13" dur="1" fill="hold">
-                                          <p:stCondLst>
-                                            <p:cond delay="0"/>
-                                          </p:stCondLst>
-                                        </p:cTn>
-                                        <p:tgtEl>
-                                          <p:spTgt spid="7"/>
-                                        </p:tgtEl>
-                                        <p:attrNameLst>
-                                          <p:attrName>style.visibility</p:attrName>
-                                        </p:attrNameLst>
-                                      </p:cBhvr>
-                                      <p:to>
-                                        <p:strVal val="visible"/>
-                                      </p:to>
-                                    </p:set>
-                                  </p:childTnLst>
-                                </p:cTn>
-                              </p:par>
-                            </p:childTnLst>
-                          </p:cTn>
-                        </p:par>
-                        <p:par>
-                          <p:cTn id="14" fill="hold">
-                            <p:stCondLst>
-                              <p:cond delay="0"/>
-                            </p:stCondLst>
-                            <p:childTnLst>
-                              <p:par>
-                                <p:cTn id="15" presetID="1" presetClass="entr" presetSubtype="0" fill="hold" grpId="0" nodeType="afterEffect">
-                                  <p:stCondLst>
-                                    <p:cond delay="0"/>
-                                  </p:stCondLst>
-                                  <p:childTnLst>
-                                    <p:set>
-                                      <p:cBhvr>
-                                        <p:cTn id="16" dur="1" fill="hold">
-                                          <p:stCondLst>
-                                            <p:cond delay="0"/>
-                                          </p:stCondLst>
-                                        </p:cTn>
-                                        <p:tgtEl>
-                                          <p:spTgt spid="8"/>
-                                        </p:tgtEl>
-                                        <p:attrNameLst>
-                                          <p:attrName>style.visibility</p:attrName>
-                                        </p:attrNameLst>
-                                      </p:cBhvr>
-                                      <p:to>
-                                        <p:strVal val="visible"/>
-                                      </p:to>
-                                    </p:set>
-                                  </p:childTnLst>
-                                </p:cTn>
-                              </p:par>
-                            </p:childTnLst>
-                          </p:cTn>
-                        </p:par>
-                        <p:par>
-                          <p:cTn id="17" fill="hold">
-                            <p:stCondLst>
-                              <p:cond delay="0"/>
-                            </p:stCondLst>
-                            <p:childTnLst>
-                              <p:par>
-                                <p:cTn id="18" presetID="1" presetClass="entr" presetSubtype="0" fill="hold" grpId="0" nodeType="afterEffect">
-                                  <p:stCondLst>
-                                    <p:cond delay="0"/>
-                                  </p:stCondLst>
-                                  <p:childTnLst>
-                                    <p:set>
-                                      <p:cBhvr>
-                                        <p:cTn id="19" dur="1" fill="hold">
                                           <p:stCondLst>
                                             <p:cond delay="0"/>
                                           </p:stCondLst>
@@ -9962,21 +9557,30 @@
                             </p:childTnLst>
                           </p:cTn>
                         </p:par>
+                      </p:childTnLst>
+                    </p:cTn>
+                  </p:par>
+                  <p:par>
+                    <p:cTn id="11" fill="hold">
+                      <p:stCondLst>
+                        <p:cond delay="indefinite"/>
+                      </p:stCondLst>
+                      <p:childTnLst>
                         <p:par>
-                          <p:cTn id="20" fill="hold">
+                          <p:cTn id="12" fill="hold">
                             <p:stCondLst>
                               <p:cond delay="0"/>
                             </p:stCondLst>
                             <p:childTnLst>
                               <p:par>
-                                <p:cTn id="21" presetID="1" presetClass="entr" presetSubtype="0" fill="hold" grpId="0" nodeType="afterEffect">
+                                <p:cTn id="13" presetID="1" presetClass="entr" presetSubtype="0" fill="hold" grpId="0" nodeType="clickEffect">
                                   <p:stCondLst>
                                     <p:cond delay="0"/>
                                   </p:stCondLst>
                                   <p:childTnLst>
                                     <p:set>
                                       <p:cBhvr>
-                                        <p:cTn id="22" dur="1" fill="hold">
+                                        <p:cTn id="14" dur="1" fill="hold">
                                           <p:stCondLst>
                                             <p:cond delay="0"/>
                                           </p:stCondLst>
@@ -9995,24 +9599,15 @@
                                   </p:childTnLst>
                                 </p:cTn>
                               </p:par>
-                            </p:childTnLst>
-                          </p:cTn>
-                        </p:par>
-                        <p:par>
-                          <p:cTn id="23" fill="hold">
-                            <p:stCondLst>
-                              <p:cond delay="0"/>
-                            </p:stCondLst>
-                            <p:childTnLst>
                               <p:par>
-                                <p:cTn id="24" presetID="1" presetClass="entr" presetSubtype="0" fill="hold" grpId="0" nodeType="afterEffect">
+                                <p:cTn id="15" presetID="1" presetClass="entr" presetSubtype="0" fill="hold" grpId="0" nodeType="withEffect">
                                   <p:stCondLst>
                                     <p:cond delay="0"/>
                                   </p:stCondLst>
                                   <p:childTnLst>
                                     <p:set>
                                       <p:cBhvr>
-                                        <p:cTn id="25" dur="1" fill="hold">
+                                        <p:cTn id="16" dur="1" fill="hold">
                                           <p:stCondLst>
                                             <p:cond delay="0"/>
                                           </p:stCondLst>
@@ -10031,24 +9626,15 @@
                                   </p:childTnLst>
                                 </p:cTn>
                               </p:par>
-                            </p:childTnLst>
-                          </p:cTn>
-                        </p:par>
-                        <p:par>
-                          <p:cTn id="26" fill="hold">
-                            <p:stCondLst>
-                              <p:cond delay="0"/>
-                            </p:stCondLst>
-                            <p:childTnLst>
                               <p:par>
-                                <p:cTn id="27" presetID="1" presetClass="entr" presetSubtype="0" fill="hold" grpId="0" nodeType="afterEffect">
+                                <p:cTn id="17" presetID="1" presetClass="entr" presetSubtype="0" fill="hold" grpId="0" nodeType="withEffect">
                                   <p:stCondLst>
                                     <p:cond delay="0"/>
                                   </p:stCondLst>
                                   <p:childTnLst>
                                     <p:set>
                                       <p:cBhvr>
-                                        <p:cTn id="28" dur="1" fill="hold">
+                                        <p:cTn id="18" dur="1" fill="hold">
                                           <p:stCondLst>
                                             <p:cond delay="0"/>
                                           </p:stCondLst>
@@ -10070,21 +9656,30 @@
                             </p:childTnLst>
                           </p:cTn>
                         </p:par>
+                      </p:childTnLst>
+                    </p:cTn>
+                  </p:par>
+                  <p:par>
+                    <p:cTn id="19" fill="hold">
+                      <p:stCondLst>
+                        <p:cond delay="indefinite"/>
+                      </p:stCondLst>
+                      <p:childTnLst>
                         <p:par>
-                          <p:cTn id="29" fill="hold">
+                          <p:cTn id="20" fill="hold">
                             <p:stCondLst>
                               <p:cond delay="0"/>
                             </p:stCondLst>
                             <p:childTnLst>
                               <p:par>
-                                <p:cTn id="30" presetID="1" presetClass="entr" presetSubtype="0" fill="hold" grpId="0" nodeType="afterEffect">
+                                <p:cTn id="21" presetID="1" presetClass="entr" presetSubtype="0" fill="hold" grpId="0" nodeType="clickEffect">
                                   <p:stCondLst>
                                     <p:cond delay="0"/>
                                   </p:stCondLst>
                                   <p:childTnLst>
                                     <p:set>
                                       <p:cBhvr>
-                                        <p:cTn id="31" dur="1" fill="hold">
+                                        <p:cTn id="22" dur="1" fill="hold">
                                           <p:stCondLst>
                                             <p:cond delay="0"/>
                                           </p:stCondLst>
@@ -10103,24 +9698,15 @@
                                   </p:childTnLst>
                                 </p:cTn>
                               </p:par>
-                            </p:childTnLst>
-                          </p:cTn>
-                        </p:par>
-                        <p:par>
-                          <p:cTn id="32" fill="hold">
-                            <p:stCondLst>
-                              <p:cond delay="0"/>
-                            </p:stCondLst>
-                            <p:childTnLst>
                               <p:par>
-                                <p:cTn id="33" presetID="1" presetClass="entr" presetSubtype="0" fill="hold" grpId="0" nodeType="afterEffect">
+                                <p:cTn id="23" presetID="1" presetClass="entr" presetSubtype="0" fill="hold" grpId="0" nodeType="withEffect">
                                   <p:stCondLst>
                                     <p:cond delay="0"/>
                                   </p:stCondLst>
                                   <p:childTnLst>
                                     <p:set>
                                       <p:cBhvr>
-                                        <p:cTn id="34" dur="1" fill="hold">
+                                        <p:cTn id="24" dur="1" fill="hold">
                                           <p:stCondLst>
                                             <p:cond delay="0"/>
                                           </p:stCondLst>
@@ -10139,24 +9725,15 @@
                                   </p:childTnLst>
                                 </p:cTn>
                               </p:par>
-                            </p:childTnLst>
-                          </p:cTn>
-                        </p:par>
-                        <p:par>
-                          <p:cTn id="35" fill="hold">
-                            <p:stCondLst>
-                              <p:cond delay="0"/>
-                            </p:stCondLst>
-                            <p:childTnLst>
                               <p:par>
-                                <p:cTn id="36" presetID="1" presetClass="entr" presetSubtype="0" fill="hold" grpId="0" nodeType="afterEffect">
+                                <p:cTn id="25" presetID="1" presetClass="entr" presetSubtype="0" fill="hold" grpId="0" nodeType="withEffect">
                                   <p:stCondLst>
                                     <p:cond delay="0"/>
                                   </p:stCondLst>
                                   <p:childTnLst>
                                     <p:set>
                                       <p:cBhvr>
-                                        <p:cTn id="37" dur="1" fill="hold">
+                                        <p:cTn id="26" dur="1" fill="hold">
                                           <p:stCondLst>
                                             <p:cond delay="0"/>
                                           </p:stCondLst>
@@ -10178,21 +9755,30 @@
                             </p:childTnLst>
                           </p:cTn>
                         </p:par>
+                      </p:childTnLst>
+                    </p:cTn>
+                  </p:par>
+                  <p:par>
+                    <p:cTn id="27" fill="hold">
+                      <p:stCondLst>
+                        <p:cond delay="indefinite"/>
+                      </p:stCondLst>
+                      <p:childTnLst>
                         <p:par>
-                          <p:cTn id="38" fill="hold">
+                          <p:cTn id="28" fill="hold">
                             <p:stCondLst>
                               <p:cond delay="0"/>
                             </p:stCondLst>
                             <p:childTnLst>
                               <p:par>
-                                <p:cTn id="39" presetID="1" presetClass="entr" presetSubtype="0" fill="hold" grpId="0" nodeType="afterEffect">
+                                <p:cTn id="29" presetID="1" presetClass="entr" presetSubtype="0" fill="hold" grpId="0" nodeType="clickEffect">
                                   <p:stCondLst>
                                     <p:cond delay="0"/>
                                   </p:stCondLst>
                                   <p:childTnLst>
                                     <p:set>
                                       <p:cBhvr>
-                                        <p:cTn id="40" dur="1" fill="hold">
+                                        <p:cTn id="30" dur="1" fill="hold">
                                           <p:stCondLst>
                                             <p:cond delay="0"/>
                                           </p:stCondLst>
@@ -10211,24 +9797,15 @@
                                   </p:childTnLst>
                                 </p:cTn>
                               </p:par>
-                            </p:childTnLst>
-                          </p:cTn>
-                        </p:par>
-                        <p:par>
-                          <p:cTn id="41" fill="hold">
-                            <p:stCondLst>
-                              <p:cond delay="0"/>
-                            </p:stCondLst>
-                            <p:childTnLst>
                               <p:par>
-                                <p:cTn id="42" presetID="1" presetClass="entr" presetSubtype="0" fill="hold" grpId="0" nodeType="afterEffect">
+                                <p:cTn id="31" presetID="1" presetClass="entr" presetSubtype="0" fill="hold" grpId="0" nodeType="withEffect">
                                   <p:stCondLst>
                                     <p:cond delay="0"/>
                                   </p:stCondLst>
                                   <p:childTnLst>
                                     <p:set>
                                       <p:cBhvr>
-                                        <p:cTn id="43" dur="1" fill="hold">
+                                        <p:cTn id="32" dur="1" fill="hold">
                                           <p:stCondLst>
                                             <p:cond delay="0"/>
                                           </p:stCondLst>
@@ -10247,24 +9824,15 @@
                                   </p:childTnLst>
                                 </p:cTn>
                               </p:par>
-                            </p:childTnLst>
-                          </p:cTn>
-                        </p:par>
-                        <p:par>
-                          <p:cTn id="44" fill="hold">
-                            <p:stCondLst>
-                              <p:cond delay="0"/>
-                            </p:stCondLst>
-                            <p:childTnLst>
                               <p:par>
-                                <p:cTn id="45" presetID="1" presetClass="entr" presetSubtype="0" fill="hold" grpId="0" nodeType="afterEffect">
+                                <p:cTn id="33" presetID="1" presetClass="entr" presetSubtype="0" fill="hold" grpId="0" nodeType="withEffect">
                                   <p:stCondLst>
                                     <p:cond delay="0"/>
                                   </p:stCondLst>
                                   <p:childTnLst>
                                     <p:set>
                                       <p:cBhvr>
-                                        <p:cTn id="46" dur="1" fill="hold">
+                                        <p:cTn id="34" dur="1" fill="hold">
                                           <p:stCondLst>
                                             <p:cond delay="0"/>
                                           </p:stCondLst>
@@ -10286,21 +9854,30 @@
                             </p:childTnLst>
                           </p:cTn>
                         </p:par>
+                      </p:childTnLst>
+                    </p:cTn>
+                  </p:par>
+                  <p:par>
+                    <p:cTn id="35" fill="hold">
+                      <p:stCondLst>
+                        <p:cond delay="indefinite"/>
+                      </p:stCondLst>
+                      <p:childTnLst>
                         <p:par>
-                          <p:cTn id="47" fill="hold">
+                          <p:cTn id="36" fill="hold">
                             <p:stCondLst>
                               <p:cond delay="0"/>
                             </p:stCondLst>
                             <p:childTnLst>
                               <p:par>
-                                <p:cTn id="48" presetID="1" presetClass="entr" presetSubtype="0" fill="hold" grpId="0" nodeType="afterEffect">
+                                <p:cTn id="37" presetID="1" presetClass="entr" presetSubtype="0" fill="hold" grpId="0" nodeType="clickEffect">
                                   <p:stCondLst>
                                     <p:cond delay="0"/>
                                   </p:stCondLst>
                                   <p:childTnLst>
                                     <p:set>
                                       <p:cBhvr>
-                                        <p:cTn id="49" dur="1" fill="hold">
+                                        <p:cTn id="38" dur="1" fill="hold">
                                           <p:stCondLst>
                                             <p:cond delay="0"/>
                                           </p:stCondLst>
@@ -10319,24 +9896,15 @@
                                   </p:childTnLst>
                                 </p:cTn>
                               </p:par>
-                            </p:childTnLst>
-                          </p:cTn>
-                        </p:par>
-                        <p:par>
-                          <p:cTn id="50" fill="hold">
-                            <p:stCondLst>
-                              <p:cond delay="0"/>
-                            </p:stCondLst>
-                            <p:childTnLst>
                               <p:par>
-                                <p:cTn id="51" presetID="1" presetClass="entr" presetSubtype="0" fill="hold" grpId="0" nodeType="afterEffect">
+                                <p:cTn id="39" presetID="1" presetClass="entr" presetSubtype="0" fill="hold" grpId="0" nodeType="withEffect">
                                   <p:stCondLst>
                                     <p:cond delay="0"/>
                                   </p:stCondLst>
                                   <p:childTnLst>
                                     <p:set>
                                       <p:cBhvr>
-                                        <p:cTn id="52" dur="1" fill="hold">
+                                        <p:cTn id="40" dur="1" fill="hold">
                                           <p:stCondLst>
                                             <p:cond delay="0"/>
                                           </p:stCondLst>
@@ -10355,24 +9923,15 @@
                                   </p:childTnLst>
                                 </p:cTn>
                               </p:par>
-                            </p:childTnLst>
-                          </p:cTn>
-                        </p:par>
-                        <p:par>
-                          <p:cTn id="53" fill="hold">
-                            <p:stCondLst>
-                              <p:cond delay="0"/>
-                            </p:stCondLst>
-                            <p:childTnLst>
                               <p:par>
-                                <p:cTn id="54" presetID="1" presetClass="entr" presetSubtype="0" fill="hold" grpId="0" nodeType="afterEffect">
+                                <p:cTn id="41" presetID="1" presetClass="entr" presetSubtype="0" fill="hold" grpId="0" nodeType="withEffect">
                                   <p:stCondLst>
                                     <p:cond delay="0"/>
                                   </p:stCondLst>
                                   <p:childTnLst>
                                     <p:set>
                                       <p:cBhvr>
-                                        <p:cTn id="55" dur="1" fill="hold">
+                                        <p:cTn id="42" dur="1" fill="hold">
                                           <p:stCondLst>
                                             <p:cond delay="0"/>
                                           </p:stCondLst>
@@ -10394,309 +9953,30 @@
                             </p:childTnLst>
                           </p:cTn>
                         </p:par>
+                      </p:childTnLst>
+                    </p:cTn>
+                  </p:par>
+                  <p:par>
+                    <p:cTn id="43" fill="hold">
+                      <p:stCondLst>
+                        <p:cond delay="indefinite"/>
+                      </p:stCondLst>
+                      <p:childTnLst>
                         <p:par>
-                          <p:cTn id="56" fill="hold">
+                          <p:cTn id="44" fill="hold">
                             <p:stCondLst>
                               <p:cond delay="0"/>
                             </p:stCondLst>
                             <p:childTnLst>
                               <p:par>
-                                <p:cTn id="57" presetID="1" presetClass="entr" presetSubtype="0" fill="hold" nodeType="afterEffect">
+                                <p:cTn id="45" presetID="1" presetClass="entr" presetSubtype="0" fill="hold" grpId="0" nodeType="clickEffect">
                                   <p:stCondLst>
                                     <p:cond delay="0"/>
                                   </p:stCondLst>
                                   <p:childTnLst>
                                     <p:set>
                                       <p:cBhvr>
-                                        <p:cTn id="58" dur="1" fill="hold">
-                                          <p:stCondLst>
-                                            <p:cond delay="0"/>
-                                          </p:stCondLst>
-                                        </p:cTn>
-                                        <p:tgtEl>
-                                          <p:spTgt spid="22"/>
-                                        </p:tgtEl>
-                                        <p:attrNameLst>
-                                          <p:attrName>style.visibility</p:attrName>
-                                        </p:attrNameLst>
-                                      </p:cBhvr>
-                                      <p:to>
-                                        <p:strVal val="visible"/>
-                                      </p:to>
-                                    </p:set>
-                                  </p:childTnLst>
-                                </p:cTn>
-                              </p:par>
-                            </p:childTnLst>
-                          </p:cTn>
-                        </p:par>
-                        <p:par>
-                          <p:cTn id="59" fill="hold">
-                            <p:stCondLst>
-                              <p:cond delay="0"/>
-                            </p:stCondLst>
-                            <p:childTnLst>
-                              <p:par>
-                                <p:cTn id="60" presetID="1" presetClass="entr" presetSubtype="0" fill="hold" grpId="0" nodeType="afterEffect">
-                                  <p:stCondLst>
-                                    <p:cond delay="0"/>
-                                  </p:stCondLst>
-                                  <p:childTnLst>
-                                    <p:set>
-                                      <p:cBhvr>
-                                        <p:cTn id="61" dur="1" fill="hold">
-                                          <p:stCondLst>
-                                            <p:cond delay="0"/>
-                                          </p:stCondLst>
-                                        </p:cTn>
-                                        <p:tgtEl>
-                                          <p:spTgt spid="23"/>
-                                        </p:tgtEl>
-                                        <p:attrNameLst>
-                                          <p:attrName>style.visibility</p:attrName>
-                                        </p:attrNameLst>
-                                      </p:cBhvr>
-                                      <p:to>
-                                        <p:strVal val="visible"/>
-                                      </p:to>
-                                    </p:set>
-                                  </p:childTnLst>
-                                </p:cTn>
-                              </p:par>
-                            </p:childTnLst>
-                          </p:cTn>
-                        </p:par>
-                        <p:par>
-                          <p:cTn id="62" fill="hold">
-                            <p:stCondLst>
-                              <p:cond delay="0"/>
-                            </p:stCondLst>
-                            <p:childTnLst>
-                              <p:par>
-                                <p:cTn id="63" presetID="1" presetClass="entr" presetSubtype="0" fill="hold" nodeType="afterEffect">
-                                  <p:stCondLst>
-                                    <p:cond delay="0"/>
-                                  </p:stCondLst>
-                                  <p:childTnLst>
-                                    <p:set>
-                                      <p:cBhvr>
-                                        <p:cTn id="64" dur="1" fill="hold">
-                                          <p:stCondLst>
-                                            <p:cond delay="0"/>
-                                          </p:stCondLst>
-                                        </p:cTn>
-                                        <p:tgtEl>
-                                          <p:spTgt spid="24"/>
-                                        </p:tgtEl>
-                                        <p:attrNameLst>
-                                          <p:attrName>style.visibility</p:attrName>
-                                        </p:attrNameLst>
-                                      </p:cBhvr>
-                                      <p:to>
-                                        <p:strVal val="visible"/>
-                                      </p:to>
-                                    </p:set>
-                                  </p:childTnLst>
-                                </p:cTn>
-                              </p:par>
-                            </p:childTnLst>
-                          </p:cTn>
-                        </p:par>
-                        <p:par>
-                          <p:cTn id="65" fill="hold">
-                            <p:stCondLst>
-                              <p:cond delay="0"/>
-                            </p:stCondLst>
-                            <p:childTnLst>
-                              <p:par>
-                                <p:cTn id="66" presetID="1" presetClass="entr" presetSubtype="0" fill="hold" grpId="0" nodeType="afterEffect">
-                                  <p:stCondLst>
-                                    <p:cond delay="0"/>
-                                  </p:stCondLst>
-                                  <p:childTnLst>
-                                    <p:set>
-                                      <p:cBhvr>
-                                        <p:cTn id="67" dur="1" fill="hold">
-                                          <p:stCondLst>
-                                            <p:cond delay="0"/>
-                                          </p:stCondLst>
-                                        </p:cTn>
-                                        <p:tgtEl>
-                                          <p:spTgt spid="25"/>
-                                        </p:tgtEl>
-                                        <p:attrNameLst>
-                                          <p:attrName>style.visibility</p:attrName>
-                                        </p:attrNameLst>
-                                      </p:cBhvr>
-                                      <p:to>
-                                        <p:strVal val="visible"/>
-                                      </p:to>
-                                    </p:set>
-                                  </p:childTnLst>
-                                </p:cTn>
-                              </p:par>
-                            </p:childTnLst>
-                          </p:cTn>
-                        </p:par>
-                        <p:par>
-                          <p:cTn id="68" fill="hold">
-                            <p:stCondLst>
-                              <p:cond delay="0"/>
-                            </p:stCondLst>
-                            <p:childTnLst>
-                              <p:par>
-                                <p:cTn id="69" presetID="1" presetClass="entr" presetSubtype="0" fill="hold" nodeType="afterEffect">
-                                  <p:stCondLst>
-                                    <p:cond delay="0"/>
-                                  </p:stCondLst>
-                                  <p:childTnLst>
-                                    <p:set>
-                                      <p:cBhvr>
-                                        <p:cTn id="70" dur="1" fill="hold">
-                                          <p:stCondLst>
-                                            <p:cond delay="0"/>
-                                          </p:stCondLst>
-                                        </p:cTn>
-                                        <p:tgtEl>
-                                          <p:spTgt spid="26"/>
-                                        </p:tgtEl>
-                                        <p:attrNameLst>
-                                          <p:attrName>style.visibility</p:attrName>
-                                        </p:attrNameLst>
-                                      </p:cBhvr>
-                                      <p:to>
-                                        <p:strVal val="visible"/>
-                                      </p:to>
-                                    </p:set>
-                                  </p:childTnLst>
-                                </p:cTn>
-                              </p:par>
-                            </p:childTnLst>
-                          </p:cTn>
-                        </p:par>
-                        <p:par>
-                          <p:cTn id="71" fill="hold">
-                            <p:stCondLst>
-                              <p:cond delay="0"/>
-                            </p:stCondLst>
-                            <p:childTnLst>
-                              <p:par>
-                                <p:cTn id="72" presetID="1" presetClass="entr" presetSubtype="0" fill="hold" grpId="0" nodeType="afterEffect">
-                                  <p:stCondLst>
-                                    <p:cond delay="0"/>
-                                  </p:stCondLst>
-                                  <p:childTnLst>
-                                    <p:set>
-                                      <p:cBhvr>
-                                        <p:cTn id="73" dur="1" fill="hold">
-                                          <p:stCondLst>
-                                            <p:cond delay="0"/>
-                                          </p:stCondLst>
-                                        </p:cTn>
-                                        <p:tgtEl>
-                                          <p:spTgt spid="27"/>
-                                        </p:tgtEl>
-                                        <p:attrNameLst>
-                                          <p:attrName>style.visibility</p:attrName>
-                                        </p:attrNameLst>
-                                      </p:cBhvr>
-                                      <p:to>
-                                        <p:strVal val="visible"/>
-                                      </p:to>
-                                    </p:set>
-                                  </p:childTnLst>
-                                </p:cTn>
-                              </p:par>
-                            </p:childTnLst>
-                          </p:cTn>
-                        </p:par>
-                        <p:par>
-                          <p:cTn id="74" fill="hold">
-                            <p:stCondLst>
-                              <p:cond delay="0"/>
-                            </p:stCondLst>
-                            <p:childTnLst>
-                              <p:par>
-                                <p:cTn id="75" presetID="1" presetClass="entr" presetSubtype="0" fill="hold" nodeType="afterEffect">
-                                  <p:stCondLst>
-                                    <p:cond delay="0"/>
-                                  </p:stCondLst>
-                                  <p:childTnLst>
-                                    <p:set>
-                                      <p:cBhvr>
-                                        <p:cTn id="76" dur="1" fill="hold">
-                                          <p:stCondLst>
-                                            <p:cond delay="0"/>
-                                          </p:stCondLst>
-                                        </p:cTn>
-                                        <p:tgtEl>
-                                          <p:spTgt spid="28"/>
-                                        </p:tgtEl>
-                                        <p:attrNameLst>
-                                          <p:attrName>style.visibility</p:attrName>
-                                        </p:attrNameLst>
-                                      </p:cBhvr>
-                                      <p:to>
-                                        <p:strVal val="visible"/>
-                                      </p:to>
-                                    </p:set>
-                                  </p:childTnLst>
-                                </p:cTn>
-                              </p:par>
-                            </p:childTnLst>
-                          </p:cTn>
-                        </p:par>
-                        <p:par>
-                          <p:cTn id="77" fill="hold">
-                            <p:stCondLst>
-                              <p:cond delay="0"/>
-                            </p:stCondLst>
-                            <p:childTnLst>
-                              <p:par>
-                                <p:cTn id="78" presetID="1" presetClass="entr" presetSubtype="0" fill="hold" grpId="0" nodeType="afterEffect">
-                                  <p:stCondLst>
-                                    <p:cond delay="0"/>
-                                  </p:stCondLst>
-                                  <p:childTnLst>
-                                    <p:set>
-                                      <p:cBhvr>
-                                        <p:cTn id="79" dur="1" fill="hold">
-                                          <p:stCondLst>
-                                            <p:cond delay="0"/>
-                                          </p:stCondLst>
-                                        </p:cTn>
-                                        <p:tgtEl>
-                                          <p:spTgt spid="29"/>
-                                        </p:tgtEl>
-                                        <p:attrNameLst>
-                                          <p:attrName>style.visibility</p:attrName>
-                                        </p:attrNameLst>
-                                      </p:cBhvr>
-                                      <p:to>
-                                        <p:strVal val="visible"/>
-                                      </p:to>
-                                    </p:set>
-                                  </p:childTnLst>
-                                </p:cTn>
-                              </p:par>
-                            </p:childTnLst>
-                          </p:cTn>
-                        </p:par>
-                        <p:par>
-                          <p:cTn id="80" fill="hold">
-                            <p:stCondLst>
-                              <p:cond delay="0"/>
-                            </p:stCondLst>
-                            <p:childTnLst>
-                              <p:par>
-                                <p:cTn id="81" presetID="1" presetClass="entr" presetSubtype="0" fill="hold" grpId="0" nodeType="afterEffect">
-                                  <p:stCondLst>
-                                    <p:cond delay="0"/>
-                                  </p:stCondLst>
-                                  <p:childTnLst>
-                                    <p:set>
-                                      <p:cBhvr>
-                                        <p:cTn id="82" dur="1" fill="hold">
+                                        <p:cTn id="46" dur="1" fill="hold">
                                           <p:stCondLst>
                                             <p:cond delay="0"/>
                                           </p:stCondLst>
@@ -10715,24 +9995,15 @@
                                   </p:childTnLst>
                                 </p:cTn>
                               </p:par>
-                            </p:childTnLst>
-                          </p:cTn>
-                        </p:par>
-                        <p:par>
-                          <p:cTn id="83" fill="hold">
-                            <p:stCondLst>
-                              <p:cond delay="0"/>
-                            </p:stCondLst>
-                            <p:childTnLst>
                               <p:par>
-                                <p:cTn id="84" presetID="1" presetClass="entr" presetSubtype="0" fill="hold" grpId="0" nodeType="afterEffect">
+                                <p:cTn id="47" presetID="1" presetClass="entr" presetSubtype="0" fill="hold" grpId="0" nodeType="withEffect">
                                   <p:stCondLst>
                                     <p:cond delay="0"/>
                                   </p:stCondLst>
                                   <p:childTnLst>
                                     <p:set>
                                       <p:cBhvr>
-                                        <p:cTn id="85" dur="1" fill="hold">
+                                        <p:cTn id="48" dur="1" fill="hold">
                                           <p:stCondLst>
                                             <p:cond delay="0"/>
                                           </p:stCondLst>
@@ -10779,8 +10050,6 @@
       </p:par>
     </p:tnLst>
     <p:bldLst>
-      <p:bldP spid="4" grpId="0"/>
-      <p:bldP spid="5" grpId="0"/>
       <p:bldP spid="7" grpId="0" animBg="1"/>
       <p:bldP spid="8" grpId="0"/>
       <p:bldP spid="9" grpId="0"/>
@@ -10796,10 +10065,6 @@
       <p:bldP spid="19" grpId="0" animBg="1"/>
       <p:bldP spid="20" grpId="0"/>
       <p:bldP spid="21" grpId="0"/>
-      <p:bldP spid="23" grpId="0" animBg="1"/>
-      <p:bldP spid="25" grpId="0" animBg="1"/>
-      <p:bldP spid="27" grpId="0" animBg="1"/>
-      <p:bldP spid="29" grpId="0" animBg="1"/>
       <p:bldP spid="30" grpId="0" animBg="1"/>
       <p:bldP spid="31" grpId="0"/>
     </p:bldLst>
@@ -11760,7 +11025,7 @@
     </p:spTree>
     <p:extLst>
       <p:ext uri="{BB962C8B-B14F-4D97-AF65-F5344CB8AC3E}">
-        <p14:creationId xmlns:p14="http://schemas.microsoft.com/office/powerpoint/2010/main" val="1328967979"/>
+        <p14:creationId xmlns:p14="http://schemas.microsoft.com/office/powerpoint/2010/main" val="4042285547"/>
       </p:ext>
     </p:extLst>
   </p:cSld>
@@ -11779,9 +11044,6 @@
                     <p:cTn id="3" fill="hold">
                       <p:stCondLst>
                         <p:cond delay="indefinite"/>
-                        <p:cond evt="onBegin" delay="0">
-                          <p:tn val="2"/>
-                        </p:cond>
                       </p:stCondLst>
                       <p:childTnLst>
                         <p:par>
@@ -11791,7 +11053,7 @@
                             </p:stCondLst>
                             <p:childTnLst>
                               <p:par>
-                                <p:cTn id="5" presetID="1" presetClass="entr" presetSubtype="0" fill="hold" grpId="0" nodeType="withEffect">
+                                <p:cTn id="5" presetID="1" presetClass="entr" presetSubtype="0" fill="hold" grpId="0" nodeType="clickEffect">
                                   <p:stCondLst>
                                     <p:cond delay="0"/>
                                   </p:stCondLst>
@@ -11804,7 +11066,7 @@
                                           </p:stCondLst>
                                         </p:cTn>
                                         <p:tgtEl>
-                                          <p:spTgt spid="4"/>
+                                          <p:spTgt spid="7"/>
                                         </p:tgtEl>
                                         <p:attrNameLst>
                                           <p:attrName>style.visibility</p:attrName>
@@ -11831,7 +11093,7 @@
                                           </p:stCondLst>
                                         </p:cTn>
                                         <p:tgtEl>
-                                          <p:spTgt spid="5"/>
+                                          <p:spTgt spid="8"/>
                                         </p:tgtEl>
                                         <p:attrNameLst>
                                           <p:attrName>style.visibility</p:attrName>
@@ -11845,7 +11107,7 @@
                                 </p:cTn>
                               </p:par>
                               <p:par>
-                                <p:cTn id="9" presetID="1" presetClass="entr" presetSubtype="0" fill="hold" nodeType="withEffect">
+                                <p:cTn id="9" presetID="1" presetClass="entr" presetSubtype="0" fill="hold" grpId="0" nodeType="withEffect">
                                   <p:stCondLst>
                                     <p:cond delay="0"/>
                                   </p:stCondLst>
@@ -11853,114 +11115,6 @@
                                     <p:set>
                                       <p:cBhvr>
                                         <p:cTn id="10" dur="1" fill="hold">
-                                          <p:stCondLst>
-                                            <p:cond delay="0"/>
-                                          </p:stCondLst>
-                                        </p:cTn>
-                                        <p:tgtEl>
-                                          <p:spTgt spid="6"/>
-                                        </p:tgtEl>
-                                        <p:attrNameLst>
-                                          <p:attrName>style.visibility</p:attrName>
-                                        </p:attrNameLst>
-                                      </p:cBhvr>
-                                      <p:to>
-                                        <p:strVal val="visible"/>
-                                      </p:to>
-                                    </p:set>
-                                  </p:childTnLst>
-                                </p:cTn>
-                              </p:par>
-                            </p:childTnLst>
-                          </p:cTn>
-                        </p:par>
-                        <p:par>
-                          <p:cTn id="11" fill="hold">
-                            <p:stCondLst>
-                              <p:cond delay="0"/>
-                            </p:stCondLst>
-                            <p:childTnLst>
-                              <p:par>
-                                <p:cTn id="12" presetID="1" presetClass="entr" presetSubtype="0" fill="hold" grpId="0" nodeType="afterEffect">
-                                  <p:stCondLst>
-                                    <p:cond delay="0"/>
-                                  </p:stCondLst>
-                                  <p:childTnLst>
-                                    <p:set>
-                                      <p:cBhvr>
-                                        <p:cTn id="13" dur="1" fill="hold">
-                                          <p:stCondLst>
-                                            <p:cond delay="0"/>
-                                          </p:stCondLst>
-                                        </p:cTn>
-                                        <p:tgtEl>
-                                          <p:spTgt spid="7"/>
-                                        </p:tgtEl>
-                                        <p:attrNameLst>
-                                          <p:attrName>style.visibility</p:attrName>
-                                        </p:attrNameLst>
-                                      </p:cBhvr>
-                                      <p:to>
-                                        <p:strVal val="visible"/>
-                                      </p:to>
-                                    </p:set>
-                                  </p:childTnLst>
-                                </p:cTn>
-                              </p:par>
-                            </p:childTnLst>
-                          </p:cTn>
-                        </p:par>
-                        <p:par>
-                          <p:cTn id="14" fill="hold">
-                            <p:stCondLst>
-                              <p:cond delay="0"/>
-                            </p:stCondLst>
-                            <p:childTnLst>
-                              <p:par>
-                                <p:cTn id="15" presetID="1" presetClass="entr" presetSubtype="0" fill="hold" grpId="0" nodeType="afterEffect">
-                                  <p:stCondLst>
-                                    <p:cond delay="0"/>
-                                  </p:stCondLst>
-                                  <p:childTnLst>
-                                    <p:set>
-                                      <p:cBhvr>
-                                        <p:cTn id="16" dur="1" fill="hold">
-                                          <p:stCondLst>
-                                            <p:cond delay="0"/>
-                                          </p:stCondLst>
-                                        </p:cTn>
-                                        <p:tgtEl>
-                                          <p:spTgt spid="8"/>
-                                        </p:tgtEl>
-                                        <p:attrNameLst>
-                                          <p:attrName>style.visibility</p:attrName>
-                                        </p:attrNameLst>
-                                      </p:cBhvr>
-                                      <p:to>
-                                        <p:strVal val="visible"/>
-                                      </p:to>
-                                    </p:set>
-                                  </p:childTnLst>
-                                </p:cTn>
-                              </p:par>
-                            </p:childTnLst>
-                          </p:cTn>
-                        </p:par>
-                        <p:par>
-                          <p:cTn id="17" fill="hold">
-                            <p:stCondLst>
-                              <p:cond delay="0"/>
-                            </p:stCondLst>
-                            <p:childTnLst>
-                              <p:par>
-                                <p:cTn id="18" presetID="1" presetClass="entr" presetSubtype="0" fill="hold" grpId="0" nodeType="afterEffect">
-                                  <p:stCondLst>
-                                    <p:cond delay="0"/>
-                                  </p:stCondLst>
-                                  <p:childTnLst>
-                                    <p:set>
-                                      <p:cBhvr>
-                                        <p:cTn id="19" dur="1" fill="hold">
                                           <p:stCondLst>
                                             <p:cond delay="0"/>
                                           </p:stCondLst>
@@ -11982,21 +11136,30 @@
                             </p:childTnLst>
                           </p:cTn>
                         </p:par>
+                      </p:childTnLst>
+                    </p:cTn>
+                  </p:par>
+                  <p:par>
+                    <p:cTn id="11" fill="hold">
+                      <p:stCondLst>
+                        <p:cond delay="indefinite"/>
+                      </p:stCondLst>
+                      <p:childTnLst>
                         <p:par>
-                          <p:cTn id="20" fill="hold">
+                          <p:cTn id="12" fill="hold">
                             <p:stCondLst>
                               <p:cond delay="0"/>
                             </p:stCondLst>
                             <p:childTnLst>
                               <p:par>
-                                <p:cTn id="21" presetID="1" presetClass="entr" presetSubtype="0" fill="hold" grpId="0" nodeType="afterEffect">
+                                <p:cTn id="13" presetID="1" presetClass="entr" presetSubtype="0" fill="hold" grpId="0" nodeType="clickEffect">
                                   <p:stCondLst>
                                     <p:cond delay="0"/>
                                   </p:stCondLst>
                                   <p:childTnLst>
                                     <p:set>
                                       <p:cBhvr>
-                                        <p:cTn id="22" dur="1" fill="hold">
+                                        <p:cTn id="14" dur="1" fill="hold">
                                           <p:stCondLst>
                                             <p:cond delay="0"/>
                                           </p:stCondLst>
@@ -12015,24 +11178,15 @@
                                   </p:childTnLst>
                                 </p:cTn>
                               </p:par>
-                            </p:childTnLst>
-                          </p:cTn>
-                        </p:par>
-                        <p:par>
-                          <p:cTn id="23" fill="hold">
-                            <p:stCondLst>
-                              <p:cond delay="0"/>
-                            </p:stCondLst>
-                            <p:childTnLst>
                               <p:par>
-                                <p:cTn id="24" presetID="1" presetClass="entr" presetSubtype="0" fill="hold" grpId="0" nodeType="afterEffect">
+                                <p:cTn id="15" presetID="1" presetClass="entr" presetSubtype="0" fill="hold" grpId="0" nodeType="withEffect">
                                   <p:stCondLst>
                                     <p:cond delay="0"/>
                                   </p:stCondLst>
                                   <p:childTnLst>
                                     <p:set>
                                       <p:cBhvr>
-                                        <p:cTn id="25" dur="1" fill="hold">
+                                        <p:cTn id="16" dur="1" fill="hold">
                                           <p:stCondLst>
                                             <p:cond delay="0"/>
                                           </p:stCondLst>
@@ -12051,24 +11205,15 @@
                                   </p:childTnLst>
                                 </p:cTn>
                               </p:par>
-                            </p:childTnLst>
-                          </p:cTn>
-                        </p:par>
-                        <p:par>
-                          <p:cTn id="26" fill="hold">
-                            <p:stCondLst>
-                              <p:cond delay="0"/>
-                            </p:stCondLst>
-                            <p:childTnLst>
                               <p:par>
-                                <p:cTn id="27" presetID="1" presetClass="entr" presetSubtype="0" fill="hold" grpId="0" nodeType="afterEffect">
+                                <p:cTn id="17" presetID="1" presetClass="entr" presetSubtype="0" fill="hold" grpId="0" nodeType="withEffect">
                                   <p:stCondLst>
                                     <p:cond delay="0"/>
                                   </p:stCondLst>
                                   <p:childTnLst>
                                     <p:set>
                                       <p:cBhvr>
-                                        <p:cTn id="28" dur="1" fill="hold">
+                                        <p:cTn id="18" dur="1" fill="hold">
                                           <p:stCondLst>
                                             <p:cond delay="0"/>
                                           </p:stCondLst>
@@ -12090,21 +11235,30 @@
                             </p:childTnLst>
                           </p:cTn>
                         </p:par>
+                      </p:childTnLst>
+                    </p:cTn>
+                  </p:par>
+                  <p:par>
+                    <p:cTn id="19" fill="hold">
+                      <p:stCondLst>
+                        <p:cond delay="indefinite"/>
+                      </p:stCondLst>
+                      <p:childTnLst>
                         <p:par>
-                          <p:cTn id="29" fill="hold">
+                          <p:cTn id="20" fill="hold">
                             <p:stCondLst>
                               <p:cond delay="0"/>
                             </p:stCondLst>
                             <p:childTnLst>
                               <p:par>
-                                <p:cTn id="30" presetID="1" presetClass="entr" presetSubtype="0" fill="hold" grpId="0" nodeType="afterEffect">
+                                <p:cTn id="21" presetID="1" presetClass="entr" presetSubtype="0" fill="hold" grpId="0" nodeType="clickEffect">
                                   <p:stCondLst>
                                     <p:cond delay="0"/>
                                   </p:stCondLst>
                                   <p:childTnLst>
                                     <p:set>
                                       <p:cBhvr>
-                                        <p:cTn id="31" dur="1" fill="hold">
+                                        <p:cTn id="22" dur="1" fill="hold">
                                           <p:stCondLst>
                                             <p:cond delay="0"/>
                                           </p:stCondLst>
@@ -12123,24 +11277,15 @@
                                   </p:childTnLst>
                                 </p:cTn>
                               </p:par>
-                            </p:childTnLst>
-                          </p:cTn>
-                        </p:par>
-                        <p:par>
-                          <p:cTn id="32" fill="hold">
-                            <p:stCondLst>
-                              <p:cond delay="0"/>
-                            </p:stCondLst>
-                            <p:childTnLst>
                               <p:par>
-                                <p:cTn id="33" presetID="1" presetClass="entr" presetSubtype="0" fill="hold" grpId="0" nodeType="afterEffect">
+                                <p:cTn id="23" presetID="1" presetClass="entr" presetSubtype="0" fill="hold" grpId="0" nodeType="withEffect">
                                   <p:stCondLst>
                                     <p:cond delay="0"/>
                                   </p:stCondLst>
                                   <p:childTnLst>
                                     <p:set>
                                       <p:cBhvr>
-                                        <p:cTn id="34" dur="1" fill="hold">
+                                        <p:cTn id="24" dur="1" fill="hold">
                                           <p:stCondLst>
                                             <p:cond delay="0"/>
                                           </p:stCondLst>
@@ -12159,24 +11304,15 @@
                                   </p:childTnLst>
                                 </p:cTn>
                               </p:par>
-                            </p:childTnLst>
-                          </p:cTn>
-                        </p:par>
-                        <p:par>
-                          <p:cTn id="35" fill="hold">
-                            <p:stCondLst>
-                              <p:cond delay="0"/>
-                            </p:stCondLst>
-                            <p:childTnLst>
                               <p:par>
-                                <p:cTn id="36" presetID="1" presetClass="entr" presetSubtype="0" fill="hold" grpId="0" nodeType="afterEffect">
+                                <p:cTn id="25" presetID="1" presetClass="entr" presetSubtype="0" fill="hold" grpId="0" nodeType="withEffect">
                                   <p:stCondLst>
                                     <p:cond delay="0"/>
                                   </p:stCondLst>
                                   <p:childTnLst>
                                     <p:set>
                                       <p:cBhvr>
-                                        <p:cTn id="37" dur="1" fill="hold">
+                                        <p:cTn id="26" dur="1" fill="hold">
                                           <p:stCondLst>
                                             <p:cond delay="0"/>
                                           </p:stCondLst>
@@ -12198,21 +11334,30 @@
                             </p:childTnLst>
                           </p:cTn>
                         </p:par>
+                      </p:childTnLst>
+                    </p:cTn>
+                  </p:par>
+                  <p:par>
+                    <p:cTn id="27" fill="hold">
+                      <p:stCondLst>
+                        <p:cond delay="indefinite"/>
+                      </p:stCondLst>
+                      <p:childTnLst>
                         <p:par>
-                          <p:cTn id="38" fill="hold">
+                          <p:cTn id="28" fill="hold">
                             <p:stCondLst>
                               <p:cond delay="0"/>
                             </p:stCondLst>
                             <p:childTnLst>
                               <p:par>
-                                <p:cTn id="39" presetID="1" presetClass="entr" presetSubtype="0" fill="hold" grpId="0" nodeType="afterEffect">
+                                <p:cTn id="29" presetID="1" presetClass="entr" presetSubtype="0" fill="hold" grpId="0" nodeType="clickEffect">
                                   <p:stCondLst>
                                     <p:cond delay="0"/>
                                   </p:stCondLst>
                                   <p:childTnLst>
                                     <p:set>
                                       <p:cBhvr>
-                                        <p:cTn id="40" dur="1" fill="hold">
+                                        <p:cTn id="30" dur="1" fill="hold">
                                           <p:stCondLst>
                                             <p:cond delay="0"/>
                                           </p:stCondLst>
@@ -12231,24 +11376,15 @@
                                   </p:childTnLst>
                                 </p:cTn>
                               </p:par>
-                            </p:childTnLst>
-                          </p:cTn>
-                        </p:par>
-                        <p:par>
-                          <p:cTn id="41" fill="hold">
-                            <p:stCondLst>
-                              <p:cond delay="0"/>
-                            </p:stCondLst>
-                            <p:childTnLst>
                               <p:par>
-                                <p:cTn id="42" presetID="1" presetClass="entr" presetSubtype="0" fill="hold" grpId="0" nodeType="afterEffect">
+                                <p:cTn id="31" presetID="1" presetClass="entr" presetSubtype="0" fill="hold" grpId="0" nodeType="withEffect">
                                   <p:stCondLst>
                                     <p:cond delay="0"/>
                                   </p:stCondLst>
                                   <p:childTnLst>
                                     <p:set>
                                       <p:cBhvr>
-                                        <p:cTn id="43" dur="1" fill="hold">
+                                        <p:cTn id="32" dur="1" fill="hold">
                                           <p:stCondLst>
                                             <p:cond delay="0"/>
                                           </p:stCondLst>
@@ -12267,24 +11403,15 @@
                                   </p:childTnLst>
                                 </p:cTn>
                               </p:par>
-                            </p:childTnLst>
-                          </p:cTn>
-                        </p:par>
-                        <p:par>
-                          <p:cTn id="44" fill="hold">
-                            <p:stCondLst>
-                              <p:cond delay="0"/>
-                            </p:stCondLst>
-                            <p:childTnLst>
                               <p:par>
-                                <p:cTn id="45" presetID="1" presetClass="entr" presetSubtype="0" fill="hold" grpId="0" nodeType="afterEffect">
+                                <p:cTn id="33" presetID="1" presetClass="entr" presetSubtype="0" fill="hold" grpId="0" nodeType="withEffect">
                                   <p:stCondLst>
                                     <p:cond delay="0"/>
                                   </p:stCondLst>
                                   <p:childTnLst>
                                     <p:set>
                                       <p:cBhvr>
-                                        <p:cTn id="46" dur="1" fill="hold">
+                                        <p:cTn id="34" dur="1" fill="hold">
                                           <p:stCondLst>
                                             <p:cond delay="0"/>
                                           </p:stCondLst>
@@ -12306,21 +11433,30 @@
                             </p:childTnLst>
                           </p:cTn>
                         </p:par>
+                      </p:childTnLst>
+                    </p:cTn>
+                  </p:par>
+                  <p:par>
+                    <p:cTn id="35" fill="hold">
+                      <p:stCondLst>
+                        <p:cond delay="indefinite"/>
+                      </p:stCondLst>
+                      <p:childTnLst>
                         <p:par>
-                          <p:cTn id="47" fill="hold">
+                          <p:cTn id="36" fill="hold">
                             <p:stCondLst>
                               <p:cond delay="0"/>
                             </p:stCondLst>
                             <p:childTnLst>
                               <p:par>
-                                <p:cTn id="48" presetID="1" presetClass="entr" presetSubtype="0" fill="hold" grpId="0" nodeType="afterEffect">
+                                <p:cTn id="37" presetID="1" presetClass="entr" presetSubtype="0" fill="hold" grpId="0" nodeType="clickEffect">
                                   <p:stCondLst>
                                     <p:cond delay="0"/>
                                   </p:stCondLst>
                                   <p:childTnLst>
                                     <p:set>
                                       <p:cBhvr>
-                                        <p:cTn id="49" dur="1" fill="hold">
+                                        <p:cTn id="38" dur="1" fill="hold">
                                           <p:stCondLst>
                                             <p:cond delay="0"/>
                                           </p:stCondLst>
@@ -12339,24 +11475,15 @@
                                   </p:childTnLst>
                                 </p:cTn>
                               </p:par>
-                            </p:childTnLst>
-                          </p:cTn>
-                        </p:par>
-                        <p:par>
-                          <p:cTn id="50" fill="hold">
-                            <p:stCondLst>
-                              <p:cond delay="0"/>
-                            </p:stCondLst>
-                            <p:childTnLst>
                               <p:par>
-                                <p:cTn id="51" presetID="1" presetClass="entr" presetSubtype="0" fill="hold" grpId="0" nodeType="afterEffect">
+                                <p:cTn id="39" presetID="1" presetClass="entr" presetSubtype="0" fill="hold" grpId="0" nodeType="withEffect">
                                   <p:stCondLst>
                                     <p:cond delay="0"/>
                                   </p:stCondLst>
                                   <p:childTnLst>
                                     <p:set>
                                       <p:cBhvr>
-                                        <p:cTn id="52" dur="1" fill="hold">
+                                        <p:cTn id="40" dur="1" fill="hold">
                                           <p:stCondLst>
                                             <p:cond delay="0"/>
                                           </p:stCondLst>
@@ -12378,21 +11505,30 @@
                             </p:childTnLst>
                           </p:cTn>
                         </p:par>
+                      </p:childTnLst>
+                    </p:cTn>
+                  </p:par>
+                  <p:par>
+                    <p:cTn id="41" fill="hold">
+                      <p:stCondLst>
+                        <p:cond delay="indefinite"/>
+                      </p:stCondLst>
+                      <p:childTnLst>
                         <p:par>
-                          <p:cTn id="53" fill="hold">
+                          <p:cTn id="42" fill="hold">
                             <p:stCondLst>
                               <p:cond delay="0"/>
                             </p:stCondLst>
                             <p:childTnLst>
                               <p:par>
-                                <p:cTn id="54" presetID="1" presetClass="entr" presetSubtype="0" fill="hold" grpId="0" nodeType="afterEffect">
+                                <p:cTn id="43" presetID="1" presetClass="entr" presetSubtype="0" fill="hold" grpId="0" nodeType="clickEffect">
                                   <p:stCondLst>
                                     <p:cond delay="0"/>
                                   </p:stCondLst>
                                   <p:childTnLst>
                                     <p:set>
                                       <p:cBhvr>
-                                        <p:cTn id="55" dur="1" fill="hold">
+                                        <p:cTn id="44" dur="1" fill="hold">
                                           <p:stCondLst>
                                             <p:cond delay="0"/>
                                           </p:stCondLst>
@@ -12439,8 +11575,6 @@
       </p:par>
     </p:tnLst>
     <p:bldLst>
-      <p:bldP spid="4" grpId="0"/>
-      <p:bldP spid="5" grpId="0"/>
       <p:bldP spid="7" grpId="0" animBg="1"/>
       <p:bldP spid="8" grpId="0"/>
       <p:bldP spid="9" grpId="0"/>
@@ -13557,7 +12691,7 @@
     </p:spTree>
     <p:extLst>
       <p:ext uri="{BB962C8B-B14F-4D97-AF65-F5344CB8AC3E}">
-        <p14:creationId xmlns:p14="http://schemas.microsoft.com/office/powerpoint/2010/main" val="3518917726"/>
+        <p14:creationId xmlns:p14="http://schemas.microsoft.com/office/powerpoint/2010/main" val="4037123144"/>
       </p:ext>
     </p:extLst>
   </p:cSld>
@@ -13576,9 +12710,6 @@
                     <p:cTn id="3" fill="hold">
                       <p:stCondLst>
                         <p:cond delay="indefinite"/>
-                        <p:cond evt="onBegin" delay="0">
-                          <p:tn val="2"/>
-                        </p:cond>
                       </p:stCondLst>
                       <p:childTnLst>
                         <p:par>
@@ -13588,7 +12719,7 @@
                             </p:stCondLst>
                             <p:childTnLst>
                               <p:par>
-                                <p:cTn id="5" presetID="1" presetClass="entr" presetSubtype="0" fill="hold" grpId="0" nodeType="withEffect">
+                                <p:cTn id="5" presetID="1" presetClass="entr" presetSubtype="0" fill="hold" grpId="0" nodeType="clickEffect">
                                   <p:stCondLst>
                                     <p:cond delay="0"/>
                                   </p:stCondLst>
@@ -13601,7 +12732,7 @@
                                           </p:stCondLst>
                                         </p:cTn>
                                         <p:tgtEl>
-                                          <p:spTgt spid="4"/>
+                                          <p:spTgt spid="7"/>
                                         </p:tgtEl>
                                         <p:attrNameLst>
                                           <p:attrName>style.visibility</p:attrName>
@@ -13628,7 +12759,7 @@
                                           </p:stCondLst>
                                         </p:cTn>
                                         <p:tgtEl>
-                                          <p:spTgt spid="5"/>
+                                          <p:spTgt spid="8"/>
                                         </p:tgtEl>
                                         <p:attrNameLst>
                                           <p:attrName>style.visibility</p:attrName>
@@ -13642,7 +12773,7 @@
                                 </p:cTn>
                               </p:par>
                               <p:par>
-                                <p:cTn id="9" presetID="1" presetClass="entr" presetSubtype="0" fill="hold" nodeType="withEffect">
+                                <p:cTn id="9" presetID="1" presetClass="entr" presetSubtype="0" fill="hold" grpId="0" nodeType="withEffect">
                                   <p:stCondLst>
                                     <p:cond delay="0"/>
                                   </p:stCondLst>
@@ -13650,114 +12781,6 @@
                                     <p:set>
                                       <p:cBhvr>
                                         <p:cTn id="10" dur="1" fill="hold">
-                                          <p:stCondLst>
-                                            <p:cond delay="0"/>
-                                          </p:stCondLst>
-                                        </p:cTn>
-                                        <p:tgtEl>
-                                          <p:spTgt spid="6"/>
-                                        </p:tgtEl>
-                                        <p:attrNameLst>
-                                          <p:attrName>style.visibility</p:attrName>
-                                        </p:attrNameLst>
-                                      </p:cBhvr>
-                                      <p:to>
-                                        <p:strVal val="visible"/>
-                                      </p:to>
-                                    </p:set>
-                                  </p:childTnLst>
-                                </p:cTn>
-                              </p:par>
-                            </p:childTnLst>
-                          </p:cTn>
-                        </p:par>
-                        <p:par>
-                          <p:cTn id="11" fill="hold">
-                            <p:stCondLst>
-                              <p:cond delay="0"/>
-                            </p:stCondLst>
-                            <p:childTnLst>
-                              <p:par>
-                                <p:cTn id="12" presetID="1" presetClass="entr" presetSubtype="0" fill="hold" grpId="0" nodeType="afterEffect">
-                                  <p:stCondLst>
-                                    <p:cond delay="0"/>
-                                  </p:stCondLst>
-                                  <p:childTnLst>
-                                    <p:set>
-                                      <p:cBhvr>
-                                        <p:cTn id="13" dur="1" fill="hold">
-                                          <p:stCondLst>
-                                            <p:cond delay="0"/>
-                                          </p:stCondLst>
-                                        </p:cTn>
-                                        <p:tgtEl>
-                                          <p:spTgt spid="7"/>
-                                        </p:tgtEl>
-                                        <p:attrNameLst>
-                                          <p:attrName>style.visibility</p:attrName>
-                                        </p:attrNameLst>
-                                      </p:cBhvr>
-                                      <p:to>
-                                        <p:strVal val="visible"/>
-                                      </p:to>
-                                    </p:set>
-                                  </p:childTnLst>
-                                </p:cTn>
-                              </p:par>
-                            </p:childTnLst>
-                          </p:cTn>
-                        </p:par>
-                        <p:par>
-                          <p:cTn id="14" fill="hold">
-                            <p:stCondLst>
-                              <p:cond delay="0"/>
-                            </p:stCondLst>
-                            <p:childTnLst>
-                              <p:par>
-                                <p:cTn id="15" presetID="1" presetClass="entr" presetSubtype="0" fill="hold" grpId="0" nodeType="afterEffect">
-                                  <p:stCondLst>
-                                    <p:cond delay="0"/>
-                                  </p:stCondLst>
-                                  <p:childTnLst>
-                                    <p:set>
-                                      <p:cBhvr>
-                                        <p:cTn id="16" dur="1" fill="hold">
-                                          <p:stCondLst>
-                                            <p:cond delay="0"/>
-                                          </p:stCondLst>
-                                        </p:cTn>
-                                        <p:tgtEl>
-                                          <p:spTgt spid="8"/>
-                                        </p:tgtEl>
-                                        <p:attrNameLst>
-                                          <p:attrName>style.visibility</p:attrName>
-                                        </p:attrNameLst>
-                                      </p:cBhvr>
-                                      <p:to>
-                                        <p:strVal val="visible"/>
-                                      </p:to>
-                                    </p:set>
-                                  </p:childTnLst>
-                                </p:cTn>
-                              </p:par>
-                            </p:childTnLst>
-                          </p:cTn>
-                        </p:par>
-                        <p:par>
-                          <p:cTn id="17" fill="hold">
-                            <p:stCondLst>
-                              <p:cond delay="0"/>
-                            </p:stCondLst>
-                            <p:childTnLst>
-                              <p:par>
-                                <p:cTn id="18" presetID="1" presetClass="entr" presetSubtype="0" fill="hold" grpId="0" nodeType="afterEffect">
-                                  <p:stCondLst>
-                                    <p:cond delay="0"/>
-                                  </p:stCondLst>
-                                  <p:childTnLst>
-                                    <p:set>
-                                      <p:cBhvr>
-                                        <p:cTn id="19" dur="1" fill="hold">
                                           <p:stCondLst>
                                             <p:cond delay="0"/>
                                           </p:stCondLst>
@@ -13776,24 +12799,60 @@
                                   </p:childTnLst>
                                 </p:cTn>
                               </p:par>
-                            </p:childTnLst>
-                          </p:cTn>
-                        </p:par>
-                        <p:par>
-                          <p:cTn id="20" fill="hold">
-                            <p:stCondLst>
-                              <p:cond delay="0"/>
-                            </p:stCondLst>
-                            <p:childTnLst>
                               <p:par>
-                                <p:cTn id="21" presetID="1" presetClass="entr" presetSubtype="0" fill="hold" grpId="0" nodeType="afterEffect">
+                                <p:cTn id="11" presetID="1" presetClass="entr" presetSubtype="0" fill="hold" grpId="0" nodeType="withEffect">
                                   <p:stCondLst>
                                     <p:cond delay="0"/>
                                   </p:stCondLst>
                                   <p:childTnLst>
                                     <p:set>
                                       <p:cBhvr>
-                                        <p:cTn id="22" dur="1" fill="hold">
+                                        <p:cTn id="12" dur="1" fill="hold">
+                                          <p:stCondLst>
+                                            <p:cond delay="0"/>
+                                          </p:stCondLst>
+                                        </p:cTn>
+                                        <p:tgtEl>
+                                          <p:spTgt spid="13"/>
+                                        </p:tgtEl>
+                                        <p:attrNameLst>
+                                          <p:attrName>style.visibility</p:attrName>
+                                        </p:attrNameLst>
+                                      </p:cBhvr>
+                                      <p:to>
+                                        <p:strVal val="visible"/>
+                                      </p:to>
+                                    </p:set>
+                                  </p:childTnLst>
+                                </p:cTn>
+                              </p:par>
+                            </p:childTnLst>
+                          </p:cTn>
+                        </p:par>
+                      </p:childTnLst>
+                    </p:cTn>
+                  </p:par>
+                  <p:par>
+                    <p:cTn id="13" fill="hold">
+                      <p:stCondLst>
+                        <p:cond delay="indefinite"/>
+                      </p:stCondLst>
+                      <p:childTnLst>
+                        <p:par>
+                          <p:cTn id="14" fill="hold">
+                            <p:stCondLst>
+                              <p:cond delay="0"/>
+                            </p:stCondLst>
+                            <p:childTnLst>
+                              <p:par>
+                                <p:cTn id="15" presetID="1" presetClass="entr" presetSubtype="0" fill="hold" grpId="0" nodeType="clickEffect">
+                                  <p:stCondLst>
+                                    <p:cond delay="0"/>
+                                  </p:stCondLst>
+                                  <p:childTnLst>
+                                    <p:set>
+                                      <p:cBhvr>
+                                        <p:cTn id="16" dur="1" fill="hold">
                                           <p:stCondLst>
                                             <p:cond delay="0"/>
                                           </p:stCondLst>
@@ -13812,24 +12871,15 @@
                                   </p:childTnLst>
                                 </p:cTn>
                               </p:par>
-                            </p:childTnLst>
-                          </p:cTn>
-                        </p:par>
-                        <p:par>
-                          <p:cTn id="23" fill="hold">
-                            <p:stCondLst>
-                              <p:cond delay="0"/>
-                            </p:stCondLst>
-                            <p:childTnLst>
                               <p:par>
-                                <p:cTn id="24" presetID="1" presetClass="entr" presetSubtype="0" fill="hold" grpId="0" nodeType="afterEffect">
+                                <p:cTn id="17" presetID="1" presetClass="entr" presetSubtype="0" fill="hold" grpId="0" nodeType="withEffect">
                                   <p:stCondLst>
                                     <p:cond delay="0"/>
                                   </p:stCondLst>
                                   <p:childTnLst>
                                     <p:set>
                                       <p:cBhvr>
-                                        <p:cTn id="25" dur="1" fill="hold">
+                                        <p:cTn id="18" dur="1" fill="hold">
                                           <p:stCondLst>
                                             <p:cond delay="0"/>
                                           </p:stCondLst>
@@ -13848,24 +12898,15 @@
                                   </p:childTnLst>
                                 </p:cTn>
                               </p:par>
-                            </p:childTnLst>
-                          </p:cTn>
-                        </p:par>
-                        <p:par>
-                          <p:cTn id="26" fill="hold">
-                            <p:stCondLst>
-                              <p:cond delay="0"/>
-                            </p:stCondLst>
-                            <p:childTnLst>
                               <p:par>
-                                <p:cTn id="27" presetID="1" presetClass="entr" presetSubtype="0" fill="hold" grpId="0" nodeType="afterEffect">
+                                <p:cTn id="19" presetID="1" presetClass="entr" presetSubtype="0" fill="hold" grpId="0" nodeType="withEffect">
                                   <p:stCondLst>
                                     <p:cond delay="0"/>
                                   </p:stCondLst>
                                   <p:childTnLst>
                                     <p:set>
                                       <p:cBhvr>
-                                        <p:cTn id="28" dur="1" fill="hold">
+                                        <p:cTn id="20" dur="1" fill="hold">
                                           <p:stCondLst>
                                             <p:cond delay="0"/>
                                           </p:stCondLst>
@@ -13887,57 +12928,30 @@
                             </p:childTnLst>
                           </p:cTn>
                         </p:par>
+                      </p:childTnLst>
+                    </p:cTn>
+                  </p:par>
+                  <p:par>
+                    <p:cTn id="21" fill="hold">
+                      <p:stCondLst>
+                        <p:cond delay="indefinite"/>
+                      </p:stCondLst>
+                      <p:childTnLst>
                         <p:par>
-                          <p:cTn id="29" fill="hold">
+                          <p:cTn id="22" fill="hold">
                             <p:stCondLst>
                               <p:cond delay="0"/>
                             </p:stCondLst>
                             <p:childTnLst>
                               <p:par>
-                                <p:cTn id="30" presetID="1" presetClass="entr" presetSubtype="0" fill="hold" grpId="0" nodeType="afterEffect">
+                                <p:cTn id="23" presetID="1" presetClass="entr" presetSubtype="0" fill="hold" grpId="0" nodeType="clickEffect">
                                   <p:stCondLst>
                                     <p:cond delay="0"/>
                                   </p:stCondLst>
                                   <p:childTnLst>
                                     <p:set>
                                       <p:cBhvr>
-                                        <p:cTn id="31" dur="1" fill="hold">
-                                          <p:stCondLst>
-                                            <p:cond delay="0"/>
-                                          </p:stCondLst>
-                                        </p:cTn>
-                                        <p:tgtEl>
-                                          <p:spTgt spid="13"/>
-                                        </p:tgtEl>
-                                        <p:attrNameLst>
-                                          <p:attrName>style.visibility</p:attrName>
-                                        </p:attrNameLst>
-                                      </p:cBhvr>
-                                      <p:to>
-                                        <p:strVal val="visible"/>
-                                      </p:to>
-                                    </p:set>
-                                  </p:childTnLst>
-                                </p:cTn>
-                              </p:par>
-                            </p:childTnLst>
-                          </p:cTn>
-                        </p:par>
-                        <p:par>
-                          <p:cTn id="32" fill="hold">
-                            <p:stCondLst>
-                              <p:cond delay="0"/>
-                            </p:stCondLst>
-                            <p:childTnLst>
-                              <p:par>
-                                <p:cTn id="33" presetID="1" presetClass="entr" presetSubtype="0" fill="hold" grpId="0" nodeType="afterEffect">
-                                  <p:stCondLst>
-                                    <p:cond delay="0"/>
-                                  </p:stCondLst>
-                                  <p:childTnLst>
-                                    <p:set>
-                                      <p:cBhvr>
-                                        <p:cTn id="34" dur="1" fill="hold">
+                                        <p:cTn id="24" dur="1" fill="hold">
                                           <p:stCondLst>
                                             <p:cond delay="0"/>
                                           </p:stCondLst>
@@ -13956,24 +12970,15 @@
                                   </p:childTnLst>
                                 </p:cTn>
                               </p:par>
-                            </p:childTnLst>
-                          </p:cTn>
-                        </p:par>
-                        <p:par>
-                          <p:cTn id="35" fill="hold">
-                            <p:stCondLst>
-                              <p:cond delay="0"/>
-                            </p:stCondLst>
-                            <p:childTnLst>
                               <p:par>
-                                <p:cTn id="36" presetID="1" presetClass="entr" presetSubtype="0" fill="hold" grpId="0" nodeType="afterEffect">
+                                <p:cTn id="25" presetID="1" presetClass="entr" presetSubtype="0" fill="hold" grpId="0" nodeType="withEffect">
                                   <p:stCondLst>
                                     <p:cond delay="0"/>
                                   </p:stCondLst>
                                   <p:childTnLst>
                                     <p:set>
                                       <p:cBhvr>
-                                        <p:cTn id="37" dur="1" fill="hold">
+                                        <p:cTn id="26" dur="1" fill="hold">
                                           <p:stCondLst>
                                             <p:cond delay="0"/>
                                           </p:stCondLst>
@@ -13995,21 +13000,30 @@
                             </p:childTnLst>
                           </p:cTn>
                         </p:par>
+                      </p:childTnLst>
+                    </p:cTn>
+                  </p:par>
+                  <p:par>
+                    <p:cTn id="27" fill="hold">
+                      <p:stCondLst>
+                        <p:cond delay="indefinite"/>
+                      </p:stCondLst>
+                      <p:childTnLst>
                         <p:par>
-                          <p:cTn id="38" fill="hold">
+                          <p:cTn id="28" fill="hold">
                             <p:stCondLst>
                               <p:cond delay="0"/>
                             </p:stCondLst>
                             <p:childTnLst>
                               <p:par>
-                                <p:cTn id="39" presetID="1" presetClass="entr" presetSubtype="0" fill="hold" grpId="0" nodeType="afterEffect">
+                                <p:cTn id="29" presetID="1" presetClass="entr" presetSubtype="0" fill="hold" grpId="0" nodeType="clickEffect">
                                   <p:stCondLst>
                                     <p:cond delay="0"/>
                                   </p:stCondLst>
                                   <p:childTnLst>
                                     <p:set>
                                       <p:cBhvr>
-                                        <p:cTn id="40" dur="1" fill="hold">
+                                        <p:cTn id="30" dur="1" fill="hold">
                                           <p:stCondLst>
                                             <p:cond delay="0"/>
                                           </p:stCondLst>
@@ -14031,21 +13045,30 @@
                             </p:childTnLst>
                           </p:cTn>
                         </p:par>
+                      </p:childTnLst>
+                    </p:cTn>
+                  </p:par>
+                  <p:par>
+                    <p:cTn id="31" fill="hold">
+                      <p:stCondLst>
+                        <p:cond delay="indefinite"/>
+                      </p:stCondLst>
+                      <p:childTnLst>
                         <p:par>
-                          <p:cTn id="41" fill="hold">
+                          <p:cTn id="32" fill="hold">
                             <p:stCondLst>
                               <p:cond delay="0"/>
                             </p:stCondLst>
                             <p:childTnLst>
                               <p:par>
-                                <p:cTn id="42" presetID="1" presetClass="entr" presetSubtype="0" fill="hold" grpId="0" nodeType="afterEffect">
+                                <p:cTn id="33" presetID="1" presetClass="entr" presetSubtype="0" fill="hold" grpId="0" nodeType="clickEffect">
                                   <p:stCondLst>
                                     <p:cond delay="0"/>
                                   </p:stCondLst>
                                   <p:childTnLst>
                                     <p:set>
                                       <p:cBhvr>
-                                        <p:cTn id="43" dur="1" fill="hold">
+                                        <p:cTn id="34" dur="1" fill="hold">
                                           <p:stCondLst>
                                             <p:cond delay="0"/>
                                           </p:stCondLst>
@@ -14064,24 +13087,15 @@
                                   </p:childTnLst>
                                 </p:cTn>
                               </p:par>
-                            </p:childTnLst>
-                          </p:cTn>
-                        </p:par>
-                        <p:par>
-                          <p:cTn id="44" fill="hold">
-                            <p:stCondLst>
-                              <p:cond delay="0"/>
-                            </p:stCondLst>
-                            <p:childTnLst>
                               <p:par>
-                                <p:cTn id="45" presetID="1" presetClass="entr" presetSubtype="0" fill="hold" grpId="0" nodeType="afterEffect">
+                                <p:cTn id="35" presetID="1" presetClass="entr" presetSubtype="0" fill="hold" grpId="0" nodeType="withEffect">
                                   <p:stCondLst>
                                     <p:cond delay="0"/>
                                   </p:stCondLst>
                                   <p:childTnLst>
                                     <p:set>
                                       <p:cBhvr>
-                                        <p:cTn id="46" dur="1" fill="hold">
+                                        <p:cTn id="36" dur="1" fill="hold">
                                           <p:stCondLst>
                                             <p:cond delay="0"/>
                                           </p:stCondLst>
@@ -14100,24 +13114,15 @@
                                   </p:childTnLst>
                                 </p:cTn>
                               </p:par>
-                            </p:childTnLst>
-                          </p:cTn>
-                        </p:par>
-                        <p:par>
-                          <p:cTn id="47" fill="hold">
-                            <p:stCondLst>
-                              <p:cond delay="0"/>
-                            </p:stCondLst>
-                            <p:childTnLst>
                               <p:par>
-                                <p:cTn id="48" presetID="1" presetClass="entr" presetSubtype="0" fill="hold" grpId="0" nodeType="afterEffect">
+                                <p:cTn id="37" presetID="1" presetClass="entr" presetSubtype="0" fill="hold" grpId="0" nodeType="withEffect">
                                   <p:stCondLst>
                                     <p:cond delay="0"/>
                                   </p:stCondLst>
                                   <p:childTnLst>
                                     <p:set>
                                       <p:cBhvr>
-                                        <p:cTn id="49" dur="1" fill="hold">
+                                        <p:cTn id="38" dur="1" fill="hold">
                                           <p:stCondLst>
                                             <p:cond delay="0"/>
                                           </p:stCondLst>
@@ -14136,24 +13141,15 @@
                                   </p:childTnLst>
                                 </p:cTn>
                               </p:par>
-                            </p:childTnLst>
-                          </p:cTn>
-                        </p:par>
-                        <p:par>
-                          <p:cTn id="50" fill="hold">
-                            <p:stCondLst>
-                              <p:cond delay="0"/>
-                            </p:stCondLst>
-                            <p:childTnLst>
                               <p:par>
-                                <p:cTn id="51" presetID="1" presetClass="entr" presetSubtype="0" fill="hold" grpId="0" nodeType="afterEffect">
+                                <p:cTn id="39" presetID="1" presetClass="entr" presetSubtype="0" fill="hold" grpId="0" nodeType="withEffect">
                                   <p:stCondLst>
                                     <p:cond delay="0"/>
                                   </p:stCondLst>
                                   <p:childTnLst>
                                     <p:set>
                                       <p:cBhvr>
-                                        <p:cTn id="52" dur="1" fill="hold">
+                                        <p:cTn id="40" dur="1" fill="hold">
                                           <p:stCondLst>
                                             <p:cond delay="0"/>
                                           </p:stCondLst>
@@ -14175,21 +13171,30 @@
                             </p:childTnLst>
                           </p:cTn>
                         </p:par>
+                      </p:childTnLst>
+                    </p:cTn>
+                  </p:par>
+                  <p:par>
+                    <p:cTn id="41" fill="hold">
+                      <p:stCondLst>
+                        <p:cond delay="indefinite"/>
+                      </p:stCondLst>
+                      <p:childTnLst>
                         <p:par>
-                          <p:cTn id="53" fill="hold">
+                          <p:cTn id="42" fill="hold">
                             <p:stCondLst>
                               <p:cond delay="0"/>
                             </p:stCondLst>
                             <p:childTnLst>
                               <p:par>
-                                <p:cTn id="54" presetID="1" presetClass="entr" presetSubtype="0" fill="hold" grpId="0" nodeType="afterEffect">
+                                <p:cTn id="43" presetID="1" presetClass="entr" presetSubtype="0" fill="hold" grpId="0" nodeType="clickEffect">
                                   <p:stCondLst>
                                     <p:cond delay="0"/>
                                   </p:stCondLst>
                                   <p:childTnLst>
                                     <p:set>
                                       <p:cBhvr>
-                                        <p:cTn id="55" dur="1" fill="hold">
+                                        <p:cTn id="44" dur="1" fill="hold">
                                           <p:stCondLst>
                                             <p:cond delay="0"/>
                                           </p:stCondLst>
@@ -14211,21 +13216,30 @@
                             </p:childTnLst>
                           </p:cTn>
                         </p:par>
+                      </p:childTnLst>
+                    </p:cTn>
+                  </p:par>
+                  <p:par>
+                    <p:cTn id="45" fill="hold">
+                      <p:stCondLst>
+                        <p:cond delay="indefinite"/>
+                      </p:stCondLst>
+                      <p:childTnLst>
                         <p:par>
-                          <p:cTn id="56" fill="hold">
+                          <p:cTn id="46" fill="hold">
                             <p:stCondLst>
                               <p:cond delay="0"/>
                             </p:stCondLst>
                             <p:childTnLst>
                               <p:par>
-                                <p:cTn id="57" presetID="1" presetClass="entr" presetSubtype="0" fill="hold" grpId="0" nodeType="afterEffect">
+                                <p:cTn id="47" presetID="1" presetClass="entr" presetSubtype="0" fill="hold" grpId="0" nodeType="clickEffect">
                                   <p:stCondLst>
                                     <p:cond delay="0"/>
                                   </p:stCondLst>
                                   <p:childTnLst>
                                     <p:set>
                                       <p:cBhvr>
-                                        <p:cTn id="58" dur="1" fill="hold">
+                                        <p:cTn id="48" dur="1" fill="hold">
                                           <p:stCondLst>
                                             <p:cond delay="0"/>
                                           </p:stCondLst>
@@ -14247,21 +13261,30 @@
                             </p:childTnLst>
                           </p:cTn>
                         </p:par>
+                      </p:childTnLst>
+                    </p:cTn>
+                  </p:par>
+                  <p:par>
+                    <p:cTn id="49" fill="hold">
+                      <p:stCondLst>
+                        <p:cond delay="indefinite"/>
+                      </p:stCondLst>
+                      <p:childTnLst>
                         <p:par>
-                          <p:cTn id="59" fill="hold">
+                          <p:cTn id="50" fill="hold">
                             <p:stCondLst>
                               <p:cond delay="0"/>
                             </p:stCondLst>
                             <p:childTnLst>
                               <p:par>
-                                <p:cTn id="60" presetID="1" presetClass="entr" presetSubtype="0" fill="hold" grpId="0" nodeType="afterEffect">
+                                <p:cTn id="51" presetID="1" presetClass="entr" presetSubtype="0" fill="hold" grpId="0" nodeType="clickEffect">
                                   <p:stCondLst>
                                     <p:cond delay="0"/>
                                   </p:stCondLst>
                                   <p:childTnLst>
                                     <p:set>
                                       <p:cBhvr>
-                                        <p:cTn id="61" dur="1" fill="hold">
+                                        <p:cTn id="52" dur="1" fill="hold">
                                           <p:stCondLst>
                                             <p:cond delay="0"/>
                                           </p:stCondLst>
@@ -14308,8 +13331,6 @@
       </p:par>
     </p:tnLst>
     <p:bldLst>
-      <p:bldP spid="4" grpId="0"/>
-      <p:bldP spid="5" grpId="0"/>
       <p:bldP spid="7" grpId="0" animBg="1"/>
       <p:bldP spid="8" grpId="0" animBg="1"/>
       <p:bldP spid="9" grpId="0"/>
@@ -15276,7 +14297,7 @@
     </p:spTree>
     <p:extLst>
       <p:ext uri="{BB962C8B-B14F-4D97-AF65-F5344CB8AC3E}">
-        <p14:creationId xmlns:p14="http://schemas.microsoft.com/office/powerpoint/2010/main" val="1278024505"/>
+        <p14:creationId xmlns:p14="http://schemas.microsoft.com/office/powerpoint/2010/main" val="1728687021"/>
       </p:ext>
     </p:extLst>
   </p:cSld>
@@ -15295,9 +14316,6 @@
                     <p:cTn id="3" fill="hold">
                       <p:stCondLst>
                         <p:cond delay="indefinite"/>
-                        <p:cond evt="onBegin" delay="0">
-                          <p:tn val="2"/>
-                        </p:cond>
                       </p:stCondLst>
                       <p:childTnLst>
                         <p:par>
@@ -15307,7 +14325,7 @@
                             </p:stCondLst>
                             <p:childTnLst>
                               <p:par>
-                                <p:cTn id="5" presetID="1" presetClass="entr" presetSubtype="0" fill="hold" grpId="0" nodeType="withEffect">
+                                <p:cTn id="5" presetID="1" presetClass="entr" presetSubtype="0" fill="hold" grpId="0" nodeType="clickEffect">
                                   <p:stCondLst>
                                     <p:cond delay="0"/>
                                   </p:stCondLst>
@@ -15320,7 +14338,7 @@
                                           </p:stCondLst>
                                         </p:cTn>
                                         <p:tgtEl>
-                                          <p:spTgt spid="4"/>
+                                          <p:spTgt spid="7"/>
                                         </p:tgtEl>
                                         <p:attrNameLst>
                                           <p:attrName>style.visibility</p:attrName>
@@ -15347,7 +14365,7 @@
                                           </p:stCondLst>
                                         </p:cTn>
                                         <p:tgtEl>
-                                          <p:spTgt spid="5"/>
+                                          <p:spTgt spid="8"/>
                                         </p:tgtEl>
                                         <p:attrNameLst>
                                           <p:attrName>style.visibility</p:attrName>
@@ -15361,7 +14379,7 @@
                                 </p:cTn>
                               </p:par>
                               <p:par>
-                                <p:cTn id="9" presetID="1" presetClass="entr" presetSubtype="0" fill="hold" nodeType="withEffect">
+                                <p:cTn id="9" presetID="1" presetClass="entr" presetSubtype="0" fill="hold" grpId="0" nodeType="withEffect">
                                   <p:stCondLst>
                                     <p:cond delay="0"/>
                                   </p:stCondLst>
@@ -15369,114 +14387,6 @@
                                     <p:set>
                                       <p:cBhvr>
                                         <p:cTn id="10" dur="1" fill="hold">
-                                          <p:stCondLst>
-                                            <p:cond delay="0"/>
-                                          </p:stCondLst>
-                                        </p:cTn>
-                                        <p:tgtEl>
-                                          <p:spTgt spid="6"/>
-                                        </p:tgtEl>
-                                        <p:attrNameLst>
-                                          <p:attrName>style.visibility</p:attrName>
-                                        </p:attrNameLst>
-                                      </p:cBhvr>
-                                      <p:to>
-                                        <p:strVal val="visible"/>
-                                      </p:to>
-                                    </p:set>
-                                  </p:childTnLst>
-                                </p:cTn>
-                              </p:par>
-                            </p:childTnLst>
-                          </p:cTn>
-                        </p:par>
-                        <p:par>
-                          <p:cTn id="11" fill="hold">
-                            <p:stCondLst>
-                              <p:cond delay="0"/>
-                            </p:stCondLst>
-                            <p:childTnLst>
-                              <p:par>
-                                <p:cTn id="12" presetID="1" presetClass="entr" presetSubtype="0" fill="hold" grpId="0" nodeType="afterEffect">
-                                  <p:stCondLst>
-                                    <p:cond delay="0"/>
-                                  </p:stCondLst>
-                                  <p:childTnLst>
-                                    <p:set>
-                                      <p:cBhvr>
-                                        <p:cTn id="13" dur="1" fill="hold">
-                                          <p:stCondLst>
-                                            <p:cond delay="0"/>
-                                          </p:stCondLst>
-                                        </p:cTn>
-                                        <p:tgtEl>
-                                          <p:spTgt spid="7"/>
-                                        </p:tgtEl>
-                                        <p:attrNameLst>
-                                          <p:attrName>style.visibility</p:attrName>
-                                        </p:attrNameLst>
-                                      </p:cBhvr>
-                                      <p:to>
-                                        <p:strVal val="visible"/>
-                                      </p:to>
-                                    </p:set>
-                                  </p:childTnLst>
-                                </p:cTn>
-                              </p:par>
-                            </p:childTnLst>
-                          </p:cTn>
-                        </p:par>
-                        <p:par>
-                          <p:cTn id="14" fill="hold">
-                            <p:stCondLst>
-                              <p:cond delay="0"/>
-                            </p:stCondLst>
-                            <p:childTnLst>
-                              <p:par>
-                                <p:cTn id="15" presetID="1" presetClass="entr" presetSubtype="0" fill="hold" grpId="0" nodeType="afterEffect">
-                                  <p:stCondLst>
-                                    <p:cond delay="0"/>
-                                  </p:stCondLst>
-                                  <p:childTnLst>
-                                    <p:set>
-                                      <p:cBhvr>
-                                        <p:cTn id="16" dur="1" fill="hold">
-                                          <p:stCondLst>
-                                            <p:cond delay="0"/>
-                                          </p:stCondLst>
-                                        </p:cTn>
-                                        <p:tgtEl>
-                                          <p:spTgt spid="8"/>
-                                        </p:tgtEl>
-                                        <p:attrNameLst>
-                                          <p:attrName>style.visibility</p:attrName>
-                                        </p:attrNameLst>
-                                      </p:cBhvr>
-                                      <p:to>
-                                        <p:strVal val="visible"/>
-                                      </p:to>
-                                    </p:set>
-                                  </p:childTnLst>
-                                </p:cTn>
-                              </p:par>
-                            </p:childTnLst>
-                          </p:cTn>
-                        </p:par>
-                        <p:par>
-                          <p:cTn id="17" fill="hold">
-                            <p:stCondLst>
-                              <p:cond delay="0"/>
-                            </p:stCondLst>
-                            <p:childTnLst>
-                              <p:par>
-                                <p:cTn id="18" presetID="1" presetClass="entr" presetSubtype="0" fill="hold" grpId="0" nodeType="afterEffect">
-                                  <p:stCondLst>
-                                    <p:cond delay="0"/>
-                                  </p:stCondLst>
-                                  <p:childTnLst>
-                                    <p:set>
-                                      <p:cBhvr>
-                                        <p:cTn id="19" dur="1" fill="hold">
                                           <p:stCondLst>
                                             <p:cond delay="0"/>
                                           </p:stCondLst>
@@ -15495,24 +14405,15 @@
                                   </p:childTnLst>
                                 </p:cTn>
                               </p:par>
-                            </p:childTnLst>
-                          </p:cTn>
-                        </p:par>
-                        <p:par>
-                          <p:cTn id="20" fill="hold">
-                            <p:stCondLst>
-                              <p:cond delay="0"/>
-                            </p:stCondLst>
-                            <p:childTnLst>
                               <p:par>
-                                <p:cTn id="21" presetID="1" presetClass="entr" presetSubtype="0" fill="hold" grpId="0" nodeType="afterEffect">
+                                <p:cTn id="11" presetID="1" presetClass="entr" presetSubtype="0" fill="hold" grpId="0" nodeType="withEffect">
                                   <p:stCondLst>
                                     <p:cond delay="0"/>
                                   </p:stCondLst>
                                   <p:childTnLst>
                                     <p:set>
                                       <p:cBhvr>
-                                        <p:cTn id="22" dur="1" fill="hold">
+                                        <p:cTn id="12" dur="1" fill="hold">
                                           <p:stCondLst>
                                             <p:cond delay="0"/>
                                           </p:stCondLst>
@@ -15534,21 +14435,30 @@
                             </p:childTnLst>
                           </p:cTn>
                         </p:par>
+                      </p:childTnLst>
+                    </p:cTn>
+                  </p:par>
+                  <p:par>
+                    <p:cTn id="13" fill="hold">
+                      <p:stCondLst>
+                        <p:cond delay="indefinite"/>
+                      </p:stCondLst>
+                      <p:childTnLst>
                         <p:par>
-                          <p:cTn id="23" fill="hold">
+                          <p:cTn id="14" fill="hold">
                             <p:stCondLst>
                               <p:cond delay="0"/>
                             </p:stCondLst>
                             <p:childTnLst>
                               <p:par>
-                                <p:cTn id="24" presetID="1" presetClass="entr" presetSubtype="0" fill="hold" grpId="0" nodeType="afterEffect">
+                                <p:cTn id="15" presetID="1" presetClass="entr" presetSubtype="0" fill="hold" grpId="0" nodeType="clickEffect">
                                   <p:stCondLst>
                                     <p:cond delay="0"/>
                                   </p:stCondLst>
                                   <p:childTnLst>
                                     <p:set>
                                       <p:cBhvr>
-                                        <p:cTn id="25" dur="1" fill="hold">
+                                        <p:cTn id="16" dur="1" fill="hold">
                                           <p:stCondLst>
                                             <p:cond delay="0"/>
                                           </p:stCondLst>
@@ -15567,24 +14477,15 @@
                                   </p:childTnLst>
                                 </p:cTn>
                               </p:par>
-                            </p:childTnLst>
-                          </p:cTn>
-                        </p:par>
-                        <p:par>
-                          <p:cTn id="26" fill="hold">
-                            <p:stCondLst>
-                              <p:cond delay="0"/>
-                            </p:stCondLst>
-                            <p:childTnLst>
                               <p:par>
-                                <p:cTn id="27" presetID="1" presetClass="entr" presetSubtype="0" fill="hold" grpId="0" nodeType="afterEffect">
+                                <p:cTn id="17" presetID="1" presetClass="entr" presetSubtype="0" fill="hold" grpId="0" nodeType="withEffect">
                                   <p:stCondLst>
                                     <p:cond delay="0"/>
                                   </p:stCondLst>
                                   <p:childTnLst>
                                     <p:set>
                                       <p:cBhvr>
-                                        <p:cTn id="28" dur="1" fill="hold">
+                                        <p:cTn id="18" dur="1" fill="hold">
                                           <p:stCondLst>
                                             <p:cond delay="0"/>
                                           </p:stCondLst>
@@ -15603,24 +14504,15 @@
                                   </p:childTnLst>
                                 </p:cTn>
                               </p:par>
-                            </p:childTnLst>
-                          </p:cTn>
-                        </p:par>
-                        <p:par>
-                          <p:cTn id="29" fill="hold">
-                            <p:stCondLst>
-                              <p:cond delay="0"/>
-                            </p:stCondLst>
-                            <p:childTnLst>
                               <p:par>
-                                <p:cTn id="30" presetID="1" presetClass="entr" presetSubtype="0" fill="hold" grpId="0" nodeType="afterEffect">
+                                <p:cTn id="19" presetID="1" presetClass="entr" presetSubtype="0" fill="hold" grpId="0" nodeType="withEffect">
                                   <p:stCondLst>
                                     <p:cond delay="0"/>
                                   </p:stCondLst>
                                   <p:childTnLst>
                                     <p:set>
                                       <p:cBhvr>
-                                        <p:cTn id="31" dur="1" fill="hold">
+                                        <p:cTn id="20" dur="1" fill="hold">
                                           <p:stCondLst>
                                             <p:cond delay="0"/>
                                           </p:stCondLst>
@@ -15639,24 +14531,15 @@
                                   </p:childTnLst>
                                 </p:cTn>
                               </p:par>
-                            </p:childTnLst>
-                          </p:cTn>
-                        </p:par>
-                        <p:par>
-                          <p:cTn id="32" fill="hold">
-                            <p:stCondLst>
-                              <p:cond delay="0"/>
-                            </p:stCondLst>
-                            <p:childTnLst>
                               <p:par>
-                                <p:cTn id="33" presetID="1" presetClass="entr" presetSubtype="0" fill="hold" grpId="0" nodeType="afterEffect">
+                                <p:cTn id="21" presetID="1" presetClass="entr" presetSubtype="0" fill="hold" grpId="0" nodeType="withEffect">
                                   <p:stCondLst>
                                     <p:cond delay="0"/>
                                   </p:stCondLst>
                                   <p:childTnLst>
                                     <p:set>
                                       <p:cBhvr>
-                                        <p:cTn id="34" dur="1" fill="hold">
+                                        <p:cTn id="22" dur="1" fill="hold">
                                           <p:stCondLst>
                                             <p:cond delay="0"/>
                                           </p:stCondLst>
@@ -15678,21 +14561,30 @@
                             </p:childTnLst>
                           </p:cTn>
                         </p:par>
+                      </p:childTnLst>
+                    </p:cTn>
+                  </p:par>
+                  <p:par>
+                    <p:cTn id="23" fill="hold">
+                      <p:stCondLst>
+                        <p:cond delay="indefinite"/>
+                      </p:stCondLst>
+                      <p:childTnLst>
                         <p:par>
-                          <p:cTn id="35" fill="hold">
+                          <p:cTn id="24" fill="hold">
                             <p:stCondLst>
                               <p:cond delay="0"/>
                             </p:stCondLst>
                             <p:childTnLst>
                               <p:par>
-                                <p:cTn id="36" presetID="1" presetClass="entr" presetSubtype="0" fill="hold" grpId="0" nodeType="afterEffect">
+                                <p:cTn id="25" presetID="1" presetClass="entr" presetSubtype="0" fill="hold" grpId="0" nodeType="clickEffect">
                                   <p:stCondLst>
                                     <p:cond delay="0"/>
                                   </p:stCondLst>
                                   <p:childTnLst>
                                     <p:set>
                                       <p:cBhvr>
-                                        <p:cTn id="37" dur="1" fill="hold">
+                                        <p:cTn id="26" dur="1" fill="hold">
                                           <p:stCondLst>
                                             <p:cond delay="0"/>
                                           </p:stCondLst>
@@ -15711,24 +14603,15 @@
                                   </p:childTnLst>
                                 </p:cTn>
                               </p:par>
-                            </p:childTnLst>
-                          </p:cTn>
-                        </p:par>
-                        <p:par>
-                          <p:cTn id="38" fill="hold">
-                            <p:stCondLst>
-                              <p:cond delay="0"/>
-                            </p:stCondLst>
-                            <p:childTnLst>
                               <p:par>
-                                <p:cTn id="39" presetID="1" presetClass="entr" presetSubtype="0" fill="hold" grpId="0" nodeType="afterEffect">
+                                <p:cTn id="27" presetID="1" presetClass="entr" presetSubtype="0" fill="hold" grpId="0" nodeType="withEffect">
                                   <p:stCondLst>
                                     <p:cond delay="0"/>
                                   </p:stCondLst>
                                   <p:childTnLst>
                                     <p:set>
                                       <p:cBhvr>
-                                        <p:cTn id="40" dur="1" fill="hold">
+                                        <p:cTn id="28" dur="1" fill="hold">
                                           <p:stCondLst>
                                             <p:cond delay="0"/>
                                           </p:stCondLst>
@@ -15747,24 +14630,15 @@
                                   </p:childTnLst>
                                 </p:cTn>
                               </p:par>
-                            </p:childTnLst>
-                          </p:cTn>
-                        </p:par>
-                        <p:par>
-                          <p:cTn id="41" fill="hold">
-                            <p:stCondLst>
-                              <p:cond delay="0"/>
-                            </p:stCondLst>
-                            <p:childTnLst>
                               <p:par>
-                                <p:cTn id="42" presetID="1" presetClass="entr" presetSubtype="0" fill="hold" grpId="0" nodeType="afterEffect">
+                                <p:cTn id="29" presetID="1" presetClass="entr" presetSubtype="0" fill="hold" grpId="0" nodeType="withEffect">
                                   <p:stCondLst>
                                     <p:cond delay="0"/>
                                   </p:stCondLst>
                                   <p:childTnLst>
                                     <p:set>
                                       <p:cBhvr>
-                                        <p:cTn id="43" dur="1" fill="hold">
+                                        <p:cTn id="30" dur="1" fill="hold">
                                           <p:stCondLst>
                                             <p:cond delay="0"/>
                                           </p:stCondLst>
@@ -15783,24 +14657,15 @@
                                   </p:childTnLst>
                                 </p:cTn>
                               </p:par>
-                            </p:childTnLst>
-                          </p:cTn>
-                        </p:par>
-                        <p:par>
-                          <p:cTn id="44" fill="hold">
-                            <p:stCondLst>
-                              <p:cond delay="0"/>
-                            </p:stCondLst>
-                            <p:childTnLst>
                               <p:par>
-                                <p:cTn id="45" presetID="1" presetClass="entr" presetSubtype="0" fill="hold" grpId="0" nodeType="afterEffect">
+                                <p:cTn id="31" presetID="1" presetClass="entr" presetSubtype="0" fill="hold" grpId="0" nodeType="withEffect">
                                   <p:stCondLst>
                                     <p:cond delay="0"/>
                                   </p:stCondLst>
                                   <p:childTnLst>
                                     <p:set>
                                       <p:cBhvr>
-                                        <p:cTn id="46" dur="1" fill="hold">
+                                        <p:cTn id="32" dur="1" fill="hold">
                                           <p:stCondLst>
                                             <p:cond delay="0"/>
                                           </p:stCondLst>
@@ -15822,21 +14687,30 @@
                             </p:childTnLst>
                           </p:cTn>
                         </p:par>
+                      </p:childTnLst>
+                    </p:cTn>
+                  </p:par>
+                  <p:par>
+                    <p:cTn id="33" fill="hold">
+                      <p:stCondLst>
+                        <p:cond delay="indefinite"/>
+                      </p:stCondLst>
+                      <p:childTnLst>
                         <p:par>
-                          <p:cTn id="47" fill="hold">
+                          <p:cTn id="34" fill="hold">
                             <p:stCondLst>
                               <p:cond delay="0"/>
                             </p:stCondLst>
                             <p:childTnLst>
                               <p:par>
-                                <p:cTn id="48" presetID="1" presetClass="entr" presetSubtype="0" fill="hold" grpId="0" nodeType="afterEffect">
+                                <p:cTn id="35" presetID="1" presetClass="entr" presetSubtype="0" fill="hold" grpId="0" nodeType="clickEffect">
                                   <p:stCondLst>
                                     <p:cond delay="0"/>
                                   </p:stCondLst>
                                   <p:childTnLst>
                                     <p:set>
                                       <p:cBhvr>
-                                        <p:cTn id="49" dur="1" fill="hold">
+                                        <p:cTn id="36" dur="1" fill="hold">
                                           <p:stCondLst>
                                             <p:cond delay="0"/>
                                           </p:stCondLst>
@@ -15855,24 +14729,15 @@
                                   </p:childTnLst>
                                 </p:cTn>
                               </p:par>
-                            </p:childTnLst>
-                          </p:cTn>
-                        </p:par>
-                        <p:par>
-                          <p:cTn id="50" fill="hold">
-                            <p:stCondLst>
-                              <p:cond delay="0"/>
-                            </p:stCondLst>
-                            <p:childTnLst>
                               <p:par>
-                                <p:cTn id="51" presetID="1" presetClass="entr" presetSubtype="0" fill="hold" grpId="0" nodeType="afterEffect">
+                                <p:cTn id="37" presetID="1" presetClass="entr" presetSubtype="0" fill="hold" grpId="0" nodeType="withEffect">
                                   <p:stCondLst>
                                     <p:cond delay="0"/>
                                   </p:stCondLst>
                                   <p:childTnLst>
                                     <p:set>
                                       <p:cBhvr>
-                                        <p:cTn id="52" dur="1" fill="hold">
+                                        <p:cTn id="38" dur="1" fill="hold">
                                           <p:stCondLst>
                                             <p:cond delay="0"/>
                                           </p:stCondLst>
@@ -15919,8 +14784,6 @@
       </p:par>
     </p:tnLst>
     <p:bldLst>
-      <p:bldP spid="4" grpId="0"/>
-      <p:bldP spid="5" grpId="0"/>
       <p:bldP spid="7" grpId="0" animBg="1"/>
       <p:bldP spid="8" grpId="0" animBg="1"/>
       <p:bldP spid="9" grpId="0"/>
@@ -16782,7 +15645,7 @@
     </p:spTree>
     <p:extLst>
       <p:ext uri="{BB962C8B-B14F-4D97-AF65-F5344CB8AC3E}">
-        <p14:creationId xmlns:p14="http://schemas.microsoft.com/office/powerpoint/2010/main" val="3339144453"/>
+        <p14:creationId xmlns:p14="http://schemas.microsoft.com/office/powerpoint/2010/main" val="96395779"/>
       </p:ext>
     </p:extLst>
   </p:cSld>
@@ -16801,9 +15664,6 @@
                     <p:cTn id="3" fill="hold">
                       <p:stCondLst>
                         <p:cond delay="indefinite"/>
-                        <p:cond evt="onBegin" delay="0">
-                          <p:tn val="2"/>
-                        </p:cond>
                       </p:stCondLst>
                       <p:childTnLst>
                         <p:par>
@@ -16813,7 +15673,7 @@
                             </p:stCondLst>
                             <p:childTnLst>
                               <p:par>
-                                <p:cTn id="5" presetID="1" presetClass="entr" presetSubtype="0" fill="hold" grpId="0" nodeType="withEffect">
+                                <p:cTn id="5" presetID="1" presetClass="entr" presetSubtype="0" fill="hold" grpId="0" nodeType="clickEffect">
                                   <p:stCondLst>
                                     <p:cond delay="0"/>
                                   </p:stCondLst>
@@ -16826,7 +15686,7 @@
                                           </p:stCondLst>
                                         </p:cTn>
                                         <p:tgtEl>
-                                          <p:spTgt spid="4"/>
+                                          <p:spTgt spid="7"/>
                                         </p:tgtEl>
                                         <p:attrNameLst>
                                           <p:attrName>style.visibility</p:attrName>
@@ -16853,7 +15713,7 @@
                                           </p:stCondLst>
                                         </p:cTn>
                                         <p:tgtEl>
-                                          <p:spTgt spid="5"/>
+                                          <p:spTgt spid="8"/>
                                         </p:tgtEl>
                                         <p:attrNameLst>
                                           <p:attrName>style.visibility</p:attrName>
@@ -16867,7 +15727,7 @@
                                 </p:cTn>
                               </p:par>
                               <p:par>
-                                <p:cTn id="9" presetID="1" presetClass="entr" presetSubtype="0" fill="hold" nodeType="withEffect">
+                                <p:cTn id="9" presetID="1" presetClass="entr" presetSubtype="0" fill="hold" grpId="0" nodeType="withEffect">
                                   <p:stCondLst>
                                     <p:cond delay="0"/>
                                   </p:stCondLst>
@@ -16875,114 +15735,6 @@
                                     <p:set>
                                       <p:cBhvr>
                                         <p:cTn id="10" dur="1" fill="hold">
-                                          <p:stCondLst>
-                                            <p:cond delay="0"/>
-                                          </p:stCondLst>
-                                        </p:cTn>
-                                        <p:tgtEl>
-                                          <p:spTgt spid="6"/>
-                                        </p:tgtEl>
-                                        <p:attrNameLst>
-                                          <p:attrName>style.visibility</p:attrName>
-                                        </p:attrNameLst>
-                                      </p:cBhvr>
-                                      <p:to>
-                                        <p:strVal val="visible"/>
-                                      </p:to>
-                                    </p:set>
-                                  </p:childTnLst>
-                                </p:cTn>
-                              </p:par>
-                            </p:childTnLst>
-                          </p:cTn>
-                        </p:par>
-                        <p:par>
-                          <p:cTn id="11" fill="hold">
-                            <p:stCondLst>
-                              <p:cond delay="0"/>
-                            </p:stCondLst>
-                            <p:childTnLst>
-                              <p:par>
-                                <p:cTn id="12" presetID="1" presetClass="entr" presetSubtype="0" fill="hold" grpId="0" nodeType="afterEffect">
-                                  <p:stCondLst>
-                                    <p:cond delay="0"/>
-                                  </p:stCondLst>
-                                  <p:childTnLst>
-                                    <p:set>
-                                      <p:cBhvr>
-                                        <p:cTn id="13" dur="1" fill="hold">
-                                          <p:stCondLst>
-                                            <p:cond delay="0"/>
-                                          </p:stCondLst>
-                                        </p:cTn>
-                                        <p:tgtEl>
-                                          <p:spTgt spid="7"/>
-                                        </p:tgtEl>
-                                        <p:attrNameLst>
-                                          <p:attrName>style.visibility</p:attrName>
-                                        </p:attrNameLst>
-                                      </p:cBhvr>
-                                      <p:to>
-                                        <p:strVal val="visible"/>
-                                      </p:to>
-                                    </p:set>
-                                  </p:childTnLst>
-                                </p:cTn>
-                              </p:par>
-                            </p:childTnLst>
-                          </p:cTn>
-                        </p:par>
-                        <p:par>
-                          <p:cTn id="14" fill="hold">
-                            <p:stCondLst>
-                              <p:cond delay="0"/>
-                            </p:stCondLst>
-                            <p:childTnLst>
-                              <p:par>
-                                <p:cTn id="15" presetID="1" presetClass="entr" presetSubtype="0" fill="hold" grpId="0" nodeType="afterEffect">
-                                  <p:stCondLst>
-                                    <p:cond delay="0"/>
-                                  </p:stCondLst>
-                                  <p:childTnLst>
-                                    <p:set>
-                                      <p:cBhvr>
-                                        <p:cTn id="16" dur="1" fill="hold">
-                                          <p:stCondLst>
-                                            <p:cond delay="0"/>
-                                          </p:stCondLst>
-                                        </p:cTn>
-                                        <p:tgtEl>
-                                          <p:spTgt spid="8"/>
-                                        </p:tgtEl>
-                                        <p:attrNameLst>
-                                          <p:attrName>style.visibility</p:attrName>
-                                        </p:attrNameLst>
-                                      </p:cBhvr>
-                                      <p:to>
-                                        <p:strVal val="visible"/>
-                                      </p:to>
-                                    </p:set>
-                                  </p:childTnLst>
-                                </p:cTn>
-                              </p:par>
-                            </p:childTnLst>
-                          </p:cTn>
-                        </p:par>
-                        <p:par>
-                          <p:cTn id="17" fill="hold">
-                            <p:stCondLst>
-                              <p:cond delay="0"/>
-                            </p:stCondLst>
-                            <p:childTnLst>
-                              <p:par>
-                                <p:cTn id="18" presetID="1" presetClass="entr" presetSubtype="0" fill="hold" grpId="0" nodeType="afterEffect">
-                                  <p:stCondLst>
-                                    <p:cond delay="0"/>
-                                  </p:stCondLst>
-                                  <p:childTnLst>
-                                    <p:set>
-                                      <p:cBhvr>
-                                        <p:cTn id="19" dur="1" fill="hold">
                                           <p:stCondLst>
                                             <p:cond delay="0"/>
                                           </p:stCondLst>
@@ -17004,21 +15756,30 @@
                             </p:childTnLst>
                           </p:cTn>
                         </p:par>
+                      </p:childTnLst>
+                    </p:cTn>
+                  </p:par>
+                  <p:par>
+                    <p:cTn id="11" fill="hold">
+                      <p:stCondLst>
+                        <p:cond delay="indefinite"/>
+                      </p:stCondLst>
+                      <p:childTnLst>
                         <p:par>
-                          <p:cTn id="20" fill="hold">
+                          <p:cTn id="12" fill="hold">
                             <p:stCondLst>
                               <p:cond delay="0"/>
                             </p:stCondLst>
                             <p:childTnLst>
                               <p:par>
-                                <p:cTn id="21" presetID="1" presetClass="entr" presetSubtype="0" fill="hold" grpId="0" nodeType="afterEffect">
+                                <p:cTn id="13" presetID="1" presetClass="entr" presetSubtype="0" fill="hold" grpId="0" nodeType="clickEffect">
                                   <p:stCondLst>
                                     <p:cond delay="0"/>
                                   </p:stCondLst>
                                   <p:childTnLst>
                                     <p:set>
                                       <p:cBhvr>
-                                        <p:cTn id="22" dur="1" fill="hold">
+                                        <p:cTn id="14" dur="1" fill="hold">
                                           <p:stCondLst>
                                             <p:cond delay="0"/>
                                           </p:stCondLst>
@@ -17037,24 +15798,15 @@
                                   </p:childTnLst>
                                 </p:cTn>
                               </p:par>
-                            </p:childTnLst>
-                          </p:cTn>
-                        </p:par>
-                        <p:par>
-                          <p:cTn id="23" fill="hold">
-                            <p:stCondLst>
-                              <p:cond delay="0"/>
-                            </p:stCondLst>
-                            <p:childTnLst>
                               <p:par>
-                                <p:cTn id="24" presetID="1" presetClass="entr" presetSubtype="0" fill="hold" grpId="0" nodeType="afterEffect">
+                                <p:cTn id="15" presetID="1" presetClass="entr" presetSubtype="0" fill="hold" grpId="0" nodeType="withEffect">
                                   <p:stCondLst>
                                     <p:cond delay="0"/>
                                   </p:stCondLst>
                                   <p:childTnLst>
                                     <p:set>
                                       <p:cBhvr>
-                                        <p:cTn id="25" dur="1" fill="hold">
+                                        <p:cTn id="16" dur="1" fill="hold">
                                           <p:stCondLst>
                                             <p:cond delay="0"/>
                                           </p:stCondLst>
@@ -17076,21 +15828,30 @@
                             </p:childTnLst>
                           </p:cTn>
                         </p:par>
+                      </p:childTnLst>
+                    </p:cTn>
+                  </p:par>
+                  <p:par>
+                    <p:cTn id="17" fill="hold">
+                      <p:stCondLst>
+                        <p:cond delay="indefinite"/>
+                      </p:stCondLst>
+                      <p:childTnLst>
                         <p:par>
-                          <p:cTn id="26" fill="hold">
+                          <p:cTn id="18" fill="hold">
                             <p:stCondLst>
                               <p:cond delay="0"/>
                             </p:stCondLst>
                             <p:childTnLst>
                               <p:par>
-                                <p:cTn id="27" presetID="1" presetClass="entr" presetSubtype="0" fill="hold" grpId="0" nodeType="afterEffect">
+                                <p:cTn id="19" presetID="1" presetClass="entr" presetSubtype="0" fill="hold" grpId="0" nodeType="clickEffect">
                                   <p:stCondLst>
                                     <p:cond delay="0"/>
                                   </p:stCondLst>
                                   <p:childTnLst>
                                     <p:set>
                                       <p:cBhvr>
-                                        <p:cTn id="28" dur="1" fill="hold">
+                                        <p:cTn id="20" dur="1" fill="hold">
                                           <p:stCondLst>
                                             <p:cond delay="0"/>
                                           </p:stCondLst>
@@ -17109,24 +15870,15 @@
                                   </p:childTnLst>
                                 </p:cTn>
                               </p:par>
-                            </p:childTnLst>
-                          </p:cTn>
-                        </p:par>
-                        <p:par>
-                          <p:cTn id="29" fill="hold">
-                            <p:stCondLst>
-                              <p:cond delay="0"/>
-                            </p:stCondLst>
-                            <p:childTnLst>
                               <p:par>
-                                <p:cTn id="30" presetID="1" presetClass="entr" presetSubtype="0" fill="hold" grpId="0" nodeType="afterEffect">
+                                <p:cTn id="21" presetID="1" presetClass="entr" presetSubtype="0" fill="hold" grpId="0" nodeType="withEffect">
                                   <p:stCondLst>
                                     <p:cond delay="0"/>
                                   </p:stCondLst>
                                   <p:childTnLst>
                                     <p:set>
                                       <p:cBhvr>
-                                        <p:cTn id="31" dur="1" fill="hold">
+                                        <p:cTn id="22" dur="1" fill="hold">
                                           <p:stCondLst>
                                             <p:cond delay="0"/>
                                           </p:stCondLst>
@@ -17148,21 +15900,30 @@
                             </p:childTnLst>
                           </p:cTn>
                         </p:par>
+                      </p:childTnLst>
+                    </p:cTn>
+                  </p:par>
+                  <p:par>
+                    <p:cTn id="23" fill="hold">
+                      <p:stCondLst>
+                        <p:cond delay="indefinite"/>
+                      </p:stCondLst>
+                      <p:childTnLst>
                         <p:par>
-                          <p:cTn id="32" fill="hold">
+                          <p:cTn id="24" fill="hold">
                             <p:stCondLst>
                               <p:cond delay="0"/>
                             </p:stCondLst>
                             <p:childTnLst>
                               <p:par>
-                                <p:cTn id="33" presetID="1" presetClass="entr" presetSubtype="0" fill="hold" grpId="0" nodeType="afterEffect">
+                                <p:cTn id="25" presetID="1" presetClass="entr" presetSubtype="0" fill="hold" grpId="0" nodeType="clickEffect">
                                   <p:stCondLst>
                                     <p:cond delay="0"/>
                                   </p:stCondLst>
                                   <p:childTnLst>
                                     <p:set>
                                       <p:cBhvr>
-                                        <p:cTn id="34" dur="1" fill="hold">
+                                        <p:cTn id="26" dur="1" fill="hold">
                                           <p:stCondLst>
                                             <p:cond delay="0"/>
                                           </p:stCondLst>
@@ -17181,24 +15942,15 @@
                                   </p:childTnLst>
                                 </p:cTn>
                               </p:par>
-                            </p:childTnLst>
-                          </p:cTn>
-                        </p:par>
-                        <p:par>
-                          <p:cTn id="35" fill="hold">
-                            <p:stCondLst>
-                              <p:cond delay="0"/>
-                            </p:stCondLst>
-                            <p:childTnLst>
                               <p:par>
-                                <p:cTn id="36" presetID="1" presetClass="entr" presetSubtype="0" fill="hold" grpId="0" nodeType="afterEffect">
+                                <p:cTn id="27" presetID="1" presetClass="entr" presetSubtype="0" fill="hold" grpId="0" nodeType="withEffect">
                                   <p:stCondLst>
                                     <p:cond delay="0"/>
                                   </p:stCondLst>
                                   <p:childTnLst>
                                     <p:set>
                                       <p:cBhvr>
-                                        <p:cTn id="37" dur="1" fill="hold">
+                                        <p:cTn id="28" dur="1" fill="hold">
                                           <p:stCondLst>
                                             <p:cond delay="0"/>
                                           </p:stCondLst>
@@ -17220,21 +15972,30 @@
                             </p:childTnLst>
                           </p:cTn>
                         </p:par>
+                      </p:childTnLst>
+                    </p:cTn>
+                  </p:par>
+                  <p:par>
+                    <p:cTn id="29" fill="hold">
+                      <p:stCondLst>
+                        <p:cond delay="indefinite"/>
+                      </p:stCondLst>
+                      <p:childTnLst>
                         <p:par>
-                          <p:cTn id="38" fill="hold">
+                          <p:cTn id="30" fill="hold">
                             <p:stCondLst>
                               <p:cond delay="0"/>
                             </p:stCondLst>
                             <p:childTnLst>
                               <p:par>
-                                <p:cTn id="39" presetID="1" presetClass="entr" presetSubtype="0" fill="hold" grpId="0" nodeType="afterEffect">
+                                <p:cTn id="31" presetID="1" presetClass="entr" presetSubtype="0" fill="hold" grpId="0" nodeType="clickEffect">
                                   <p:stCondLst>
                                     <p:cond delay="0"/>
                                   </p:stCondLst>
                                   <p:childTnLst>
                                     <p:set>
                                       <p:cBhvr>
-                                        <p:cTn id="40" dur="1" fill="hold">
+                                        <p:cTn id="32" dur="1" fill="hold">
                                           <p:stCondLst>
                                             <p:cond delay="0"/>
                                           </p:stCondLst>
@@ -17253,24 +16014,15 @@
                                   </p:childTnLst>
                                 </p:cTn>
                               </p:par>
-                            </p:childTnLst>
-                          </p:cTn>
-                        </p:par>
-                        <p:par>
-                          <p:cTn id="41" fill="hold">
-                            <p:stCondLst>
-                              <p:cond delay="0"/>
-                            </p:stCondLst>
-                            <p:childTnLst>
                               <p:par>
-                                <p:cTn id="42" presetID="1" presetClass="entr" presetSubtype="0" fill="hold" grpId="0" nodeType="afterEffect">
+                                <p:cTn id="33" presetID="1" presetClass="entr" presetSubtype="0" fill="hold" grpId="0" nodeType="withEffect">
                                   <p:stCondLst>
                                     <p:cond delay="0"/>
                                   </p:stCondLst>
                                   <p:childTnLst>
                                     <p:set>
                                       <p:cBhvr>
-                                        <p:cTn id="43" dur="1" fill="hold">
+                                        <p:cTn id="34" dur="1" fill="hold">
                                           <p:stCondLst>
                                             <p:cond delay="0"/>
                                           </p:stCondLst>
@@ -17292,21 +16044,30 @@
                             </p:childTnLst>
                           </p:cTn>
                         </p:par>
+                      </p:childTnLst>
+                    </p:cTn>
+                  </p:par>
+                  <p:par>
+                    <p:cTn id="35" fill="hold">
+                      <p:stCondLst>
+                        <p:cond delay="indefinite"/>
+                      </p:stCondLst>
+                      <p:childTnLst>
                         <p:par>
-                          <p:cTn id="44" fill="hold">
+                          <p:cTn id="36" fill="hold">
                             <p:stCondLst>
                               <p:cond delay="0"/>
                             </p:stCondLst>
                             <p:childTnLst>
                               <p:par>
-                                <p:cTn id="45" presetID="1" presetClass="entr" presetSubtype="0" fill="hold" grpId="0" nodeType="afterEffect">
+                                <p:cTn id="37" presetID="1" presetClass="entr" presetSubtype="0" fill="hold" grpId="0" nodeType="clickEffect">
                                   <p:stCondLst>
                                     <p:cond delay="0"/>
                                   </p:stCondLst>
                                   <p:childTnLst>
                                     <p:set>
                                       <p:cBhvr>
-                                        <p:cTn id="46" dur="1" fill="hold">
+                                        <p:cTn id="38" dur="1" fill="hold">
                                           <p:stCondLst>
                                             <p:cond delay="0"/>
                                           </p:stCondLst>
@@ -17353,8 +16114,6 @@
       </p:par>
     </p:tnLst>
     <p:bldLst>
-      <p:bldP spid="4" grpId="0"/>
-      <p:bldP spid="5" grpId="0"/>
       <p:bldP spid="7" grpId="0" animBg="1"/>
       <p:bldP spid="8" grpId="0"/>
       <p:bldP spid="9" grpId="0"/>
@@ -17996,7 +16755,7 @@
     </p:spTree>
     <p:extLst>
       <p:ext uri="{BB962C8B-B14F-4D97-AF65-F5344CB8AC3E}">
-        <p14:creationId xmlns:p14="http://schemas.microsoft.com/office/powerpoint/2010/main" val="1738663386"/>
+        <p14:creationId xmlns:p14="http://schemas.microsoft.com/office/powerpoint/2010/main" val="4146157551"/>
       </p:ext>
     </p:extLst>
   </p:cSld>
@@ -18015,9 +16774,6 @@
                     <p:cTn id="3" fill="hold">
                       <p:stCondLst>
                         <p:cond delay="indefinite"/>
-                        <p:cond evt="onBegin" delay="0">
-                          <p:tn val="2"/>
-                        </p:cond>
                       </p:stCondLst>
                       <p:childTnLst>
                         <p:par>
@@ -18027,7 +16783,7 @@
                             </p:stCondLst>
                             <p:childTnLst>
                               <p:par>
-                                <p:cTn id="5" presetID="1" presetClass="entr" presetSubtype="0" fill="hold" grpId="0" nodeType="withEffect">
+                                <p:cTn id="5" presetID="1" presetClass="entr" presetSubtype="0" fill="hold" grpId="0" nodeType="clickEffect">
                                   <p:stCondLst>
                                     <p:cond delay="0"/>
                                   </p:stCondLst>
@@ -18035,96 +16791,6 @@
                                     <p:set>
                                       <p:cBhvr>
                                         <p:cTn id="6" dur="1" fill="hold">
-                                          <p:stCondLst>
-                                            <p:cond delay="0"/>
-                                          </p:stCondLst>
-                                        </p:cTn>
-                                        <p:tgtEl>
-                                          <p:spTgt spid="4"/>
-                                        </p:tgtEl>
-                                        <p:attrNameLst>
-                                          <p:attrName>style.visibility</p:attrName>
-                                        </p:attrNameLst>
-                                      </p:cBhvr>
-                                      <p:to>
-                                        <p:strVal val="visible"/>
-                                      </p:to>
-                                    </p:set>
-                                  </p:childTnLst>
-                                </p:cTn>
-                              </p:par>
-                              <p:par>
-                                <p:cTn id="7" presetID="1" presetClass="entr" presetSubtype="0" fill="hold" grpId="0" nodeType="withEffect">
-                                  <p:stCondLst>
-                                    <p:cond delay="0"/>
-                                  </p:stCondLst>
-                                  <p:childTnLst>
-                                    <p:set>
-                                      <p:cBhvr>
-                                        <p:cTn id="8" dur="1" fill="hold">
-                                          <p:stCondLst>
-                                            <p:cond delay="0"/>
-                                          </p:stCondLst>
-                                        </p:cTn>
-                                        <p:tgtEl>
-                                          <p:spTgt spid="5"/>
-                                        </p:tgtEl>
-                                        <p:attrNameLst>
-                                          <p:attrName>style.visibility</p:attrName>
-                                        </p:attrNameLst>
-                                      </p:cBhvr>
-                                      <p:to>
-                                        <p:strVal val="visible"/>
-                                      </p:to>
-                                    </p:set>
-                                  </p:childTnLst>
-                                </p:cTn>
-                              </p:par>
-                              <p:par>
-                                <p:cTn id="9" presetID="1" presetClass="entr" presetSubtype="0" fill="hold" nodeType="withEffect">
-                                  <p:stCondLst>
-                                    <p:cond delay="0"/>
-                                  </p:stCondLst>
-                                  <p:childTnLst>
-                                    <p:set>
-                                      <p:cBhvr>
-                                        <p:cTn id="10" dur="1" fill="hold">
-                                          <p:stCondLst>
-                                            <p:cond delay="0"/>
-                                          </p:stCondLst>
-                                        </p:cTn>
-                                        <p:tgtEl>
-                                          <p:spTgt spid="6"/>
-                                        </p:tgtEl>
-                                        <p:attrNameLst>
-                                          <p:attrName>style.visibility</p:attrName>
-                                        </p:attrNameLst>
-                                      </p:cBhvr>
-                                      <p:to>
-                                        <p:strVal val="visible"/>
-                                      </p:to>
-                                    </p:set>
-                                  </p:childTnLst>
-                                </p:cTn>
-                              </p:par>
-                            </p:childTnLst>
-                          </p:cTn>
-                        </p:par>
-                        <p:par>
-                          <p:cTn id="11" fill="hold">
-                            <p:stCondLst>
-                              <p:cond delay="0"/>
-                            </p:stCondLst>
-                            <p:childTnLst>
-                              <p:par>
-                                <p:cTn id="12" presetID="1" presetClass="entr" presetSubtype="0" fill="hold" grpId="0" nodeType="afterEffect">
-                                  <p:stCondLst>
-                                    <p:cond delay="0"/>
-                                  </p:stCondLst>
-                                  <p:childTnLst>
-                                    <p:set>
-                                      <p:cBhvr>
-                                        <p:cTn id="13" dur="1" fill="hold">
                                           <p:stCondLst>
                                             <p:cond delay="0"/>
                                           </p:stCondLst>
@@ -18146,21 +16812,30 @@
                             </p:childTnLst>
                           </p:cTn>
                         </p:par>
+                      </p:childTnLst>
+                    </p:cTn>
+                  </p:par>
+                  <p:par>
+                    <p:cTn id="7" fill="hold">
+                      <p:stCondLst>
+                        <p:cond delay="indefinite"/>
+                      </p:stCondLst>
+                      <p:childTnLst>
                         <p:par>
-                          <p:cTn id="14" fill="hold">
+                          <p:cTn id="8" fill="hold">
                             <p:stCondLst>
                               <p:cond delay="0"/>
                             </p:stCondLst>
                             <p:childTnLst>
                               <p:par>
-                                <p:cTn id="15" presetID="1" presetClass="entr" presetSubtype="0" fill="hold" grpId="0" nodeType="afterEffect">
+                                <p:cTn id="9" presetID="1" presetClass="entr" presetSubtype="0" fill="hold" grpId="0" nodeType="clickEffect">
                                   <p:stCondLst>
                                     <p:cond delay="0"/>
                                   </p:stCondLst>
                                   <p:childTnLst>
                                     <p:set>
                                       <p:cBhvr>
-                                        <p:cTn id="16" dur="1" fill="hold">
+                                        <p:cTn id="10" dur="1" fill="hold">
                                           <p:stCondLst>
                                             <p:cond delay="0"/>
                                           </p:stCondLst>
@@ -18179,24 +16854,60 @@
                                   </p:childTnLst>
                                 </p:cTn>
                               </p:par>
-                            </p:childTnLst>
-                          </p:cTn>
-                        </p:par>
-                        <p:par>
-                          <p:cTn id="17" fill="hold">
-                            <p:stCondLst>
-                              <p:cond delay="0"/>
-                            </p:stCondLst>
-                            <p:childTnLst>
                               <p:par>
-                                <p:cTn id="18" presetID="1" presetClass="entr" presetSubtype="0" fill="hold" grpId="0" nodeType="afterEffect">
+                                <p:cTn id="11" presetID="1" presetClass="entr" presetSubtype="0" fill="hold" grpId="0" nodeType="withEffect">
                                   <p:stCondLst>
                                     <p:cond delay="0"/>
                                   </p:stCondLst>
                                   <p:childTnLst>
                                     <p:set>
                                       <p:cBhvr>
-                                        <p:cTn id="19" dur="1" fill="hold">
+                                        <p:cTn id="12" dur="1" fill="hold">
+                                          <p:stCondLst>
+                                            <p:cond delay="0"/>
+                                          </p:stCondLst>
+                                        </p:cTn>
+                                        <p:tgtEl>
+                                          <p:spTgt spid="11"/>
+                                        </p:tgtEl>
+                                        <p:attrNameLst>
+                                          <p:attrName>style.visibility</p:attrName>
+                                        </p:attrNameLst>
+                                      </p:cBhvr>
+                                      <p:to>
+                                        <p:strVal val="visible"/>
+                                      </p:to>
+                                    </p:set>
+                                  </p:childTnLst>
+                                </p:cTn>
+                              </p:par>
+                            </p:childTnLst>
+                          </p:cTn>
+                        </p:par>
+                      </p:childTnLst>
+                    </p:cTn>
+                  </p:par>
+                  <p:par>
+                    <p:cTn id="13" fill="hold">
+                      <p:stCondLst>
+                        <p:cond delay="indefinite"/>
+                      </p:stCondLst>
+                      <p:childTnLst>
+                        <p:par>
+                          <p:cTn id="14" fill="hold">
+                            <p:stCondLst>
+                              <p:cond delay="0"/>
+                            </p:stCondLst>
+                            <p:childTnLst>
+                              <p:par>
+                                <p:cTn id="15" presetID="1" presetClass="entr" presetSubtype="0" fill="hold" grpId="0" nodeType="clickEffect">
+                                  <p:stCondLst>
+                                    <p:cond delay="0"/>
+                                  </p:stCondLst>
+                                  <p:childTnLst>
+                                    <p:set>
+                                      <p:cBhvr>
+                                        <p:cTn id="16" dur="1" fill="hold">
                                           <p:stCondLst>
                                             <p:cond delay="0"/>
                                           </p:stCondLst>
@@ -18215,9 +16926,45 @@
                                   </p:childTnLst>
                                 </p:cTn>
                               </p:par>
+                              <p:par>
+                                <p:cTn id="17" presetID="1" presetClass="entr" presetSubtype="0" fill="hold" grpId="0" nodeType="withEffect">
+                                  <p:stCondLst>
+                                    <p:cond delay="0"/>
+                                  </p:stCondLst>
+                                  <p:childTnLst>
+                                    <p:set>
+                                      <p:cBhvr>
+                                        <p:cTn id="18" dur="1" fill="hold">
+                                          <p:stCondLst>
+                                            <p:cond delay="0"/>
+                                          </p:stCondLst>
+                                        </p:cTn>
+                                        <p:tgtEl>
+                                          <p:spTgt spid="12"/>
+                                        </p:tgtEl>
+                                        <p:attrNameLst>
+                                          <p:attrName>style.visibility</p:attrName>
+                                        </p:attrNameLst>
+                                      </p:cBhvr>
+                                      <p:to>
+                                        <p:strVal val="visible"/>
+                                      </p:to>
+                                    </p:set>
+                                  </p:childTnLst>
+                                </p:cTn>
+                              </p:par>
                             </p:childTnLst>
                           </p:cTn>
                         </p:par>
+                      </p:childTnLst>
+                    </p:cTn>
+                  </p:par>
+                  <p:par>
+                    <p:cTn id="19" fill="hold">
+                      <p:stCondLst>
+                        <p:cond delay="indefinite"/>
+                      </p:stCondLst>
+                      <p:childTnLst>
                         <p:par>
                           <p:cTn id="20" fill="hold">
                             <p:stCondLst>
@@ -18225,7 +16972,7 @@
                             </p:stCondLst>
                             <p:childTnLst>
                               <p:par>
-                                <p:cTn id="21" presetID="1" presetClass="entr" presetSubtype="0" fill="hold" grpId="0" nodeType="afterEffect">
+                                <p:cTn id="21" presetID="1" presetClass="entr" presetSubtype="0" fill="hold" grpId="0" nodeType="clickEffect">
                                   <p:stCondLst>
                                     <p:cond delay="0"/>
                                   </p:stCondLst>
@@ -18251,96 +16998,15 @@
                                   </p:childTnLst>
                                 </p:cTn>
                               </p:par>
-                            </p:childTnLst>
-                          </p:cTn>
-                        </p:par>
-                        <p:par>
-                          <p:cTn id="23" fill="hold">
-                            <p:stCondLst>
-                              <p:cond delay="0"/>
-                            </p:stCondLst>
-                            <p:childTnLst>
                               <p:par>
-                                <p:cTn id="24" presetID="1" presetClass="entr" presetSubtype="0" fill="hold" grpId="0" nodeType="afterEffect">
+                                <p:cTn id="23" presetID="1" presetClass="entr" presetSubtype="0" fill="hold" grpId="0" nodeType="withEffect">
                                   <p:stCondLst>
                                     <p:cond delay="0"/>
                                   </p:stCondLst>
                                   <p:childTnLst>
                                     <p:set>
                                       <p:cBhvr>
-                                        <p:cTn id="25" dur="1" fill="hold">
-                                          <p:stCondLst>
-                                            <p:cond delay="0"/>
-                                          </p:stCondLst>
-                                        </p:cTn>
-                                        <p:tgtEl>
-                                          <p:spTgt spid="11"/>
-                                        </p:tgtEl>
-                                        <p:attrNameLst>
-                                          <p:attrName>style.visibility</p:attrName>
-                                        </p:attrNameLst>
-                                      </p:cBhvr>
-                                      <p:to>
-                                        <p:strVal val="visible"/>
-                                      </p:to>
-                                    </p:set>
-                                  </p:childTnLst>
-                                </p:cTn>
-                              </p:par>
-                            </p:childTnLst>
-                          </p:cTn>
-                        </p:par>
-                        <p:par>
-                          <p:cTn id="26" fill="hold">
-                            <p:stCondLst>
-                              <p:cond delay="0"/>
-                            </p:stCondLst>
-                            <p:childTnLst>
-                              <p:par>
-                                <p:cTn id="27" presetID="1" presetClass="entr" presetSubtype="0" fill="hold" grpId="0" nodeType="afterEffect">
-                                  <p:stCondLst>
-                                    <p:cond delay="0"/>
-                                  </p:stCondLst>
-                                  <p:childTnLst>
-                                    <p:set>
-                                      <p:cBhvr>
-                                        <p:cTn id="28" dur="1" fill="hold">
-                                          <p:stCondLst>
-                                            <p:cond delay="0"/>
-                                          </p:stCondLst>
-                                        </p:cTn>
-                                        <p:tgtEl>
-                                          <p:spTgt spid="12"/>
-                                        </p:tgtEl>
-                                        <p:attrNameLst>
-                                          <p:attrName>style.visibility</p:attrName>
-                                        </p:attrNameLst>
-                                      </p:cBhvr>
-                                      <p:to>
-                                        <p:strVal val="visible"/>
-                                      </p:to>
-                                    </p:set>
-                                  </p:childTnLst>
-                                </p:cTn>
-                              </p:par>
-                            </p:childTnLst>
-                          </p:cTn>
-                        </p:par>
-                        <p:par>
-                          <p:cTn id="29" fill="hold">
-                            <p:stCondLst>
-                              <p:cond delay="0"/>
-                            </p:stCondLst>
-                            <p:childTnLst>
-                              <p:par>
-                                <p:cTn id="30" presetID="1" presetClass="entr" presetSubtype="0" fill="hold" grpId="0" nodeType="afterEffect">
-                                  <p:stCondLst>
-                                    <p:cond delay="0"/>
-                                  </p:stCondLst>
-                                  <p:childTnLst>
-                                    <p:set>
-                                      <p:cBhvr>
-                                        <p:cTn id="31" dur="1" fill="hold">
+                                        <p:cTn id="24" dur="1" fill="hold">
                                           <p:stCondLst>
                                             <p:cond delay="0"/>
                                           </p:stCondLst>
@@ -18362,21 +17028,30 @@
                             </p:childTnLst>
                           </p:cTn>
                         </p:par>
+                      </p:childTnLst>
+                    </p:cTn>
+                  </p:par>
+                  <p:par>
+                    <p:cTn id="25" fill="hold">
+                      <p:stCondLst>
+                        <p:cond delay="indefinite"/>
+                      </p:stCondLst>
+                      <p:childTnLst>
                         <p:par>
-                          <p:cTn id="32" fill="hold">
+                          <p:cTn id="26" fill="hold">
                             <p:stCondLst>
                               <p:cond delay="0"/>
                             </p:stCondLst>
                             <p:childTnLst>
                               <p:par>
-                                <p:cTn id="33" presetID="1" presetClass="entr" presetSubtype="0" fill="hold" grpId="0" nodeType="afterEffect">
+                                <p:cTn id="27" presetID="1" presetClass="entr" presetSubtype="0" fill="hold" grpId="0" nodeType="clickEffect">
                                   <p:stCondLst>
                                     <p:cond delay="0"/>
                                   </p:stCondLst>
                                   <p:childTnLst>
                                     <p:set>
                                       <p:cBhvr>
-                                        <p:cTn id="34" dur="1" fill="hold">
+                                        <p:cTn id="28" dur="1" fill="hold">
                                           <p:stCondLst>
                                             <p:cond delay="0"/>
                                           </p:stCondLst>
@@ -18423,8 +17098,6 @@
       </p:par>
     </p:tnLst>
     <p:bldLst>
-      <p:bldP spid="4" grpId="0"/>
-      <p:bldP spid="5" grpId="0"/>
       <p:bldP spid="7" grpId="0"/>
       <p:bldP spid="8" grpId="0" animBg="1"/>
       <p:bldP spid="9" grpId="0" animBg="1"/>

--- a/docs/CaseLogic_7min_Presentation.pptx
+++ b/docs/CaseLogic_7min_Presentation.pptx
@@ -8,7 +8,7 @@
     <p:notesMasterId r:id="rId11"/>
   </p:notesMasterIdLst>
   <p:sldIdLst>
-    <p:sldId id="256" r:id="rId2"/>
+    <p:sldId id="265" r:id="rId2"/>
     <p:sldId id="257" r:id="rId3"/>
     <p:sldId id="258" r:id="rId4"/>
     <p:sldId id="259" r:id="rId5"/>
@@ -115,6 +115,11 @@
       </a:defRPr>
     </a:lvl9pPr>
   </p:defaultTextStyle>
+  <p:extLst>
+    <p:ext uri="{EFAFB233-063F-42B5-8137-9DF3F51BA10A}">
+      <p15:sldGuideLst xmlns:p15="http://schemas.microsoft.com/office/powerpoint/2012/main"/>
+    </p:ext>
+  </p:extLst>
 </p:presentation>
 </file>
 
@@ -512,16 +517,45 @@
           <a:bodyPr/>
           <a:lstStyle/>
           <a:p>
-            <a:r>
-              <a:rPr lang="en-US" smtClean="0">
+            <a:pPr marL="0" marR="0" indent="0" algn="l" defTabSz="914400" rtl="0" eaLnBrk="1" fontAlgn="auto" latinLnBrk="0" hangingPunct="1">
+              <a:lnSpc>
+                <a:spcPct val="100000"/>
+              </a:lnSpc>
+              <a:spcBef>
+                <a:spcPts val="0"/>
+              </a:spcBef>
+              <a:spcAft>
+                <a:spcPts val="0"/>
+              </a:spcAft>
+              <a:buClrTx/>
+              <a:buSzTx/>
+              <a:buFontTx/>
+              <a:buNone/>
+              <a:tabLst/>
+              <a:defRPr/>
+            </a:pPr>
+            <a:r>
+              <a:rPr lang="en-US" dirty="0" smtClean="0">
                 <a:latin typeface="Aptos"/>
               </a:rPr>
               <a:t>0:00-0:40
 Open by framing this as an implementation review, not a speculative roadmap.
-The story: CaseLogic is trying to make vehicle-law research trustworthy by forcing retrieval before answer generation.
-Call out the three themes on screen: hybrid retrieval, grounded chat, inspectable sources.</a:t>
-            </a:r>
-            <a:endParaRPr lang="en-US">
+The story: </a:t>
+            </a:r>
+            <a:r>
+              <a:rPr lang="en-US" dirty="0" err="1" smtClean="0">
+                <a:latin typeface="Aptos"/>
+              </a:rPr>
+              <a:t>CaseLogic</a:t>
+            </a:r>
+            <a:r>
+              <a:rPr lang="en-US" dirty="0" smtClean="0">
+                <a:latin typeface="Aptos"/>
+              </a:rPr>
+              <a:t> is trying to make vehicle-law research trustworthy by forcing retrieval before answer generation.
+Call out the three themes on screen: hybrid retrieval, </a:t>
+            </a:r>
+            <a:endParaRPr lang="en-US" dirty="0">
               <a:latin typeface="Aptos"/>
             </a:endParaRPr>
           </a:p>
@@ -553,7 +587,7 @@
     </p:spTree>
     <p:extLst>
       <p:ext uri="{BB962C8B-B14F-4D97-AF65-F5344CB8AC3E}">
-        <p14:creationId xmlns:p14="http://schemas.microsoft.com/office/powerpoint/2010/main" val="2053286643"/>
+        <p14:creationId xmlns:p14="http://schemas.microsoft.com/office/powerpoint/2010/main" val="1008347166"/>
       </p:ext>
     </p:extLst>
   </p:cSld>
@@ -4306,46 +4340,6 @@
       </p:sp>
       <p:sp>
         <p:nvSpPr>
-          <p:cNvPr id="4" name="TextBox 3"/>
-          <p:cNvSpPr txBox="1"/>
-          <p:nvPr/>
-        </p:nvSpPr>
-        <p:spPr>
-          <a:xfrm>
-            <a:off x="558800" y="584200"/>
-            <a:ext cx="3302000" cy="271869"/>
-          </a:xfrm>
-          <a:prstGeom prst="rect">
-            <a:avLst/>
-          </a:prstGeom>
-          <a:noFill/>
-        </p:spPr>
-        <p:txBody>
-          <a:bodyPr vert="horz" wrap="square" lIns="101600" tIns="50800" rIns="101600" bIns="50800" rtlCol="0">
-            <a:spAutoFit/>
-          </a:bodyPr>
-          <a:lstStyle/>
-          <a:p>
-            <a:r>
-              <a:rPr lang="en-US" sz="1100" b="1" smtClean="0">
-                <a:solidFill>
-                  <a:srgbClr val="94A3B8"/>
-                </a:solidFill>
-                <a:latin typeface="Aptos"/>
-              </a:rPr>
-              <a:t>7-MINUTE IMPLEMENTATION REVIEW</a:t>
-            </a:r>
-            <a:endParaRPr lang="en-US" sz="1100" b="1">
-              <a:solidFill>
-                <a:srgbClr val="94A3B8"/>
-              </a:solidFill>
-              <a:latin typeface="Aptos"/>
-            </a:endParaRPr>
-          </a:p>
-        </p:txBody>
-      </p:sp>
-      <p:sp>
-        <p:nvSpPr>
           <p:cNvPr id="5" name="TextBox 4"/>
           <p:cNvSpPr txBox="1"/>
           <p:nvPr/>
@@ -4465,64 +4459,24 @@
       </p:sp>
       <p:sp>
         <p:nvSpPr>
-          <p:cNvPr id="8" name="TextBox 7"/>
-          <p:cNvSpPr txBox="1"/>
-          <p:nvPr/>
-        </p:nvSpPr>
-        <p:spPr>
-          <a:xfrm>
-            <a:off x="558800" y="3429000"/>
-            <a:ext cx="6604000" cy="564257"/>
-          </a:xfrm>
-          <a:prstGeom prst="rect">
-            <a:avLst/>
-          </a:prstGeom>
-          <a:noFill/>
-        </p:spPr>
-        <p:txBody>
-          <a:bodyPr vert="horz" wrap="square" lIns="101600" tIns="50800" rIns="101600" bIns="50800" rtlCol="0">
-            <a:spAutoFit/>
-          </a:bodyPr>
-          <a:lstStyle/>
-          <a:p>
-            <a:r>
-              <a:rPr lang="en-US" sz="1500" smtClean="0">
-                <a:solidFill>
-                  <a:srgbClr val="94A3B8"/>
-                </a:solidFill>
-                <a:latin typeface="Aptos"/>
-              </a:rPr>
-              <a:t>This deck is based on the implemented code paths, passing smoke tests, and the repo walkthrough -- not on unfinished roadmap claims.</a:t>
-            </a:r>
-            <a:endParaRPr lang="en-US" sz="1500">
-              <a:solidFill>
-                <a:srgbClr val="94A3B8"/>
-              </a:solidFill>
-              <a:latin typeface="Aptos"/>
-            </a:endParaRPr>
-          </a:p>
-        </p:txBody>
-      </p:sp>
-      <p:sp>
-        <p:nvSpPr>
-          <p:cNvPr id="9" name="Rounded Rectangle 8"/>
+          <p:cNvPr id="15" name="Rounded Rectangle 14"/>
           <p:cNvSpPr/>
           <p:nvPr/>
         </p:nvSpPr>
         <p:spPr>
           <a:xfrm>
-            <a:off x="558800" y="4826000"/>
-            <a:ext cx="2159000" cy="533400"/>
+            <a:off x="7874000" y="1955800"/>
+            <a:ext cx="3683000" cy="3556000"/>
           </a:xfrm>
           <a:prstGeom prst="roundRect">
             <a:avLst/>
           </a:prstGeom>
           <a:solidFill>
-            <a:srgbClr val="1E293B"/>
+            <a:srgbClr val="121E36"/>
           </a:solidFill>
-          <a:ln w="12700" cap="flat" cmpd="sng" algn="ctr">
+          <a:ln w="19050" cap="flat" cmpd="sng" algn="ctr">
             <a:solidFill>
-              <a:srgbClr val="475569"/>
+              <a:srgbClr val="2DD4BF"/>
             </a:solidFill>
             <a:prstDash val="solid"/>
             <a:miter lim="800000"/>
@@ -4557,14 +4511,14 @@
       </p:sp>
       <p:sp>
         <p:nvSpPr>
-          <p:cNvPr id="10" name="TextBox 9"/>
+          <p:cNvPr id="16" name="TextBox 15"/>
           <p:cNvSpPr txBox="1"/>
           <p:nvPr/>
         </p:nvSpPr>
         <p:spPr>
           <a:xfrm>
-            <a:off x="660400" y="4940300"/>
-            <a:ext cx="1955800" cy="318036"/>
+            <a:off x="8178800" y="2260600"/>
+            <a:ext cx="3048000" cy="379591"/>
           </a:xfrm>
           <a:prstGeom prst="rect">
             <a:avLst/>
@@ -4578,32 +4532,110 @@
           <a:lstStyle/>
           <a:p>
             <a:r>
-              <a:rPr lang="en-US" sz="1400" b="1" smtClean="0">
+              <a:rPr lang="en-US" b="1" smtClean="0">
                 <a:solidFill>
                   <a:srgbClr val="F8FAFC"/>
                 </a:solidFill>
-                <a:latin typeface="Aptos"/>
+                <a:latin typeface="Aptos Display"/>
               </a:rPr>
-              <a:t>Hybrid retrieval</a:t>
-            </a:r>
-            <a:endParaRPr lang="en-US" sz="1400" b="1">
+              <a:t>Implemented anchors</a:t>
+            </a:r>
+            <a:endParaRPr lang="en-US" b="1">
               <a:solidFill>
                 <a:srgbClr val="F8FAFC"/>
               </a:solidFill>
+              <a:latin typeface="Aptos Display"/>
+            </a:endParaRPr>
+          </a:p>
+        </p:txBody>
+      </p:sp>
+      <p:sp>
+        <p:nvSpPr>
+          <p:cNvPr id="17" name="TextBox 16"/>
+          <p:cNvSpPr txBox="1"/>
+          <p:nvPr/>
+        </p:nvSpPr>
+        <p:spPr>
+          <a:xfrm>
+            <a:off x="8178800" y="2794000"/>
+            <a:ext cx="3048000" cy="2041585"/>
+          </a:xfrm>
+          <a:prstGeom prst="rect">
+            <a:avLst/>
+          </a:prstGeom>
+          <a:noFill/>
+        </p:spPr>
+        <p:txBody>
+          <a:bodyPr vert="horz" wrap="square" lIns="101600" tIns="50800" rIns="101600" bIns="50800" rtlCol="0">
+            <a:spAutoFit/>
+          </a:bodyPr>
+          <a:lstStyle/>
+          <a:p>
+            <a:r>
+              <a:rPr lang="en-US" sz="1400" dirty="0" smtClean="0">
+                <a:solidFill>
+                  <a:srgbClr val="CBD5E1"/>
+                </a:solidFill>
+                <a:latin typeface="Aptos"/>
+              </a:rPr>
+              <a:t>backend/main.py mounts status, ingest, statutes, chat, and chats.</a:t>
+            </a:r>
+          </a:p>
+          <a:p>
+            <a:endParaRPr lang="en-US" sz="1400" dirty="0" smtClean="0">
+              <a:solidFill>
+                <a:srgbClr val="CBD5E1"/>
+              </a:solidFill>
               <a:latin typeface="Aptos"/>
             </a:endParaRPr>
           </a:p>
-        </p:txBody>
-      </p:sp>
-      <p:sp>
-        <p:nvSpPr>
-          <p:cNvPr id="11" name="Rounded Rectangle 10"/>
+          <a:p>
+            <a:r>
+              <a:rPr lang="en-US" sz="1400" dirty="0" smtClean="0">
+                <a:solidFill>
+                  <a:srgbClr val="CBD5E1"/>
+                </a:solidFill>
+                <a:latin typeface="Aptos"/>
+              </a:rPr>
+              <a:t>Hybrid retrieval combines citation parsing, FTS5, Chroma, and RRF.</a:t>
+            </a:r>
+          </a:p>
+          <a:p>
+            <a:endParaRPr lang="en-US" sz="1400" dirty="0" smtClean="0">
+              <a:solidFill>
+                <a:srgbClr val="CBD5E1"/>
+              </a:solidFill>
+              <a:latin typeface="Aptos"/>
+            </a:endParaRPr>
+          </a:p>
+          <a:p>
+            <a:r>
+              <a:rPr lang="en-US" sz="1400" dirty="0" smtClean="0">
+                <a:solidFill>
+                  <a:srgbClr val="CBD5E1"/>
+                </a:solidFill>
+                <a:latin typeface="Aptos"/>
+              </a:rPr>
+              <a:t>The frontend now uses a persistent chat workflow with inline statute cards and a source modal.</a:t>
+            </a:r>
+            <a:endParaRPr lang="en-US" sz="1400" dirty="0">
+              <a:solidFill>
+                <a:srgbClr val="CBD5E1"/>
+              </a:solidFill>
+              <a:latin typeface="Aptos"/>
+            </a:endParaRPr>
+          </a:p>
+        </p:txBody>
+      </p:sp>
+      <p:sp>
+        <p:nvSpPr>
+          <p:cNvPr id="22" name="Rounded Rectangle 21"/>
           <p:cNvSpPr/>
           <p:nvPr/>
         </p:nvSpPr>
         <p:spPr>
           <a:xfrm>
-            <a:off x="2870200" y="4826000"/>
+            <a:off x="558800" y="5825241"/>
             <a:ext cx="2159000" cy="533400"/>
           </a:xfrm>
           <a:prstGeom prst="roundRect">
@@ -4649,14 +4681,14 @@
       </p:sp>
       <p:sp>
         <p:nvSpPr>
-          <p:cNvPr id="12" name="TextBox 11"/>
+          <p:cNvPr id="23" name="TextBox 22"/>
           <p:cNvSpPr txBox="1"/>
           <p:nvPr/>
         </p:nvSpPr>
         <p:spPr>
           <a:xfrm>
-            <a:off x="2971800" y="4940300"/>
-            <a:ext cx="1955800" cy="533479"/>
+            <a:off x="660400" y="5939541"/>
+            <a:ext cx="1955800" cy="318036"/>
           </a:xfrm>
           <a:prstGeom prst="rect">
             <a:avLst/>
@@ -4670,15 +4702,15 @@
           <a:lstStyle/>
           <a:p>
             <a:r>
-              <a:rPr lang="en-US" sz="1400" b="1" smtClean="0">
+              <a:rPr lang="en-US" sz="1400" b="1" dirty="0" smtClean="0">
                 <a:solidFill>
                   <a:srgbClr val="F8FAFC"/>
                 </a:solidFill>
                 <a:latin typeface="Aptos"/>
               </a:rPr>
-              <a:t>Grounded chat agent</a:t>
-            </a:r>
-            <a:endParaRPr lang="en-US" sz="1400" b="1">
+              <a:t>Danial</a:t>
+            </a:r>
+            <a:endParaRPr lang="en-US" sz="1400" b="1" dirty="0">
               <a:solidFill>
                 <a:srgbClr val="F8FAFC"/>
               </a:solidFill>
@@ -4689,13 +4721,13 @@
       </p:sp>
       <p:sp>
         <p:nvSpPr>
-          <p:cNvPr id="13" name="Rounded Rectangle 12"/>
+          <p:cNvPr id="24" name="Rounded Rectangle 23"/>
           <p:cNvSpPr/>
           <p:nvPr/>
         </p:nvSpPr>
         <p:spPr>
           <a:xfrm>
-            <a:off x="5181600" y="4826000"/>
+            <a:off x="2870200" y="5825241"/>
             <a:ext cx="2159000" cy="533400"/>
           </a:xfrm>
           <a:prstGeom prst="roundRect">
@@ -4741,13 +4773,13 @@
       </p:sp>
       <p:sp>
         <p:nvSpPr>
-          <p:cNvPr id="14" name="TextBox 13"/>
+          <p:cNvPr id="25" name="TextBox 24"/>
           <p:cNvSpPr txBox="1"/>
           <p:nvPr/>
         </p:nvSpPr>
         <p:spPr>
           <a:xfrm>
-            <a:off x="5283200" y="4940300"/>
+            <a:off x="2971800" y="5939541"/>
             <a:ext cx="1955800" cy="318036"/>
           </a:xfrm>
           <a:prstGeom prst="rect">
@@ -4762,15 +4794,15 @@
           <a:lstStyle/>
           <a:p>
             <a:r>
-              <a:rPr lang="en-US" sz="1400" b="1" smtClean="0">
+              <a:rPr lang="en-US" sz="1400" b="1" dirty="0" err="1" smtClean="0">
                 <a:solidFill>
                   <a:srgbClr val="F8FAFC"/>
                 </a:solidFill>
                 <a:latin typeface="Aptos"/>
               </a:rPr>
-              <a:t>Inspectable sources</a:t>
-            </a:r>
-            <a:endParaRPr lang="en-US" sz="1400" b="1">
+              <a:t>Alireza</a:t>
+            </a:r>
+            <a:endParaRPr lang="en-US" sz="1400" b="1" dirty="0">
               <a:solidFill>
                 <a:srgbClr val="F8FAFC"/>
               </a:solidFill>
@@ -4781,24 +4813,24 @@
       </p:sp>
       <p:sp>
         <p:nvSpPr>
-          <p:cNvPr id="15" name="Rounded Rectangle 14"/>
+          <p:cNvPr id="26" name="Rounded Rectangle 25"/>
           <p:cNvSpPr/>
           <p:nvPr/>
         </p:nvSpPr>
         <p:spPr>
           <a:xfrm>
-            <a:off x="7874000" y="1955800"/>
-            <a:ext cx="3683000" cy="3556000"/>
+            <a:off x="5181600" y="5825241"/>
+            <a:ext cx="2159000" cy="533400"/>
           </a:xfrm>
           <a:prstGeom prst="roundRect">
             <a:avLst/>
           </a:prstGeom>
           <a:solidFill>
-            <a:srgbClr val="121E36"/>
+            <a:srgbClr val="1E293B"/>
           </a:solidFill>
-          <a:ln w="19050" cap="flat" cmpd="sng" algn="ctr">
+          <a:ln w="12700" cap="flat" cmpd="sng" algn="ctr">
             <a:solidFill>
-              <a:srgbClr val="2DD4BF"/>
+              <a:srgbClr val="475569"/>
             </a:solidFill>
             <a:prstDash val="solid"/>
             <a:miter lim="800000"/>
@@ -4833,14 +4865,14 @@
       </p:sp>
       <p:sp>
         <p:nvSpPr>
-          <p:cNvPr id="16" name="TextBox 15"/>
+          <p:cNvPr id="27" name="TextBox 26"/>
           <p:cNvSpPr txBox="1"/>
           <p:nvPr/>
         </p:nvSpPr>
         <p:spPr>
           <a:xfrm>
-            <a:off x="8178800" y="2260600"/>
-            <a:ext cx="3048000" cy="379591"/>
+            <a:off x="5283200" y="5939541"/>
+            <a:ext cx="1955800" cy="318036"/>
           </a:xfrm>
           <a:prstGeom prst="rect">
             <a:avLst/>
@@ -4854,33 +4886,85 @@
           <a:lstStyle/>
           <a:p>
             <a:r>
-              <a:rPr lang="en-US" b="1" smtClean="0">
+              <a:rPr lang="en-US" sz="1400" b="1" dirty="0" smtClean="0">
                 <a:solidFill>
                   <a:srgbClr val="F8FAFC"/>
                 </a:solidFill>
-                <a:latin typeface="Aptos Display"/>
+                <a:latin typeface="Aptos"/>
               </a:rPr>
-              <a:t>Implemented anchors</a:t>
-            </a:r>
-            <a:endParaRPr lang="en-US" b="1">
+              <a:t>Amin</a:t>
+            </a:r>
+            <a:endParaRPr lang="en-US" sz="1400" b="1" dirty="0">
               <a:solidFill>
                 <a:srgbClr val="F8FAFC"/>
               </a:solidFill>
-              <a:latin typeface="Aptos Display"/>
+              <a:latin typeface="Aptos"/>
             </a:endParaRPr>
           </a:p>
         </p:txBody>
       </p:sp>
       <p:sp>
         <p:nvSpPr>
-          <p:cNvPr id="17" name="TextBox 16"/>
+          <p:cNvPr id="28" name="Rounded Rectangle 27"/>
+          <p:cNvSpPr/>
+          <p:nvPr/>
+        </p:nvSpPr>
+        <p:spPr>
+          <a:xfrm>
+            <a:off x="7493000" y="5825241"/>
+            <a:ext cx="2159000" cy="533400"/>
+          </a:xfrm>
+          <a:prstGeom prst="roundRect">
+            <a:avLst/>
+          </a:prstGeom>
+          <a:solidFill>
+            <a:srgbClr val="1E293B"/>
+          </a:solidFill>
+          <a:ln w="12700" cap="flat" cmpd="sng" algn="ctr">
+            <a:solidFill>
+              <a:srgbClr val="475569"/>
+            </a:solidFill>
+            <a:prstDash val="solid"/>
+            <a:miter lim="800000"/>
+            <a:headEnd type="none" w="med" len="med"/>
+            <a:tailEnd type="none" w="med" len="med"/>
+          </a:ln>
+        </p:spPr>
+        <p:style>
+          <a:lnRef idx="2">
+            <a:schemeClr val="accent1">
+              <a:shade val="50000"/>
+            </a:schemeClr>
+          </a:lnRef>
+          <a:fillRef idx="1">
+            <a:schemeClr val="accent1"/>
+          </a:fillRef>
+          <a:effectRef idx="0">
+            <a:schemeClr val="accent1"/>
+          </a:effectRef>
+          <a:fontRef idx="minor">
+            <a:schemeClr val="lt1"/>
+          </a:fontRef>
+        </p:style>
+        <p:txBody>
+          <a:bodyPr rtlCol="0" anchor="ctr"/>
+          <a:lstStyle/>
+          <a:p>
+            <a:pPr algn="ctr"/>
+            <a:endParaRPr lang="en-US"/>
+          </a:p>
+        </p:txBody>
+      </p:sp>
+      <p:sp>
+        <p:nvSpPr>
+          <p:cNvPr id="29" name="TextBox 28"/>
           <p:cNvSpPr txBox="1"/>
           <p:nvPr/>
         </p:nvSpPr>
         <p:spPr>
           <a:xfrm>
-            <a:off x="8178800" y="2794000"/>
-            <a:ext cx="3048000" cy="2041585"/>
+            <a:off x="7594600" y="5939541"/>
+            <a:ext cx="1955800" cy="318036"/>
           </a:xfrm>
           <a:prstGeom prst="rect">
             <a:avLst/>
@@ -4894,65 +4978,119 @@
           <a:lstStyle/>
           <a:p>
             <a:r>
-              <a:rPr lang="en-US" sz="1400" smtClean="0">
+              <a:rPr lang="en-US" sz="1400" b="1" dirty="0" err="1" smtClean="0">
                 <a:solidFill>
-                  <a:srgbClr val="CBD5E1"/>
+                  <a:srgbClr val="F8FAFC"/>
                 </a:solidFill>
                 <a:latin typeface="Aptos"/>
               </a:rPr>
-              <a:t>backend/main.py mounts status, ingest, statutes, chat, and chats.</a:t>
-            </a:r>
-          </a:p>
-          <a:p>
-            <a:endParaRPr lang="en-US" sz="1400" smtClean="0">
+              <a:t>Liyu</a:t>
+            </a:r>
+            <a:endParaRPr lang="en-US" sz="1400" b="1" dirty="0">
               <a:solidFill>
-                <a:srgbClr val="CBD5E1"/>
+                <a:srgbClr val="F8FAFC"/>
               </a:solidFill>
               <a:latin typeface="Aptos"/>
             </a:endParaRPr>
           </a:p>
-          <a:p>
-            <a:r>
-              <a:rPr lang="en-US" sz="1400" smtClean="0">
+        </p:txBody>
+      </p:sp>
+      <p:sp>
+        <p:nvSpPr>
+          <p:cNvPr id="30" name="Rounded Rectangle 29"/>
+          <p:cNvSpPr/>
+          <p:nvPr/>
+        </p:nvSpPr>
+        <p:spPr>
+          <a:xfrm>
+            <a:off x="9804400" y="5834281"/>
+            <a:ext cx="2159000" cy="533400"/>
+          </a:xfrm>
+          <a:prstGeom prst="roundRect">
+            <a:avLst/>
+          </a:prstGeom>
+          <a:solidFill>
+            <a:srgbClr val="1E293B"/>
+          </a:solidFill>
+          <a:ln w="12700" cap="flat" cmpd="sng" algn="ctr">
+            <a:solidFill>
+              <a:srgbClr val="475569"/>
+            </a:solidFill>
+            <a:prstDash val="solid"/>
+            <a:miter lim="800000"/>
+            <a:headEnd type="none" w="med" len="med"/>
+            <a:tailEnd type="none" w="med" len="med"/>
+          </a:ln>
+        </p:spPr>
+        <p:style>
+          <a:lnRef idx="2">
+            <a:schemeClr val="accent1">
+              <a:shade val="50000"/>
+            </a:schemeClr>
+          </a:lnRef>
+          <a:fillRef idx="1">
+            <a:schemeClr val="accent1"/>
+          </a:fillRef>
+          <a:effectRef idx="0">
+            <a:schemeClr val="accent1"/>
+          </a:effectRef>
+          <a:fontRef idx="minor">
+            <a:schemeClr val="lt1"/>
+          </a:fontRef>
+        </p:style>
+        <p:txBody>
+          <a:bodyPr rtlCol="0" anchor="ctr"/>
+          <a:lstStyle/>
+          <a:p>
+            <a:pPr algn="ctr"/>
+            <a:endParaRPr lang="en-US"/>
+          </a:p>
+        </p:txBody>
+      </p:sp>
+      <p:sp>
+        <p:nvSpPr>
+          <p:cNvPr id="31" name="TextBox 30"/>
+          <p:cNvSpPr txBox="1"/>
+          <p:nvPr/>
+        </p:nvSpPr>
+        <p:spPr>
+          <a:xfrm>
+            <a:off x="9906000" y="5948581"/>
+            <a:ext cx="1955800" cy="318036"/>
+          </a:xfrm>
+          <a:prstGeom prst="rect">
+            <a:avLst/>
+          </a:prstGeom>
+          <a:noFill/>
+        </p:spPr>
+        <p:txBody>
+          <a:bodyPr vert="horz" wrap="square" lIns="101600" tIns="50800" rIns="101600" bIns="50800" rtlCol="0">
+            <a:spAutoFit/>
+          </a:bodyPr>
+          <a:lstStyle/>
+          <a:p>
+            <a:r>
+              <a:rPr lang="en-US" sz="1400" b="1" dirty="0" err="1" smtClean="0">
                 <a:solidFill>
-                  <a:srgbClr val="CBD5E1"/>
+                  <a:srgbClr val="F8FAFC"/>
                 </a:solidFill>
                 <a:latin typeface="Aptos"/>
               </a:rPr>
-              <a:t>Hybrid retrieval combines citation parsing, FTS5, Chroma, and RRF.</a:t>
-            </a:r>
-          </a:p>
-          <a:p>
-            <a:endParaRPr lang="en-US" sz="1400" smtClean="0">
+              <a:t>Bipon</a:t>
+            </a:r>
+            <a:endParaRPr lang="en-US" sz="1400" b="1" dirty="0">
               <a:solidFill>
-                <a:srgbClr val="CBD5E1"/>
+                <a:srgbClr val="F8FAFC"/>
               </a:solidFill>
               <a:latin typeface="Aptos"/>
             </a:endParaRPr>
           </a:p>
-          <a:p>
-            <a:r>
-              <a:rPr lang="en-US" sz="1400" smtClean="0">
-                <a:solidFill>
-                  <a:srgbClr val="CBD5E1"/>
-                </a:solidFill>
-                <a:latin typeface="Aptos"/>
-              </a:rPr>
-              <a:t>The frontend now uses a persistent chat workflow with inline statute cards and a source modal.</a:t>
-            </a:r>
-            <a:endParaRPr lang="en-US" sz="1400">
-              <a:solidFill>
-                <a:srgbClr val="CBD5E1"/>
-              </a:solidFill>
-              <a:latin typeface="Aptos"/>
-            </a:endParaRPr>
-          </a:p>
         </p:txBody>
       </p:sp>
     </p:spTree>
     <p:extLst>
       <p:ext uri="{BB962C8B-B14F-4D97-AF65-F5344CB8AC3E}">
-        <p14:creationId xmlns:p14="http://schemas.microsoft.com/office/powerpoint/2010/main" val="4167623871"/>
+        <p14:creationId xmlns:p14="http://schemas.microsoft.com/office/powerpoint/2010/main" val="4008931707"/>
       </p:ext>
     </p:extLst>
   </p:cSld>
@@ -5038,7 +5176,61 @@
                                           </p:stCondLst>
                                         </p:cTn>
                                         <p:tgtEl>
-                                          <p:spTgt spid="8"/>
+                                          <p:spTgt spid="15"/>
+                                        </p:tgtEl>
+                                        <p:attrNameLst>
+                                          <p:attrName>style.visibility</p:attrName>
+                                        </p:attrNameLst>
+                                      </p:cBhvr>
+                                      <p:to>
+                                        <p:strVal val="visible"/>
+                                      </p:to>
+                                    </p:set>
+                                  </p:childTnLst>
+                                </p:cTn>
+                              </p:par>
+                              <p:par>
+                                <p:cTn id="11" presetID="1" presetClass="entr" presetSubtype="0" fill="hold" grpId="0" nodeType="withEffect">
+                                  <p:stCondLst>
+                                    <p:cond delay="0"/>
+                                  </p:stCondLst>
+                                  <p:childTnLst>
+                                    <p:set>
+                                      <p:cBhvr>
+                                        <p:cTn id="12" dur="1" fill="hold">
+                                          <p:stCondLst>
+                                            <p:cond delay="0"/>
+                                          </p:stCondLst>
+                                        </p:cTn>
+                                        <p:tgtEl>
+                                          <p:spTgt spid="16"/>
+                                        </p:tgtEl>
+                                        <p:attrNameLst>
+                                          <p:attrName>style.visibility</p:attrName>
+                                        </p:attrNameLst>
+                                      </p:cBhvr>
+                                      <p:to>
+                                        <p:strVal val="visible"/>
+                                      </p:to>
+                                    </p:set>
+                                  </p:childTnLst>
+                                </p:cTn>
+                              </p:par>
+                              <p:par>
+                                <p:cTn id="13" presetID="1" presetClass="entr" presetSubtype="0" fill="hold" grpId="0" nodeType="withEffect">
+                                  <p:stCondLst>
+                                    <p:cond delay="0"/>
+                                  </p:stCondLst>
+                                  <p:childTnLst>
+                                    <p:set>
+                                      <p:cBhvr>
+                                        <p:cTn id="14" dur="1" fill="hold">
+                                          <p:stCondLst>
+                                            <p:cond delay="0"/>
+                                          </p:stCondLst>
+                                        </p:cTn>
+                                        <p:tgtEl>
+                                          <p:spTgt spid="17"/>
                                         </p:tgtEl>
                                         <p:attrNameLst>
                                           <p:attrName>style.visibility</p:attrName>
@@ -5058,32 +5250,32 @@
                     </p:cTn>
                   </p:par>
                   <p:par>
-                    <p:cTn id="11" fill="hold">
+                    <p:cTn id="15" fill="hold">
                       <p:stCondLst>
                         <p:cond delay="indefinite"/>
                       </p:stCondLst>
                       <p:childTnLst>
                         <p:par>
-                          <p:cTn id="12" fill="hold">
+                          <p:cTn id="16" fill="hold">
                             <p:stCondLst>
                               <p:cond delay="0"/>
                             </p:stCondLst>
                             <p:childTnLst>
                               <p:par>
-                                <p:cTn id="13" presetID="1" presetClass="entr" presetSubtype="0" fill="hold" grpId="0" nodeType="clickEffect">
+                                <p:cTn id="17" presetID="1" presetClass="entr" presetSubtype="0" fill="hold" grpId="0" nodeType="clickEffect">
                                   <p:stCondLst>
                                     <p:cond delay="0"/>
                                   </p:stCondLst>
                                   <p:childTnLst>
                                     <p:set>
                                       <p:cBhvr>
-                                        <p:cTn id="14" dur="1" fill="hold">
+                                        <p:cTn id="18" dur="1" fill="hold">
                                           <p:stCondLst>
                                             <p:cond delay="0"/>
                                           </p:stCondLst>
                                         </p:cTn>
                                         <p:tgtEl>
-                                          <p:spTgt spid="9"/>
+                                          <p:spTgt spid="22"/>
                                         </p:tgtEl>
                                         <p:attrNameLst>
                                           <p:attrName>style.visibility</p:attrName>
@@ -5097,20 +5289,20 @@
                                 </p:cTn>
                               </p:par>
                               <p:par>
-                                <p:cTn id="15" presetID="1" presetClass="entr" presetSubtype="0" fill="hold" grpId="0" nodeType="withEffect">
+                                <p:cTn id="19" presetID="1" presetClass="entr" presetSubtype="0" fill="hold" grpId="0" nodeType="withEffect">
                                   <p:stCondLst>
                                     <p:cond delay="0"/>
                                   </p:stCondLst>
                                   <p:childTnLst>
                                     <p:set>
                                       <p:cBhvr>
-                                        <p:cTn id="16" dur="1" fill="hold">
+                                        <p:cTn id="20" dur="1" fill="hold">
                                           <p:stCondLst>
                                             <p:cond delay="0"/>
                                           </p:stCondLst>
                                         </p:cTn>
                                         <p:tgtEl>
-                                          <p:spTgt spid="10"/>
+                                          <p:spTgt spid="23"/>
                                         </p:tgtEl>
                                         <p:attrNameLst>
                                           <p:attrName>style.visibility</p:attrName>
@@ -5130,32 +5322,32 @@
                     </p:cTn>
                   </p:par>
                   <p:par>
-                    <p:cTn id="17" fill="hold">
+                    <p:cTn id="21" fill="hold">
                       <p:stCondLst>
                         <p:cond delay="indefinite"/>
                       </p:stCondLst>
                       <p:childTnLst>
                         <p:par>
-                          <p:cTn id="18" fill="hold">
+                          <p:cTn id="22" fill="hold">
                             <p:stCondLst>
                               <p:cond delay="0"/>
                             </p:stCondLst>
                             <p:childTnLst>
                               <p:par>
-                                <p:cTn id="19" presetID="1" presetClass="entr" presetSubtype="0" fill="hold" grpId="0" nodeType="clickEffect">
+                                <p:cTn id="23" presetID="1" presetClass="entr" presetSubtype="0" fill="hold" grpId="0" nodeType="clickEffect">
                                   <p:stCondLst>
                                     <p:cond delay="0"/>
                                   </p:stCondLst>
                                   <p:childTnLst>
                                     <p:set>
                                       <p:cBhvr>
-                                        <p:cTn id="20" dur="1" fill="hold">
+                                        <p:cTn id="24" dur="1" fill="hold">
                                           <p:stCondLst>
                                             <p:cond delay="0"/>
                                           </p:stCondLst>
                                         </p:cTn>
                                         <p:tgtEl>
-                                          <p:spTgt spid="11"/>
+                                          <p:spTgt spid="24"/>
                                         </p:tgtEl>
                                         <p:attrNameLst>
                                           <p:attrName>style.visibility</p:attrName>
@@ -5169,20 +5361,20 @@
                                 </p:cTn>
                               </p:par>
                               <p:par>
-                                <p:cTn id="21" presetID="1" presetClass="entr" presetSubtype="0" fill="hold" grpId="0" nodeType="withEffect">
+                                <p:cTn id="25" presetID="1" presetClass="entr" presetSubtype="0" fill="hold" grpId="0" nodeType="withEffect">
                                   <p:stCondLst>
                                     <p:cond delay="0"/>
                                   </p:stCondLst>
                                   <p:childTnLst>
                                     <p:set>
                                       <p:cBhvr>
-                                        <p:cTn id="22" dur="1" fill="hold">
+                                        <p:cTn id="26" dur="1" fill="hold">
                                           <p:stCondLst>
                                             <p:cond delay="0"/>
                                           </p:stCondLst>
                                         </p:cTn>
                                         <p:tgtEl>
-                                          <p:spTgt spid="12"/>
+                                          <p:spTgt spid="25"/>
                                         </p:tgtEl>
                                         <p:attrNameLst>
                                           <p:attrName>style.visibility</p:attrName>
@@ -5202,32 +5394,32 @@
                     </p:cTn>
                   </p:par>
                   <p:par>
-                    <p:cTn id="23" fill="hold">
+                    <p:cTn id="27" fill="hold">
                       <p:stCondLst>
                         <p:cond delay="indefinite"/>
                       </p:stCondLst>
                       <p:childTnLst>
                         <p:par>
-                          <p:cTn id="24" fill="hold">
+                          <p:cTn id="28" fill="hold">
                             <p:stCondLst>
                               <p:cond delay="0"/>
                             </p:stCondLst>
                             <p:childTnLst>
                               <p:par>
-                                <p:cTn id="25" presetID="1" presetClass="entr" presetSubtype="0" fill="hold" grpId="0" nodeType="clickEffect">
+                                <p:cTn id="29" presetID="1" presetClass="entr" presetSubtype="0" fill="hold" grpId="0" nodeType="clickEffect">
                                   <p:stCondLst>
                                     <p:cond delay="0"/>
                                   </p:stCondLst>
                                   <p:childTnLst>
                                     <p:set>
                                       <p:cBhvr>
-                                        <p:cTn id="26" dur="1" fill="hold">
+                                        <p:cTn id="30" dur="1" fill="hold">
                                           <p:stCondLst>
                                             <p:cond delay="0"/>
                                           </p:stCondLst>
                                         </p:cTn>
                                         <p:tgtEl>
-                                          <p:spTgt spid="13"/>
+                                          <p:spTgt spid="26"/>
                                         </p:tgtEl>
                                         <p:attrNameLst>
                                           <p:attrName>style.visibility</p:attrName>
@@ -5241,20 +5433,20 @@
                                 </p:cTn>
                               </p:par>
                               <p:par>
-                                <p:cTn id="27" presetID="1" presetClass="entr" presetSubtype="0" fill="hold" grpId="0" nodeType="withEffect">
+                                <p:cTn id="31" presetID="1" presetClass="entr" presetSubtype="0" fill="hold" grpId="0" nodeType="withEffect">
                                   <p:stCondLst>
                                     <p:cond delay="0"/>
                                   </p:stCondLst>
                                   <p:childTnLst>
                                     <p:set>
                                       <p:cBhvr>
-                                        <p:cTn id="28" dur="1" fill="hold">
+                                        <p:cTn id="32" dur="1" fill="hold">
                                           <p:stCondLst>
                                             <p:cond delay="0"/>
                                           </p:stCondLst>
                                         </p:cTn>
                                         <p:tgtEl>
-                                          <p:spTgt spid="14"/>
+                                          <p:spTgt spid="27"/>
                                         </p:tgtEl>
                                         <p:attrNameLst>
                                           <p:attrName>style.visibility</p:attrName>
@@ -5274,32 +5466,32 @@
                     </p:cTn>
                   </p:par>
                   <p:par>
-                    <p:cTn id="29" fill="hold">
+                    <p:cTn id="33" fill="hold">
                       <p:stCondLst>
                         <p:cond delay="indefinite"/>
                       </p:stCondLst>
                       <p:childTnLst>
                         <p:par>
-                          <p:cTn id="30" fill="hold">
+                          <p:cTn id="34" fill="hold">
                             <p:stCondLst>
                               <p:cond delay="0"/>
                             </p:stCondLst>
                             <p:childTnLst>
                               <p:par>
-                                <p:cTn id="31" presetID="1" presetClass="entr" presetSubtype="0" fill="hold" grpId="0" nodeType="clickEffect">
+                                <p:cTn id="35" presetID="1" presetClass="entr" presetSubtype="0" fill="hold" grpId="0" nodeType="clickEffect">
                                   <p:stCondLst>
                                     <p:cond delay="0"/>
                                   </p:stCondLst>
                                   <p:childTnLst>
                                     <p:set>
                                       <p:cBhvr>
-                                        <p:cTn id="32" dur="1" fill="hold">
+                                        <p:cTn id="36" dur="1" fill="hold">
                                           <p:stCondLst>
                                             <p:cond delay="0"/>
                                           </p:stCondLst>
                                         </p:cTn>
                                         <p:tgtEl>
-                                          <p:spTgt spid="15"/>
+                                          <p:spTgt spid="28"/>
                                         </p:tgtEl>
                                         <p:attrNameLst>
                                           <p:attrName>style.visibility</p:attrName>
@@ -5313,20 +5505,65 @@
                                 </p:cTn>
                               </p:par>
                               <p:par>
-                                <p:cTn id="33" presetID="1" presetClass="entr" presetSubtype="0" fill="hold" grpId="0" nodeType="withEffect">
+                                <p:cTn id="37" presetID="1" presetClass="entr" presetSubtype="0" fill="hold" grpId="0" nodeType="withEffect">
                                   <p:stCondLst>
                                     <p:cond delay="0"/>
                                   </p:stCondLst>
                                   <p:childTnLst>
                                     <p:set>
                                       <p:cBhvr>
-                                        <p:cTn id="34" dur="1" fill="hold">
+                                        <p:cTn id="38" dur="1" fill="hold">
                                           <p:stCondLst>
                                             <p:cond delay="0"/>
                                           </p:stCondLst>
                                         </p:cTn>
                                         <p:tgtEl>
-                                          <p:spTgt spid="16"/>
+                                          <p:spTgt spid="29"/>
+                                        </p:tgtEl>
+                                        <p:attrNameLst>
+                                          <p:attrName>style.visibility</p:attrName>
+                                        </p:attrNameLst>
+                                      </p:cBhvr>
+                                      <p:to>
+                                        <p:strVal val="visible"/>
+                                      </p:to>
+                                    </p:set>
+                                  </p:childTnLst>
+                                </p:cTn>
+                              </p:par>
+                            </p:childTnLst>
+                          </p:cTn>
+                        </p:par>
+                      </p:childTnLst>
+                    </p:cTn>
+                  </p:par>
+                  <p:par>
+                    <p:cTn id="39" fill="hold">
+                      <p:stCondLst>
+                        <p:cond delay="indefinite"/>
+                      </p:stCondLst>
+                      <p:childTnLst>
+                        <p:par>
+                          <p:cTn id="40" fill="hold">
+                            <p:stCondLst>
+                              <p:cond delay="0"/>
+                            </p:stCondLst>
+                            <p:childTnLst>
+                              <p:par>
+                                <p:cTn id="41" presetID="1" presetClass="entr" presetSubtype="0" fill="hold" grpId="0" nodeType="clickEffect">
+                                  <p:stCondLst>
+                                    <p:cond delay="0"/>
+                                  </p:stCondLst>
+                                  <p:childTnLst>
+                                    <p:set>
+                                      <p:cBhvr>
+                                        <p:cTn id="42" dur="1" fill="hold">
+                                          <p:stCondLst>
+                                            <p:cond delay="0"/>
+                                          </p:stCondLst>
+                                        </p:cTn>
+                                        <p:tgtEl>
+                                          <p:spTgt spid="30"/>
                                         </p:tgtEl>
                                         <p:attrNameLst>
                                           <p:attrName>style.visibility</p:attrName>
@@ -5340,20 +5577,20 @@
                                 </p:cTn>
                               </p:par>
                               <p:par>
-                                <p:cTn id="35" presetID="1" presetClass="entr" presetSubtype="0" fill="hold" grpId="0" nodeType="withEffect">
+                                <p:cTn id="43" presetID="1" presetClass="entr" presetSubtype="0" fill="hold" grpId="0" nodeType="withEffect">
                                   <p:stCondLst>
                                     <p:cond delay="0"/>
                                   </p:stCondLst>
                                   <p:childTnLst>
                                     <p:set>
                                       <p:cBhvr>
-                                        <p:cTn id="36" dur="1" fill="hold">
+                                        <p:cTn id="44" dur="1" fill="hold">
                                           <p:stCondLst>
                                             <p:cond delay="0"/>
                                           </p:stCondLst>
                                         </p:cTn>
                                         <p:tgtEl>
-                                          <p:spTgt spid="17"/>
+                                          <p:spTgt spid="31"/>
                                         </p:tgtEl>
                                         <p:attrNameLst>
                                           <p:attrName>style.visibility</p:attrName>
@@ -5395,16 +5632,19 @@
     </p:tnLst>
     <p:bldLst>
       <p:bldP spid="7" grpId="0"/>
-      <p:bldP spid="8" grpId="0"/>
-      <p:bldP spid="9" grpId="0" animBg="1"/>
-      <p:bldP spid="10" grpId="0"/>
-      <p:bldP spid="11" grpId="0" animBg="1"/>
-      <p:bldP spid="12" grpId="0"/>
-      <p:bldP spid="13" grpId="0" animBg="1"/>
-      <p:bldP spid="14" grpId="0"/>
       <p:bldP spid="15" grpId="0" animBg="1"/>
       <p:bldP spid="16" grpId="0"/>
       <p:bldP spid="17" grpId="0"/>
+      <p:bldP spid="22" grpId="0" animBg="1"/>
+      <p:bldP spid="23" grpId="0"/>
+      <p:bldP spid="24" grpId="0" animBg="1"/>
+      <p:bldP spid="25" grpId="0"/>
+      <p:bldP spid="26" grpId="0" animBg="1"/>
+      <p:bldP spid="27" grpId="0"/>
+      <p:bldP spid="28" grpId="0" animBg="1"/>
+      <p:bldP spid="29" grpId="0"/>
+      <p:bldP spid="30" grpId="0" animBg="1"/>
+      <p:bldP spid="31" grpId="0"/>
     </p:bldLst>
   </p:timing>
 </p:sld>
@@ -7369,46 +7609,6 @@
             <a:endParaRPr lang="en-US" sz="1400">
               <a:solidFill>
                 <a:srgbClr val="CBD5E1"/>
-              </a:solidFill>
-              <a:latin typeface="Aptos"/>
-            </a:endParaRPr>
-          </a:p>
-        </p:txBody>
-      </p:sp>
-      <p:sp>
-        <p:nvSpPr>
-          <p:cNvPr id="22" name="TextBox 21"/>
-          <p:cNvSpPr txBox="1"/>
-          <p:nvPr/>
-        </p:nvSpPr>
-        <p:spPr>
-          <a:xfrm>
-            <a:off x="558800" y="5943600"/>
-            <a:ext cx="10998200" cy="302647"/>
-          </a:xfrm>
-          <a:prstGeom prst="rect">
-            <a:avLst/>
-          </a:prstGeom>
-          <a:noFill/>
-        </p:spPr>
-        <p:txBody>
-          <a:bodyPr vert="horz" wrap="square" lIns="101600" tIns="50800" rIns="101600" bIns="50800" rtlCol="0">
-            <a:spAutoFit/>
-          </a:bodyPr>
-          <a:lstStyle/>
-          <a:p>
-            <a:r>
-              <a:rPr lang="en-US" sz="1300" smtClean="0">
-                <a:solidFill>
-                  <a:srgbClr val="94A3B8"/>
-                </a:solidFill>
-                <a:latin typeface="Aptos"/>
-              </a:rPr>
-              <a:t>Important honesty: OpenClaw manifest files are still placeholders. The real working agent currently lives under backend/agent.</a:t>
-            </a:r>
-            <a:endParaRPr lang="en-US" sz="1300">
-              <a:solidFill>
-                <a:srgbClr val="94A3B8"/>
               </a:solidFill>
               <a:latin typeface="Aptos"/>
             </a:endParaRPr>
@@ -7928,51 +8128,6 @@
                       </p:childTnLst>
                     </p:cTn>
                   </p:par>
-                  <p:par>
-                    <p:cTn id="43" fill="hold">
-                      <p:stCondLst>
-                        <p:cond delay="indefinite"/>
-                      </p:stCondLst>
-                      <p:childTnLst>
-                        <p:par>
-                          <p:cTn id="44" fill="hold">
-                            <p:stCondLst>
-                              <p:cond delay="0"/>
-                            </p:stCondLst>
-                            <p:childTnLst>
-                              <p:par>
-                                <p:cTn id="45" presetID="1" presetClass="entr" presetSubtype="0" fill="hold" grpId="0" nodeType="clickEffect">
-                                  <p:stCondLst>
-                                    <p:cond delay="0"/>
-                                  </p:stCondLst>
-                                  <p:childTnLst>
-                                    <p:set>
-                                      <p:cBhvr>
-                                        <p:cTn id="46" dur="1" fill="hold">
-                                          <p:stCondLst>
-                                            <p:cond delay="0"/>
-                                          </p:stCondLst>
-                                        </p:cTn>
-                                        <p:tgtEl>
-                                          <p:spTgt spid="22"/>
-                                        </p:tgtEl>
-                                        <p:attrNameLst>
-                                          <p:attrName>style.visibility</p:attrName>
-                                        </p:attrNameLst>
-                                      </p:cBhvr>
-                                      <p:to>
-                                        <p:strVal val="visible"/>
-                                      </p:to>
-                                    </p:set>
-                                  </p:childTnLst>
-                                </p:cTn>
-                              </p:par>
-                            </p:childTnLst>
-                          </p:cTn>
-                        </p:par>
-                      </p:childTnLst>
-                    </p:cTn>
-                  </p:par>
                 </p:childTnLst>
               </p:cTn>
               <p:prevCondLst>
@@ -8010,7 +8165,6 @@
       <p:bldP spid="19" grpId="0" animBg="1"/>
       <p:bldP spid="20" grpId="0"/>
       <p:bldP spid="21" grpId="0"/>
-      <p:bldP spid="22" grpId="0"/>
     </p:bldLst>
   </p:timing>
 </p:sld>
@@ -10982,46 +11136,6 @@
           </a:p>
         </p:txBody>
       </p:sp>
-      <p:sp>
-        <p:nvSpPr>
-          <p:cNvPr id="21" name="TextBox 20"/>
-          <p:cNvSpPr txBox="1"/>
-          <p:nvPr/>
-        </p:nvSpPr>
-        <p:spPr>
-          <a:xfrm>
-            <a:off x="558800" y="5969000"/>
-            <a:ext cx="10998200" cy="471924"/>
-          </a:xfrm>
-          <a:prstGeom prst="rect">
-            <a:avLst/>
-          </a:prstGeom>
-          <a:noFill/>
-        </p:spPr>
-        <p:txBody>
-          <a:bodyPr vert="horz" wrap="square" lIns="101600" tIns="50800" rIns="101600" bIns="50800" rtlCol="0">
-            <a:spAutoFit/>
-          </a:bodyPr>
-          <a:lstStyle/>
-          <a:p>
-            <a:r>
-              <a:rPr lang="en-US" sz="1200" smtClean="0">
-                <a:solidFill>
-                  <a:srgbClr val="94A3B8"/>
-                </a:solidFill>
-                <a:latin typeface="Aptos"/>
-              </a:rPr>
-              <a:t>Honest current state: the local DB in this workspace is empty right now, so the deck reflects verified code behavior and tests rather than a freshly populated live corpus.</a:t>
-            </a:r>
-            <a:endParaRPr lang="en-US" sz="1200">
-              <a:solidFill>
-                <a:srgbClr val="94A3B8"/>
-              </a:solidFill>
-              <a:latin typeface="Aptos"/>
-            </a:endParaRPr>
-          </a:p>
-        </p:txBody>
-      </p:sp>
     </p:spTree>
     <p:extLst>
       <p:ext uri="{BB962C8B-B14F-4D97-AF65-F5344CB8AC3E}">
@@ -11508,51 +11622,6 @@
                       </p:childTnLst>
                     </p:cTn>
                   </p:par>
-                  <p:par>
-                    <p:cTn id="41" fill="hold">
-                      <p:stCondLst>
-                        <p:cond delay="indefinite"/>
-                      </p:stCondLst>
-                      <p:childTnLst>
-                        <p:par>
-                          <p:cTn id="42" fill="hold">
-                            <p:stCondLst>
-                              <p:cond delay="0"/>
-                            </p:stCondLst>
-                            <p:childTnLst>
-                              <p:par>
-                                <p:cTn id="43" presetID="1" presetClass="entr" presetSubtype="0" fill="hold" grpId="0" nodeType="clickEffect">
-                                  <p:stCondLst>
-                                    <p:cond delay="0"/>
-                                  </p:stCondLst>
-                                  <p:childTnLst>
-                                    <p:set>
-                                      <p:cBhvr>
-                                        <p:cTn id="44" dur="1" fill="hold">
-                                          <p:stCondLst>
-                                            <p:cond delay="0"/>
-                                          </p:stCondLst>
-                                        </p:cTn>
-                                        <p:tgtEl>
-                                          <p:spTgt spid="21"/>
-                                        </p:tgtEl>
-                                        <p:attrNameLst>
-                                          <p:attrName>style.visibility</p:attrName>
-                                        </p:attrNameLst>
-                                      </p:cBhvr>
-                                      <p:to>
-                                        <p:strVal val="visible"/>
-                                      </p:to>
-                                    </p:set>
-                                  </p:childTnLst>
-                                </p:cTn>
-                              </p:par>
-                            </p:childTnLst>
-                          </p:cTn>
-                        </p:par>
-                      </p:childTnLst>
-                    </p:cTn>
-                  </p:par>
                 </p:childTnLst>
               </p:cTn>
               <p:prevCondLst>
@@ -11589,7 +11658,6 @@
       <p:bldP spid="18" grpId="0"/>
       <p:bldP spid="19" grpId="0" animBg="1"/>
       <p:bldP spid="20" grpId="0"/>
-      <p:bldP spid="21" grpId="0"/>
     </p:bldLst>
   </p:timing>
 </p:sld>
@@ -14169,7 +14237,7 @@
         <p:spPr>
           <a:xfrm>
             <a:off x="8255000" y="4089400"/>
-            <a:ext cx="2717800" cy="902811"/>
+            <a:ext cx="2717800" cy="702756"/>
           </a:xfrm>
           <a:prstGeom prst="rect">
             <a:avLst/>
@@ -14183,6 +14251,24 @@
           <a:lstStyle/>
           <a:p>
             <a:pPr algn="ctr"/>
+            <a:r>
+              <a:rPr lang="en-US" sz="1300" dirty="0" smtClean="0">
+                <a:solidFill>
+                  <a:srgbClr val="CBD5E1"/>
+                </a:solidFill>
+                <a:latin typeface="Aptos"/>
+              </a:rPr>
+              <a:t>If the agent leaves the local corpus, it uses a </a:t>
+            </a:r>
+            <a:r>
+              <a:rPr lang="en-US" sz="1300" err="1" smtClean="0">
+                <a:solidFill>
+                  <a:srgbClr val="CBD5E1"/>
+                </a:solidFill>
+                <a:latin typeface="Aptos"/>
+              </a:rPr>
+              <a:t>Firecrawl</a:t>
+            </a:r>
             <a:r>
               <a:rPr lang="en-US" sz="1300" smtClean="0">
                 <a:solidFill>
@@ -14190,9 +14276,18 @@
                 </a:solidFill>
                 <a:latin typeface="Aptos"/>
               </a:rPr>
-              <a:t>If the agent leaves the local corpus, it uses a Firecrawl-backed search that rejects non-whitelisted domains server-side.</a:t>
-            </a:r>
-            <a:endParaRPr lang="en-US" sz="1300">
+              <a:t>-backed </a:t>
+            </a:r>
+            <a:r>
+              <a:rPr lang="en-US" sz="1300" smtClean="0">
+                <a:solidFill>
+                  <a:srgbClr val="CBD5E1"/>
+                </a:solidFill>
+                <a:latin typeface="Aptos"/>
+              </a:rPr>
+              <a:t>search.</a:t>
+            </a:r>
+            <a:endParaRPr lang="en-US" sz="1300" dirty="0">
               <a:solidFill>
                 <a:srgbClr val="CBD5E1"/>
               </a:solidFill>
@@ -14261,7 +14356,7 @@
         </p:nvSpPr>
         <p:spPr>
           <a:xfrm>
-            <a:off x="1828800" y="5765800"/>
+            <a:off x="1778000" y="5648771"/>
             <a:ext cx="8458200" cy="564257"/>
           </a:xfrm>
           <a:prstGeom prst="rect">
@@ -14277,7 +14372,7 @@
           <a:p>
             <a:pPr algn="ctr"/>
             <a:r>
-              <a:rPr lang="en-US" sz="1500" b="1" smtClean="0">
+              <a:rPr lang="en-US" sz="1500" b="1" dirty="0" smtClean="0">
                 <a:solidFill>
                   <a:srgbClr val="F8FAFC"/>
                 </a:solidFill>
@@ -14285,7 +14380,7 @@
               </a:rPr>
               <a:t>If no source supports a claim, the prompt instructs the agent to mark it unsupported rather than silently inventing or deleting it.</a:t>
             </a:r>
-            <a:endParaRPr lang="en-US" sz="1500" b="1">
+            <a:endParaRPr lang="en-US" sz="1500" b="1" dirty="0">
               <a:solidFill>
                 <a:srgbClr val="F8FAFC"/>
               </a:solidFill>
@@ -14804,7 +14899,7 @@
 </file>
 
 <file path=ppt/slides/slide8.xml><?xml version="1.0" encoding="utf-8"?>
-<p:sld xmlns:a="http://schemas.openxmlformats.org/drawingml/2006/main" xmlns:r="http://schemas.openxmlformats.org/officeDocument/2006/relationships" xmlns:p="http://schemas.openxmlformats.org/presentationml/2006/main">
+<p:sld xmlns:a="http://schemas.openxmlformats.org/drawingml/2006/main" xmlns:r="http://schemas.openxmlformats.org/officeDocument/2006/relationships" xmlns:p="http://schemas.openxmlformats.org/presentationml/2006/main" show="0">
   <p:cSld>
     <p:spTree>
       <p:nvGrpSpPr>
@@ -15652,6 +15747,14 @@
   <p:clrMapOvr>
     <a:masterClrMapping/>
   </p:clrMapOvr>
+  <mc:AlternateContent xmlns:mc="http://schemas.openxmlformats.org/markup-compatibility/2006">
+    <mc:Choice xmlns:p14="http://schemas.microsoft.com/office/powerpoint/2010/main" Requires="p14">
+      <p:transition spd="slow" p14:dur="2000"/>
+    </mc:Choice>
+    <mc:Fallback>
+      <p:transition spd="slow"/>
+    </mc:Fallback>
+  </mc:AlternateContent>
   <p:timing>
     <p:tnLst>
       <p:par>
@@ -16711,47 +16814,6 @@
           </a:p>
         </p:txBody>
       </p:sp>
-      <p:sp>
-        <p:nvSpPr>
-          <p:cNvPr id="14" name="TextBox 13"/>
-          <p:cNvSpPr txBox="1"/>
-          <p:nvPr/>
-        </p:nvSpPr>
-        <p:spPr>
-          <a:xfrm>
-            <a:off x="1422400" y="5130800"/>
-            <a:ext cx="9347200" cy="595035"/>
-          </a:xfrm>
-          <a:prstGeom prst="rect">
-            <a:avLst/>
-          </a:prstGeom>
-          <a:noFill/>
-        </p:spPr>
-        <p:txBody>
-          <a:bodyPr vert="horz" wrap="square" lIns="101600" tIns="50800" rIns="101600" bIns="50800" rtlCol="0">
-            <a:spAutoFit/>
-          </a:bodyPr>
-          <a:lstStyle/>
-          <a:p>
-            <a:pPr algn="ctr"/>
-            <a:r>
-              <a:rPr lang="en-US" sz="1600" smtClean="0">
-                <a:solidFill>
-                  <a:srgbClr val="CBD5E1"/>
-                </a:solidFill>
-                <a:latin typeface="Aptos"/>
-              </a:rPr>
-              <a:t>Recommended close: show the chat flow, open the statute modal, and end on the fact that the system exposes its evidence instead of hiding it.</a:t>
-            </a:r>
-            <a:endParaRPr lang="en-US" sz="1600">
-              <a:solidFill>
-                <a:srgbClr val="CBD5E1"/>
-              </a:solidFill>
-              <a:latin typeface="Aptos"/>
-            </a:endParaRPr>
-          </a:p>
-        </p:txBody>
-      </p:sp>
     </p:spTree>
     <p:extLst>
       <p:ext uri="{BB962C8B-B14F-4D97-AF65-F5344CB8AC3E}">
@@ -17031,51 +17093,6 @@
                       </p:childTnLst>
                     </p:cTn>
                   </p:par>
-                  <p:par>
-                    <p:cTn id="25" fill="hold">
-                      <p:stCondLst>
-                        <p:cond delay="indefinite"/>
-                      </p:stCondLst>
-                      <p:childTnLst>
-                        <p:par>
-                          <p:cTn id="26" fill="hold">
-                            <p:stCondLst>
-                              <p:cond delay="0"/>
-                            </p:stCondLst>
-                            <p:childTnLst>
-                              <p:par>
-                                <p:cTn id="27" presetID="1" presetClass="entr" presetSubtype="0" fill="hold" grpId="0" nodeType="clickEffect">
-                                  <p:stCondLst>
-                                    <p:cond delay="0"/>
-                                  </p:stCondLst>
-                                  <p:childTnLst>
-                                    <p:set>
-                                      <p:cBhvr>
-                                        <p:cTn id="28" dur="1" fill="hold">
-                                          <p:stCondLst>
-                                            <p:cond delay="0"/>
-                                          </p:stCondLst>
-                                        </p:cTn>
-                                        <p:tgtEl>
-                                          <p:spTgt spid="14"/>
-                                        </p:tgtEl>
-                                        <p:attrNameLst>
-                                          <p:attrName>style.visibility</p:attrName>
-                                        </p:attrNameLst>
-                                      </p:cBhvr>
-                                      <p:to>
-                                        <p:strVal val="visible"/>
-                                      </p:to>
-                                    </p:set>
-                                  </p:childTnLst>
-                                </p:cTn>
-                              </p:par>
-                            </p:childTnLst>
-                          </p:cTn>
-                        </p:par>
-                      </p:childTnLst>
-                    </p:cTn>
-                  </p:par>
                 </p:childTnLst>
               </p:cTn>
               <p:prevCondLst>
@@ -17105,7 +17122,6 @@
       <p:bldP spid="11" grpId="0"/>
       <p:bldP spid="12" grpId="0"/>
       <p:bldP spid="13" grpId="0"/>
-      <p:bldP spid="14" grpId="0"/>
     </p:bldLst>
   </p:timing>
 </p:sld>
